--- a/topic04/talk-1/ReactJS_01.pptx
+++ b/topic04/talk-1/ReactJS_01.pptx
@@ -5,24 +5,26 @@
     <p:sldMasterId id="2147483648" r:id="rId1"/>
   </p:sldMasterIdLst>
   <p:notesMasterIdLst>
-    <p:notesMasterId r:id="rId17"/>
+    <p:notesMasterId r:id="rId19"/>
   </p:notesMasterIdLst>
   <p:sldIdLst>
     <p:sldId id="325" r:id="rId2"/>
-    <p:sldId id="627" r:id="rId3"/>
-    <p:sldId id="552" r:id="rId4"/>
-    <p:sldId id="264" r:id="rId5"/>
-    <p:sldId id="531" r:id="rId6"/>
-    <p:sldId id="571" r:id="rId7"/>
-    <p:sldId id="677" r:id="rId8"/>
-    <p:sldId id="632" r:id="rId9"/>
-    <p:sldId id="572" r:id="rId10"/>
-    <p:sldId id="674" r:id="rId11"/>
-    <p:sldId id="591" r:id="rId12"/>
-    <p:sldId id="615" r:id="rId13"/>
-    <p:sldId id="541" r:id="rId14"/>
-    <p:sldId id="610" r:id="rId15"/>
-    <p:sldId id="609" r:id="rId16"/>
+    <p:sldId id="679" r:id="rId3"/>
+    <p:sldId id="678" r:id="rId4"/>
+    <p:sldId id="627" r:id="rId5"/>
+    <p:sldId id="552" r:id="rId6"/>
+    <p:sldId id="264" r:id="rId7"/>
+    <p:sldId id="531" r:id="rId8"/>
+    <p:sldId id="571" r:id="rId9"/>
+    <p:sldId id="677" r:id="rId10"/>
+    <p:sldId id="632" r:id="rId11"/>
+    <p:sldId id="572" r:id="rId12"/>
+    <p:sldId id="674" r:id="rId13"/>
+    <p:sldId id="591" r:id="rId14"/>
+    <p:sldId id="615" r:id="rId15"/>
+    <p:sldId id="541" r:id="rId16"/>
+    <p:sldId id="610" r:id="rId17"/>
+    <p:sldId id="609" r:id="rId18"/>
   </p:sldIdLst>
   <p:sldSz cx="12192000" cy="6858000"/>
   <p:notesSz cx="6858000" cy="9144000"/>
@@ -4305,6 +4307,131 @@
       </p:grpSpPr>
       <p:sp>
         <p:nvSpPr>
+          <p:cNvPr id="2" name="Slide Image Placeholder 1"/>
+          <p:cNvSpPr>
+            <a:spLocks noGrp="1" noRot="1" noChangeAspect="1"/>
+          </p:cNvSpPr>
+          <p:nvPr>
+            <p:ph type="sldImg"/>
+          </p:nvPr>
+        </p:nvSpPr>
+        <p:spPr>
+          <a:xfrm>
+            <a:off x="381000" y="685800"/>
+            <a:ext cx="6096000" cy="3429000"/>
+          </a:xfrm>
+        </p:spPr>
+      </p:sp>
+      <p:sp>
+        <p:nvSpPr>
+          <p:cNvPr id="3" name="Notes Placeholder 2"/>
+          <p:cNvSpPr>
+            <a:spLocks noGrp="1"/>
+          </p:cNvSpPr>
+          <p:nvPr>
+            <p:ph type="body" idx="1"/>
+          </p:nvPr>
+        </p:nvSpPr>
+        <p:spPr/>
+        <p:txBody>
+          <a:bodyPr/>
+          <a:lstStyle/>
+          <a:p>
+            <a:r>
+              <a:rPr lang="en-IE" b="0" i="0" dirty="0">
+                <a:solidFill>
+                  <a:srgbClr val="0D0D0D"/>
+                </a:solidFill>
+                <a:effectLst/>
+                <a:latin typeface="Söhne"/>
+              </a:rPr>
+              <a:t>It allows you to write HTML tags in TypeScript files. TypeScript supports JSX and provides type-checking for JSX code, enabling developers to use JSX syntax within TypeScript files (.</a:t>
+            </a:r>
+            <a:r>
+              <a:rPr lang="en-IE" b="0" i="0" dirty="0" err="1">
+                <a:solidFill>
+                  <a:srgbClr val="0D0D0D"/>
+                </a:solidFill>
+                <a:effectLst/>
+                <a:latin typeface="Söhne"/>
+              </a:rPr>
+              <a:t>tsx</a:t>
+            </a:r>
+            <a:r>
+              <a:rPr lang="en-IE" b="0" i="0" dirty="0">
+                <a:solidFill>
+                  <a:srgbClr val="0D0D0D"/>
+                </a:solidFill>
+                <a:effectLst/>
+                <a:latin typeface="Söhne"/>
+              </a:rPr>
+              <a:t> extension) for building user interfaces in a more expressive and HTML-like syntax.</a:t>
+            </a:r>
+            <a:endParaRPr lang="en-IE" dirty="0"/>
+          </a:p>
+        </p:txBody>
+      </p:sp>
+      <p:sp>
+        <p:nvSpPr>
+          <p:cNvPr id="4" name="Slide Number Placeholder 3"/>
+          <p:cNvSpPr>
+            <a:spLocks noGrp="1"/>
+          </p:cNvSpPr>
+          <p:nvPr>
+            <p:ph type="sldNum" sz="quarter" idx="5"/>
+          </p:nvPr>
+        </p:nvSpPr>
+        <p:spPr/>
+        <p:txBody>
+          <a:bodyPr/>
+          <a:lstStyle/>
+          <a:p>
+            <a:pPr>
+              <a:defRPr/>
+            </a:pPr>
+            <a:fld id="{59B5789E-C2A1-4F06-AD49-D6F9F59FBA85}" type="slidenum">
+              <a:rPr lang="en-US" altLang="en-US" smtClean="0"/>
+              <a:pPr>
+                <a:defRPr/>
+              </a:pPr>
+              <a:t>13</a:t>
+            </a:fld>
+            <a:endParaRPr lang="en-US" altLang="en-US"/>
+          </a:p>
+        </p:txBody>
+      </p:sp>
+    </p:spTree>
+    <p:extLst>
+      <p:ext uri="{BB962C8B-B14F-4D97-AF65-F5344CB8AC3E}">
+        <p14:creationId xmlns:p14="http://schemas.microsoft.com/office/powerpoint/2010/main" val="4258851525"/>
+      </p:ext>
+    </p:extLst>
+  </p:cSld>
+  <p:clrMapOvr>
+    <a:masterClrMapping/>
+  </p:clrMapOvr>
+</p:notes>
+</file>
+
+<file path=ppt/notesSlides/notesSlide11.xml><?xml version="1.0" encoding="utf-8"?>
+<p:notes xmlns:a="http://schemas.openxmlformats.org/drawingml/2006/main" xmlns:r="http://schemas.openxmlformats.org/officeDocument/2006/relationships" xmlns:p="http://schemas.openxmlformats.org/presentationml/2006/main">
+  <p:cSld>
+    <p:spTree>
+      <p:nvGrpSpPr>
+        <p:cNvPr id="1" name=""/>
+        <p:cNvGrpSpPr/>
+        <p:nvPr/>
+      </p:nvGrpSpPr>
+      <p:grpSpPr>
+        <a:xfrm>
+          <a:off x="0" y="0"/>
+          <a:ext cx="0" cy="0"/>
+          <a:chOff x="0" y="0"/>
+          <a:chExt cx="0" cy="0"/>
+        </a:xfrm>
+      </p:grpSpPr>
+      <p:sp>
+        <p:nvSpPr>
           <p:cNvPr id="27649" name="Slide Image Placeholder 1">
             <a:extLst>
               <a:ext uri="{FF2B5EF4-FFF2-40B4-BE49-F238E27FC236}">
@@ -4542,7 +4669,7 @@
             <a:fld id="{5BF2117E-EA09-4191-91CB-5C9296EDC926}" type="slidenum">
               <a:rPr lang="en-US" altLang="en-US" smtClean="0"/>
               <a:pPr/>
-              <a:t>14</a:t>
+              <a:t>16</a:t>
             </a:fld>
             <a:endParaRPr lang="en-US" altLang="en-US"/>
           </a:p>
@@ -4557,6 +4684,96 @@
 </file>
 
 <file path=ppt/notesSlides/notesSlide2.xml><?xml version="1.0" encoding="utf-8"?>
+<p:notes xmlns:a="http://schemas.openxmlformats.org/drawingml/2006/main" xmlns:r="http://schemas.openxmlformats.org/officeDocument/2006/relationships" xmlns:p="http://schemas.openxmlformats.org/presentationml/2006/main">
+  <p:cSld>
+    <p:spTree>
+      <p:nvGrpSpPr>
+        <p:cNvPr id="1" name=""/>
+        <p:cNvGrpSpPr/>
+        <p:nvPr/>
+      </p:nvGrpSpPr>
+      <p:grpSpPr>
+        <a:xfrm>
+          <a:off x="0" y="0"/>
+          <a:ext cx="0" cy="0"/>
+          <a:chOff x="0" y="0"/>
+          <a:chExt cx="0" cy="0"/>
+        </a:xfrm>
+      </p:grpSpPr>
+      <p:sp>
+        <p:nvSpPr>
+          <p:cNvPr id="2" name="Slide Image Placeholder 1"/>
+          <p:cNvSpPr>
+            <a:spLocks noGrp="1" noRot="1" noChangeAspect="1"/>
+          </p:cNvSpPr>
+          <p:nvPr>
+            <p:ph type="sldImg"/>
+          </p:nvPr>
+        </p:nvSpPr>
+        <p:spPr/>
+      </p:sp>
+      <p:sp>
+        <p:nvSpPr>
+          <p:cNvPr id="3" name="Notes Placeholder 2"/>
+          <p:cNvSpPr>
+            <a:spLocks noGrp="1"/>
+          </p:cNvSpPr>
+          <p:nvPr>
+            <p:ph type="body" idx="1"/>
+          </p:nvPr>
+        </p:nvSpPr>
+        <p:spPr/>
+        <p:txBody>
+          <a:bodyPr/>
+          <a:lstStyle/>
+          <a:p>
+            <a:endParaRPr lang="en-IE" dirty="0"/>
+          </a:p>
+        </p:txBody>
+      </p:sp>
+      <p:sp>
+        <p:nvSpPr>
+          <p:cNvPr id="4" name="Slide Number Placeholder 3"/>
+          <p:cNvSpPr>
+            <a:spLocks noGrp="1"/>
+          </p:cNvSpPr>
+          <p:nvPr>
+            <p:ph type="sldNum" sz="quarter" idx="5"/>
+          </p:nvPr>
+        </p:nvSpPr>
+        <p:spPr/>
+        <p:txBody>
+          <a:bodyPr/>
+          <a:lstStyle/>
+          <a:p>
+            <a:pPr>
+              <a:defRPr/>
+            </a:pPr>
+            <a:fld id="{59B5789E-C2A1-4F06-AD49-D6F9F59FBA85}" type="slidenum">
+              <a:rPr lang="en-US" altLang="en-US" smtClean="0"/>
+              <a:pPr>
+                <a:defRPr/>
+              </a:pPr>
+              <a:t>3</a:t>
+            </a:fld>
+            <a:endParaRPr lang="en-US" altLang="en-US"/>
+          </a:p>
+        </p:txBody>
+      </p:sp>
+    </p:spTree>
+    <p:extLst>
+      <p:ext uri="{BB962C8B-B14F-4D97-AF65-F5344CB8AC3E}">
+        <p14:creationId xmlns:p14="http://schemas.microsoft.com/office/powerpoint/2010/main" val="1726335478"/>
+      </p:ext>
+    </p:extLst>
+  </p:cSld>
+  <p:clrMapOvr>
+    <a:masterClrMapping/>
+  </p:clrMapOvr>
+</p:notes>
+</file>
+
+<file path=ppt/notesSlides/notesSlide3.xml><?xml version="1.0" encoding="utf-8"?>
 <p:notes xmlns:a="http://schemas.openxmlformats.org/drawingml/2006/main" xmlns:r="http://schemas.openxmlformats.org/officeDocument/2006/relationships" xmlns:p="http://schemas.openxmlformats.org/presentationml/2006/main">
   <p:cSld>
     <p:spTree>
@@ -4642,7 +4859,7 @@
               <a:pPr>
                 <a:defRPr/>
               </a:pPr>
-              <a:t>2</a:t>
+              <a:t>4</a:t>
             </a:fld>
             <a:endParaRPr lang="en-US" altLang="en-US"/>
           </a:p>
@@ -4661,7 +4878,7 @@
 </p:notes>
 </file>
 
-<file path=ppt/notesSlides/notesSlide3.xml><?xml version="1.0" encoding="utf-8"?>
+<file path=ppt/notesSlides/notesSlide4.xml><?xml version="1.0" encoding="utf-8"?>
 <p:notes xmlns:a="http://schemas.openxmlformats.org/drawingml/2006/main" xmlns:r="http://schemas.openxmlformats.org/officeDocument/2006/relationships" xmlns:p="http://schemas.openxmlformats.org/presentationml/2006/main">
   <p:cSld>
     <p:spTree>
@@ -4737,7 +4954,7 @@
               <a:pPr>
                 <a:defRPr/>
               </a:pPr>
-              <a:t>3</a:t>
+              <a:t>5</a:t>
             </a:fld>
             <a:endParaRPr lang="en-US" altLang="en-US"/>
           </a:p>
@@ -4756,7 +4973,7 @@
 </p:notes>
 </file>
 
-<file path=ppt/notesSlides/notesSlide4.xml><?xml version="1.0" encoding="utf-8"?>
+<file path=ppt/notesSlides/notesSlide5.xml><?xml version="1.0" encoding="utf-8"?>
 <p:notes xmlns:a="http://schemas.openxmlformats.org/drawingml/2006/main" xmlns:r="http://schemas.openxmlformats.org/officeDocument/2006/relationships" xmlns:p="http://schemas.openxmlformats.org/presentationml/2006/main">
   <p:cSld>
     <p:spTree>
@@ -4947,7 +5164,7 @@
               <a:pPr>
                 <a:defRPr/>
               </a:pPr>
-              <a:t>5</a:t>
+              <a:t>7</a:t>
             </a:fld>
             <a:endParaRPr lang="en-US" altLang="en-US"/>
           </a:p>
@@ -4966,7 +5183,7 @@
 </p:notes>
 </file>
 
-<file path=ppt/notesSlides/notesSlide5.xml><?xml version="1.0" encoding="utf-8"?>
+<file path=ppt/notesSlides/notesSlide6.xml><?xml version="1.0" encoding="utf-8"?>
 <p:notes xmlns:a="http://schemas.openxmlformats.org/drawingml/2006/main" xmlns:r="http://schemas.openxmlformats.org/officeDocument/2006/relationships" xmlns:p="http://schemas.openxmlformats.org/presentationml/2006/main">
   <p:cSld>
     <p:spTree>
@@ -5116,7 +5333,7 @@
               <a:pPr>
                 <a:defRPr/>
               </a:pPr>
-              <a:t>6</a:t>
+              <a:t>8</a:t>
             </a:fld>
             <a:endParaRPr lang="en-US" altLang="en-US"/>
           </a:p>
@@ -5135,7 +5352,7 @@
 </p:notes>
 </file>
 
-<file path=ppt/notesSlides/notesSlide6.xml><?xml version="1.0" encoding="utf-8"?>
+<file path=ppt/notesSlides/notesSlide7.xml><?xml version="1.0" encoding="utf-8"?>
 <p:notes xmlns:a="http://schemas.openxmlformats.org/drawingml/2006/main" xmlns:r="http://schemas.openxmlformats.org/officeDocument/2006/relationships" xmlns:p="http://schemas.openxmlformats.org/presentationml/2006/main">
   <p:cSld>
     <p:spTree>
@@ -5354,7 +5571,7 @@
               <a:pPr>
                 <a:defRPr/>
               </a:pPr>
-              <a:t>7</a:t>
+              <a:t>9</a:t>
             </a:fld>
             <a:endParaRPr lang="en-US" altLang="en-US"/>
           </a:p>
@@ -5373,7 +5590,7 @@
 </p:notes>
 </file>
 
-<file path=ppt/notesSlides/notesSlide7.xml><?xml version="1.0" encoding="utf-8"?>
+<file path=ppt/notesSlides/notesSlide8.xml><?xml version="1.0" encoding="utf-8"?>
 <p:notes xmlns:a="http://schemas.openxmlformats.org/drawingml/2006/main" xmlns:r="http://schemas.openxmlformats.org/officeDocument/2006/relationships" xmlns:p="http://schemas.openxmlformats.org/presentationml/2006/main">
   <p:cSld>
     <p:spTree>
@@ -5664,7 +5881,7 @@
               <a:pPr>
                 <a:defRPr/>
               </a:pPr>
-              <a:t>9</a:t>
+              <a:t>11</a:t>
             </a:fld>
             <a:endParaRPr lang="en-US" altLang="en-US"/>
           </a:p>
@@ -5683,7 +5900,7 @@
 </p:notes>
 </file>
 
-<file path=ppt/notesSlides/notesSlide8.xml><?xml version="1.0" encoding="utf-8"?>
+<file path=ppt/notesSlides/notesSlide9.xml><?xml version="1.0" encoding="utf-8"?>
 <p:notes xmlns:a="http://schemas.openxmlformats.org/drawingml/2006/main" xmlns:r="http://schemas.openxmlformats.org/officeDocument/2006/relationships" xmlns:p="http://schemas.openxmlformats.org/presentationml/2006/main">
   <p:cSld>
     <p:spTree>
@@ -5934,7 +6151,7 @@
               <a:pPr>
                 <a:defRPr/>
               </a:pPr>
-              <a:t>10</a:t>
+              <a:t>12</a:t>
             </a:fld>
             <a:endParaRPr lang="en-US" altLang="en-US"/>
           </a:p>
@@ -5944,131 +6161,6 @@
     <p:extLst>
       <p:ext uri="{BB962C8B-B14F-4D97-AF65-F5344CB8AC3E}">
         <p14:creationId xmlns:p14="http://schemas.microsoft.com/office/powerpoint/2010/main" val="1379595721"/>
-      </p:ext>
-    </p:extLst>
-  </p:cSld>
-  <p:clrMapOvr>
-    <a:masterClrMapping/>
-  </p:clrMapOvr>
-</p:notes>
-</file>
-
-<file path=ppt/notesSlides/notesSlide9.xml><?xml version="1.0" encoding="utf-8"?>
-<p:notes xmlns:a="http://schemas.openxmlformats.org/drawingml/2006/main" xmlns:r="http://schemas.openxmlformats.org/officeDocument/2006/relationships" xmlns:p="http://schemas.openxmlformats.org/presentationml/2006/main">
-  <p:cSld>
-    <p:spTree>
-      <p:nvGrpSpPr>
-        <p:cNvPr id="1" name=""/>
-        <p:cNvGrpSpPr/>
-        <p:nvPr/>
-      </p:nvGrpSpPr>
-      <p:grpSpPr>
-        <a:xfrm>
-          <a:off x="0" y="0"/>
-          <a:ext cx="0" cy="0"/>
-          <a:chOff x="0" y="0"/>
-          <a:chExt cx="0" cy="0"/>
-        </a:xfrm>
-      </p:grpSpPr>
-      <p:sp>
-        <p:nvSpPr>
-          <p:cNvPr id="2" name="Slide Image Placeholder 1"/>
-          <p:cNvSpPr>
-            <a:spLocks noGrp="1" noRot="1" noChangeAspect="1"/>
-          </p:cNvSpPr>
-          <p:nvPr>
-            <p:ph type="sldImg"/>
-          </p:nvPr>
-        </p:nvSpPr>
-        <p:spPr>
-          <a:xfrm>
-            <a:off x="381000" y="685800"/>
-            <a:ext cx="6096000" cy="3429000"/>
-          </a:xfrm>
-        </p:spPr>
-      </p:sp>
-      <p:sp>
-        <p:nvSpPr>
-          <p:cNvPr id="3" name="Notes Placeholder 2"/>
-          <p:cNvSpPr>
-            <a:spLocks noGrp="1"/>
-          </p:cNvSpPr>
-          <p:nvPr>
-            <p:ph type="body" idx="1"/>
-          </p:nvPr>
-        </p:nvSpPr>
-        <p:spPr/>
-        <p:txBody>
-          <a:bodyPr/>
-          <a:lstStyle/>
-          <a:p>
-            <a:r>
-              <a:rPr lang="en-IE" b="0" i="0" dirty="0">
-                <a:solidFill>
-                  <a:srgbClr val="0D0D0D"/>
-                </a:solidFill>
-                <a:effectLst/>
-                <a:latin typeface="Söhne"/>
-              </a:rPr>
-              <a:t>It allows you to write HTML tags in TypeScript files. TypeScript supports JSX and provides type-checking for JSX code, enabling developers to use JSX syntax within TypeScript files (.</a:t>
-            </a:r>
-            <a:r>
-              <a:rPr lang="en-IE" b="0" i="0" dirty="0" err="1">
-                <a:solidFill>
-                  <a:srgbClr val="0D0D0D"/>
-                </a:solidFill>
-                <a:effectLst/>
-                <a:latin typeface="Söhne"/>
-              </a:rPr>
-              <a:t>tsx</a:t>
-            </a:r>
-            <a:r>
-              <a:rPr lang="en-IE" b="0" i="0" dirty="0">
-                <a:solidFill>
-                  <a:srgbClr val="0D0D0D"/>
-                </a:solidFill>
-                <a:effectLst/>
-                <a:latin typeface="Söhne"/>
-              </a:rPr>
-              <a:t> extension) for building user interfaces in a more expressive and HTML-like syntax.</a:t>
-            </a:r>
-            <a:endParaRPr lang="en-IE" dirty="0"/>
-          </a:p>
-        </p:txBody>
-      </p:sp>
-      <p:sp>
-        <p:nvSpPr>
-          <p:cNvPr id="4" name="Slide Number Placeholder 3"/>
-          <p:cNvSpPr>
-            <a:spLocks noGrp="1"/>
-          </p:cNvSpPr>
-          <p:nvPr>
-            <p:ph type="sldNum" sz="quarter" idx="5"/>
-          </p:nvPr>
-        </p:nvSpPr>
-        <p:spPr/>
-        <p:txBody>
-          <a:bodyPr/>
-          <a:lstStyle/>
-          <a:p>
-            <a:pPr>
-              <a:defRPr/>
-            </a:pPr>
-            <a:fld id="{59B5789E-C2A1-4F06-AD49-D6F9F59FBA85}" type="slidenum">
-              <a:rPr lang="en-US" altLang="en-US" smtClean="0"/>
-              <a:pPr>
-                <a:defRPr/>
-              </a:pPr>
-              <a:t>11</a:t>
-            </a:fld>
-            <a:endParaRPr lang="en-US" altLang="en-US"/>
-          </a:p>
-        </p:txBody>
-      </p:sp>
-    </p:spTree>
-    <p:extLst>
-      <p:ext uri="{BB962C8B-B14F-4D97-AF65-F5344CB8AC3E}">
-        <p14:creationId xmlns:p14="http://schemas.microsoft.com/office/powerpoint/2010/main" val="4258851525"/>
       </p:ext>
     </p:extLst>
   </p:cSld>
@@ -13265,6 +13357,1500 @@
       </p:grpSpPr>
       <p:sp>
         <p:nvSpPr>
+          <p:cNvPr id="21505" name="Title 1">
+            <a:extLst>
+              <a:ext uri="{FF2B5EF4-FFF2-40B4-BE49-F238E27FC236}">
+                <a16:creationId xmlns:a16="http://schemas.microsoft.com/office/drawing/2014/main" id="{5540338F-0047-817D-33BC-1F0F33ECC917}"/>
+              </a:ext>
+            </a:extLst>
+          </p:cNvPr>
+          <p:cNvSpPr>
+            <a:spLocks noGrp="1" noChangeArrowheads="1"/>
+          </p:cNvSpPr>
+          <p:nvPr>
+            <p:ph type="title"/>
+          </p:nvPr>
+        </p:nvSpPr>
+        <p:spPr/>
+        <p:txBody>
+          <a:bodyPr/>
+          <a:lstStyle/>
+          <a:p>
+            <a:r>
+              <a:rPr lang="en-US" altLang="en-US" dirty="0">
+                <a:ea typeface="ＭＳ Ｐゴシック" panose="020B0600070205080204" pitchFamily="34" charset="-128"/>
+              </a:rPr>
+              <a:t>In-Class Code Demos.</a:t>
+            </a:r>
+            <a:br>
+              <a:rPr lang="en-US" altLang="en-US" dirty="0">
+                <a:ea typeface="ＭＳ Ｐゴシック" panose="020B0600070205080204" pitchFamily="34" charset="-128"/>
+              </a:rPr>
+            </a:br>
+            <a:r>
+              <a:rPr lang="en-US" altLang="en-US" sz="2400" dirty="0">
+                <a:ea typeface="ＭＳ Ｐゴシック" panose="020B0600070205080204" pitchFamily="34" charset="-128"/>
+              </a:rPr>
+              <a:t>(See lecture archive)</a:t>
+            </a:r>
+          </a:p>
+        </p:txBody>
+      </p:sp>
+      <p:sp>
+        <p:nvSpPr>
+          <p:cNvPr id="21506" name="Slide Number Placeholder 3">
+            <a:extLst>
+              <a:ext uri="{FF2B5EF4-FFF2-40B4-BE49-F238E27FC236}">
+                <a16:creationId xmlns:a16="http://schemas.microsoft.com/office/drawing/2014/main" id="{BFCD649D-2ECE-3525-5908-56A7B8D9D2BC}"/>
+              </a:ext>
+            </a:extLst>
+          </p:cNvPr>
+          <p:cNvSpPr>
+            <a:spLocks noGrp="1"/>
+          </p:cNvSpPr>
+          <p:nvPr>
+            <p:ph type="sldNum" sz="quarter" idx="12"/>
+          </p:nvPr>
+        </p:nvSpPr>
+        <p:spPr>
+          <a:noFill/>
+          <a:ln/>
+          <a:extLst>
+            <a:ext uri="{909E8E84-426E-40DD-AFC4-6F175D3DCCD1}">
+              <a14:hiddenFill xmlns:a14="http://schemas.microsoft.com/office/drawing/2010/main">
+                <a:solidFill>
+                  <a:srgbClr val="FFFFFF"/>
+                </a:solidFill>
+              </a14:hiddenFill>
+            </a:ext>
+            <a:ext uri="{91240B29-F687-4F45-9708-019B960494DF}">
+              <a14:hiddenLine xmlns:a14="http://schemas.microsoft.com/office/drawing/2010/main" w="9525">
+                <a:solidFill>
+                  <a:srgbClr val="000000"/>
+                </a:solidFill>
+                <a:miter lim="800000"/>
+                <a:headEnd/>
+                <a:tailEnd/>
+              </a14:hiddenLine>
+            </a:ext>
+          </a:extLst>
+        </p:spPr>
+        <p:txBody>
+          <a:bodyPr/>
+          <a:lstStyle>
+            <a:lvl1pPr>
+              <a:spcBef>
+                <a:spcPct val="20000"/>
+              </a:spcBef>
+              <a:buChar char="•"/>
+              <a:defRPr b="1">
+                <a:solidFill>
+                  <a:schemeClr val="tx1"/>
+                </a:solidFill>
+                <a:latin typeface="Arial" panose="020B0604020202020204" pitchFamily="34" charset="0"/>
+                <a:ea typeface="ＭＳ Ｐゴシック" panose="020B0600070205080204" pitchFamily="34" charset="-128"/>
+              </a:defRPr>
+            </a:lvl1pPr>
+            <a:lvl2pPr marL="742950" indent="-285750">
+              <a:spcBef>
+                <a:spcPct val="20000"/>
+              </a:spcBef>
+              <a:buChar char="–"/>
+              <a:defRPr b="1">
+                <a:solidFill>
+                  <a:schemeClr val="tx1"/>
+                </a:solidFill>
+                <a:latin typeface="Arial" panose="020B0604020202020204" pitchFamily="34" charset="0"/>
+                <a:ea typeface="ＭＳ Ｐゴシック" panose="020B0600070205080204" pitchFamily="34" charset="-128"/>
+              </a:defRPr>
+            </a:lvl2pPr>
+            <a:lvl3pPr marL="1143000" indent="-228600">
+              <a:spcBef>
+                <a:spcPct val="20000"/>
+              </a:spcBef>
+              <a:buChar char="•"/>
+              <a:defRPr b="1">
+                <a:solidFill>
+                  <a:schemeClr val="tx1"/>
+                </a:solidFill>
+                <a:latin typeface="Arial" panose="020B0604020202020204" pitchFamily="34" charset="0"/>
+                <a:ea typeface="ＭＳ Ｐゴシック" panose="020B0600070205080204" pitchFamily="34" charset="-128"/>
+              </a:defRPr>
+            </a:lvl3pPr>
+            <a:lvl4pPr marL="1600200" indent="-228600">
+              <a:spcBef>
+                <a:spcPct val="20000"/>
+              </a:spcBef>
+              <a:buChar char="–"/>
+              <a:defRPr b="1">
+                <a:solidFill>
+                  <a:schemeClr val="tx1"/>
+                </a:solidFill>
+                <a:latin typeface="Arial" panose="020B0604020202020204" pitchFamily="34" charset="0"/>
+                <a:ea typeface="ＭＳ Ｐゴシック" panose="020B0600070205080204" pitchFamily="34" charset="-128"/>
+              </a:defRPr>
+            </a:lvl4pPr>
+            <a:lvl5pPr marL="2057400" indent="-228600">
+              <a:spcBef>
+                <a:spcPct val="20000"/>
+              </a:spcBef>
+              <a:buChar char="»"/>
+              <a:defRPr b="1">
+                <a:solidFill>
+                  <a:schemeClr val="tx1"/>
+                </a:solidFill>
+                <a:latin typeface="Arial" panose="020B0604020202020204" pitchFamily="34" charset="0"/>
+                <a:ea typeface="ＭＳ Ｐゴシック" panose="020B0600070205080204" pitchFamily="34" charset="-128"/>
+              </a:defRPr>
+            </a:lvl5pPr>
+            <a:lvl6pPr marL="2514600" indent="-228600" eaLnBrk="0" fontAlgn="base" hangingPunct="0">
+              <a:spcBef>
+                <a:spcPct val="20000"/>
+              </a:spcBef>
+              <a:spcAft>
+                <a:spcPct val="0"/>
+              </a:spcAft>
+              <a:buChar char="»"/>
+              <a:defRPr b="1">
+                <a:solidFill>
+                  <a:schemeClr val="tx1"/>
+                </a:solidFill>
+                <a:latin typeface="Arial" panose="020B0604020202020204" pitchFamily="34" charset="0"/>
+                <a:ea typeface="ＭＳ Ｐゴシック" panose="020B0600070205080204" pitchFamily="34" charset="-128"/>
+              </a:defRPr>
+            </a:lvl6pPr>
+            <a:lvl7pPr marL="2971800" indent="-228600" eaLnBrk="0" fontAlgn="base" hangingPunct="0">
+              <a:spcBef>
+                <a:spcPct val="20000"/>
+              </a:spcBef>
+              <a:spcAft>
+                <a:spcPct val="0"/>
+              </a:spcAft>
+              <a:buChar char="»"/>
+              <a:defRPr b="1">
+                <a:solidFill>
+                  <a:schemeClr val="tx1"/>
+                </a:solidFill>
+                <a:latin typeface="Arial" panose="020B0604020202020204" pitchFamily="34" charset="0"/>
+                <a:ea typeface="ＭＳ Ｐゴシック" panose="020B0600070205080204" pitchFamily="34" charset="-128"/>
+              </a:defRPr>
+            </a:lvl7pPr>
+            <a:lvl8pPr marL="3429000" indent="-228600" eaLnBrk="0" fontAlgn="base" hangingPunct="0">
+              <a:spcBef>
+                <a:spcPct val="20000"/>
+              </a:spcBef>
+              <a:spcAft>
+                <a:spcPct val="0"/>
+              </a:spcAft>
+              <a:buChar char="»"/>
+              <a:defRPr b="1">
+                <a:solidFill>
+                  <a:schemeClr val="tx1"/>
+                </a:solidFill>
+                <a:latin typeface="Arial" panose="020B0604020202020204" pitchFamily="34" charset="0"/>
+                <a:ea typeface="ＭＳ Ｐゴシック" panose="020B0600070205080204" pitchFamily="34" charset="-128"/>
+              </a:defRPr>
+            </a:lvl8pPr>
+            <a:lvl9pPr marL="3886200" indent="-228600" eaLnBrk="0" fontAlgn="base" hangingPunct="0">
+              <a:spcBef>
+                <a:spcPct val="20000"/>
+              </a:spcBef>
+              <a:spcAft>
+                <a:spcPct val="0"/>
+              </a:spcAft>
+              <a:buChar char="»"/>
+              <a:defRPr b="1">
+                <a:solidFill>
+                  <a:schemeClr val="tx1"/>
+                </a:solidFill>
+                <a:latin typeface="Arial" panose="020B0604020202020204" pitchFamily="34" charset="0"/>
+                <a:ea typeface="ＭＳ Ｐゴシック" panose="020B0600070205080204" pitchFamily="34" charset="-128"/>
+              </a:defRPr>
+            </a:lvl9pPr>
+          </a:lstStyle>
+          <a:p>
+            <a:pPr>
+              <a:spcBef>
+                <a:spcPct val="0"/>
+              </a:spcBef>
+              <a:buFontTx/>
+              <a:buNone/>
+            </a:pPr>
+            <a:fld id="{9C6B1C8A-6C76-417A-BCA1-70D0DFFCDDE2}" type="slidenum">
+              <a:rPr lang="en-US" altLang="en-US" b="0" smtClean="0"/>
+              <a:pPr>
+                <a:spcBef>
+                  <a:spcPct val="0"/>
+                </a:spcBef>
+                <a:buFontTx/>
+                <a:buNone/>
+              </a:pPr>
+              <a:t>10</a:t>
+            </a:fld>
+            <a:endParaRPr lang="en-US" altLang="en-US" b="0"/>
+          </a:p>
+        </p:txBody>
+      </p:sp>
+      <p:pic>
+        <p:nvPicPr>
+          <p:cNvPr id="6" name="Picture 5">
+            <a:extLst>
+              <a:ext uri="{FF2B5EF4-FFF2-40B4-BE49-F238E27FC236}">
+                <a16:creationId xmlns:a16="http://schemas.microsoft.com/office/drawing/2014/main" id="{6E91695F-7035-993A-4DE0-A9E5E72A204F}"/>
+              </a:ext>
+            </a:extLst>
+          </p:cNvPr>
+          <p:cNvPicPr>
+            <a:picLocks noChangeAspect="1" noChangeArrowheads="1"/>
+          </p:cNvPicPr>
+          <p:nvPr/>
+        </p:nvPicPr>
+        <p:blipFill>
+          <a:blip r:embed="rId2">
+            <a:extLst>
+              <a:ext uri="{28A0092B-C50C-407E-A947-70E740481C1C}">
+                <a14:useLocalDpi xmlns:a14="http://schemas.microsoft.com/office/drawing/2010/main" val="0"/>
+              </a:ext>
+            </a:extLst>
+          </a:blip>
+          <a:srcRect/>
+          <a:stretch>
+            <a:fillRect/>
+          </a:stretch>
+        </p:blipFill>
+        <p:spPr bwMode="auto">
+          <a:xfrm>
+            <a:off x="1981200" y="1417640"/>
+            <a:ext cx="8001000" cy="4413324"/>
+          </a:xfrm>
+          <a:prstGeom prst="rect">
+            <a:avLst/>
+          </a:prstGeom>
+          <a:noFill/>
+          <a:ln>
+            <a:noFill/>
+          </a:ln>
+          <a:effectLst>
+            <a:outerShdw blurRad="50800" dist="50800" dir="5400000" sx="102000" sy="102000" algn="ctr" rotWithShape="0">
+              <a:srgbClr val="000000">
+                <a:alpha val="43137"/>
+              </a:srgbClr>
+            </a:outerShdw>
+          </a:effectLst>
+          <a:extLst>
+            <a:ext uri="{909E8E84-426E-40DD-AFC4-6F175D3DCCD1}">
+              <a14:hiddenFill xmlns:a14="http://schemas.microsoft.com/office/drawing/2010/main">
+                <a:solidFill>
+                  <a:srgbClr val="FFFFFF"/>
+                </a:solidFill>
+              </a14:hiddenFill>
+            </a:ext>
+            <a:ext uri="{91240B29-F687-4F45-9708-019B960494DF}">
+              <a14:hiddenLine xmlns:a14="http://schemas.microsoft.com/office/drawing/2010/main" w="9525">
+                <a:solidFill>
+                  <a:srgbClr val="000000"/>
+                </a:solidFill>
+                <a:miter lim="800000"/>
+                <a:headEnd/>
+                <a:tailEnd/>
+              </a14:hiddenLine>
+            </a:ext>
+          </a:extLst>
+        </p:spPr>
+      </p:pic>
+      <p:sp>
+        <p:nvSpPr>
+          <p:cNvPr id="7" name="Rectangle 6">
+            <a:extLst>
+              <a:ext uri="{FF2B5EF4-FFF2-40B4-BE49-F238E27FC236}">
+                <a16:creationId xmlns:a16="http://schemas.microsoft.com/office/drawing/2014/main" id="{7973ACA3-F0FD-0A7C-E890-8D2DB0C5857A}"/>
+              </a:ext>
+            </a:extLst>
+          </p:cNvPr>
+          <p:cNvSpPr/>
+          <p:nvPr/>
+        </p:nvSpPr>
+        <p:spPr>
+          <a:xfrm>
+            <a:off x="3822700" y="4648200"/>
+            <a:ext cx="4559300" cy="914400"/>
+          </a:xfrm>
+          <a:prstGeom prst="rect">
+            <a:avLst/>
+          </a:prstGeom>
+        </p:spPr>
+        <p:style>
+          <a:lnRef idx="3">
+            <a:schemeClr val="lt1"/>
+          </a:lnRef>
+          <a:fillRef idx="1">
+            <a:schemeClr val="accent6"/>
+          </a:fillRef>
+          <a:effectRef idx="1">
+            <a:schemeClr val="accent6"/>
+          </a:effectRef>
+          <a:fontRef idx="minor">
+            <a:schemeClr val="lt1"/>
+          </a:fontRef>
+        </p:style>
+        <p:txBody>
+          <a:bodyPr anchor="ctr"/>
+          <a:lstStyle/>
+          <a:p>
+            <a:pPr algn="ctr">
+              <a:defRPr/>
+            </a:pPr>
+            <a:r>
+              <a:rPr lang="en-US" dirty="0"/>
+              <a:t>See Archive  accompanying these slides.</a:t>
+            </a:r>
+          </a:p>
+          <a:p>
+            <a:pPr algn="ctr">
+              <a:defRPr/>
+            </a:pPr>
+            <a:r>
+              <a:rPr lang="en-US" dirty="0"/>
+              <a:t>Run code using VS Code Live Server extension.</a:t>
+            </a:r>
+          </a:p>
+        </p:txBody>
+      </p:sp>
+    </p:spTree>
+  </p:cSld>
+  <p:clrMapOvr>
+    <a:masterClrMapping/>
+  </p:clrMapOvr>
+</p:sld>
+</file>
+
+<file path=ppt/slides/slide11.xml><?xml version="1.0" encoding="utf-8"?>
+<p:sld xmlns:a="http://schemas.openxmlformats.org/drawingml/2006/main" xmlns:r="http://schemas.openxmlformats.org/officeDocument/2006/relationships" xmlns:p="http://schemas.openxmlformats.org/presentationml/2006/main">
+  <p:cSld>
+    <p:spTree>
+      <p:nvGrpSpPr>
+        <p:cNvPr id="1" name=""/>
+        <p:cNvGrpSpPr/>
+        <p:nvPr/>
+      </p:nvGrpSpPr>
+      <p:grpSpPr>
+        <a:xfrm>
+          <a:off x="0" y="0"/>
+          <a:ext cx="0" cy="0"/>
+          <a:chOff x="0" y="0"/>
+          <a:chExt cx="0" cy="0"/>
+        </a:xfrm>
+      </p:grpSpPr>
+      <p:sp>
+        <p:nvSpPr>
+          <p:cNvPr id="20481" name="Title 1">
+            <a:extLst>
+              <a:ext uri="{FF2B5EF4-FFF2-40B4-BE49-F238E27FC236}">
+                <a16:creationId xmlns:a16="http://schemas.microsoft.com/office/drawing/2014/main" id="{0CAA7637-C6F8-9B80-2A93-0A207F49DD20}"/>
+              </a:ext>
+            </a:extLst>
+          </p:cNvPr>
+          <p:cNvSpPr>
+            <a:spLocks noGrp="1" noChangeArrowheads="1"/>
+          </p:cNvSpPr>
+          <p:nvPr>
+            <p:ph type="title"/>
+          </p:nvPr>
+        </p:nvSpPr>
+        <p:spPr/>
+        <p:txBody>
+          <a:bodyPr/>
+          <a:lstStyle/>
+          <a:p>
+            <a:r>
+              <a:rPr lang="en-US" altLang="en-US" dirty="0">
+                <a:ea typeface="ＭＳ Ｐゴシック" panose="020B0600070205080204" pitchFamily="34" charset="-128"/>
+              </a:rPr>
+              <a:t>Creating the </a:t>
+            </a:r>
+            <a:r>
+              <a:rPr lang="en-US" altLang="en-US" u="sng" dirty="0">
+                <a:ea typeface="ＭＳ Ｐゴシック" panose="020B0600070205080204" pitchFamily="34" charset="-128"/>
+              </a:rPr>
+              <a:t>UI Description.</a:t>
+            </a:r>
+            <a:br>
+              <a:rPr lang="en-US" altLang="en-US" u="sng" dirty="0">
+                <a:ea typeface="ＭＳ Ｐゴシック" panose="020B0600070205080204" pitchFamily="34" charset="-128"/>
+              </a:rPr>
+            </a:br>
+            <a:r>
+              <a:rPr lang="en-US" altLang="en-US" sz="2000" dirty="0">
+                <a:ea typeface="ＭＳ Ｐゴシック" panose="020B0600070205080204" pitchFamily="34" charset="-128"/>
+              </a:rPr>
+              <a:t>(Vanilla React)</a:t>
+            </a:r>
+          </a:p>
+        </p:txBody>
+      </p:sp>
+      <p:sp>
+        <p:nvSpPr>
+          <p:cNvPr id="20482" name="Content Placeholder 2">
+            <a:extLst>
+              <a:ext uri="{FF2B5EF4-FFF2-40B4-BE49-F238E27FC236}">
+                <a16:creationId xmlns:a16="http://schemas.microsoft.com/office/drawing/2014/main" id="{7F23EA52-ACFF-3685-55E9-F291679C5A7B}"/>
+              </a:ext>
+            </a:extLst>
+          </p:cNvPr>
+          <p:cNvSpPr>
+            <a:spLocks noGrp="1" noChangeArrowheads="1"/>
+          </p:cNvSpPr>
+          <p:nvPr>
+            <p:ph idx="1"/>
+          </p:nvPr>
+        </p:nvSpPr>
+        <p:spPr>
+          <a:xfrm>
+            <a:off x="457200" y="1527175"/>
+            <a:ext cx="11430000" cy="4718050"/>
+          </a:xfrm>
+        </p:spPr>
+        <p:txBody>
+          <a:bodyPr/>
+          <a:lstStyle/>
+          <a:p>
+            <a:r>
+              <a:rPr lang="en-US" altLang="en-US" sz="2000" b="0" dirty="0" err="1">
+                <a:ea typeface="ＭＳ Ｐゴシック" panose="020B0600070205080204" pitchFamily="34" charset="-128"/>
+              </a:rPr>
+              <a:t>React.createElement</a:t>
+            </a:r>
+            <a:r>
+              <a:rPr lang="en-US" altLang="en-US" sz="2000" b="0" dirty="0">
+                <a:ea typeface="ＭＳ Ｐゴシック" panose="020B0600070205080204" pitchFamily="34" charset="-128"/>
+              </a:rPr>
+              <a:t>() </a:t>
+            </a:r>
+            <a:r>
+              <a:rPr lang="en-US" altLang="en-US" sz="2000" dirty="0">
+                <a:ea typeface="ＭＳ Ｐゴシック" panose="020B0600070205080204" pitchFamily="34" charset="-128"/>
+              </a:rPr>
+              <a:t>– creates a HTML element.</a:t>
+            </a:r>
+          </a:p>
+          <a:p>
+            <a:r>
+              <a:rPr lang="en-US" altLang="en-US" sz="2000" b="0" dirty="0" err="1">
+                <a:ea typeface="ＭＳ Ｐゴシック" panose="020B0600070205080204" pitchFamily="34" charset="-128"/>
+              </a:rPr>
+              <a:t>ReactDOM.createRoot</a:t>
+            </a:r>
+            <a:r>
+              <a:rPr lang="en-US" altLang="en-US" sz="2000" b="0" dirty="0">
+                <a:ea typeface="ＭＳ Ｐゴシック" panose="020B0600070205080204" pitchFamily="34" charset="-128"/>
+              </a:rPr>
+              <a:t>() – </a:t>
+            </a:r>
+            <a:r>
+              <a:rPr lang="en-US" altLang="en-US" sz="2000" dirty="0">
+                <a:ea typeface="ＭＳ Ｐゴシック" panose="020B0600070205080204" pitchFamily="34" charset="-128"/>
+              </a:rPr>
+              <a:t>used to attach the created element to existing DOM node. </a:t>
+            </a:r>
+            <a:endParaRPr lang="en-US" altLang="en-US" sz="2000" b="0" dirty="0">
+              <a:ea typeface="ＭＳ Ｐゴシック" panose="020B0600070205080204" pitchFamily="34" charset="-128"/>
+            </a:endParaRPr>
+          </a:p>
+          <a:p>
+            <a:r>
+              <a:rPr lang="en-US" altLang="en-US" sz="2000" b="0" dirty="0" err="1">
+                <a:ea typeface="ＭＳ Ｐゴシック" panose="020B0600070205080204" pitchFamily="34" charset="-128"/>
+              </a:rPr>
+              <a:t>React.createElement</a:t>
+            </a:r>
+            <a:r>
+              <a:rPr lang="en-US" altLang="en-US" sz="2000" b="0" dirty="0">
+                <a:ea typeface="ＭＳ Ｐゴシック" panose="020B0600070205080204" pitchFamily="34" charset="-128"/>
+              </a:rPr>
+              <a:t>() takes three or more </a:t>
+            </a:r>
+            <a:r>
+              <a:rPr lang="en-US" altLang="en-US" sz="2000" dirty="0">
+                <a:ea typeface="ＭＳ Ｐゴシック" panose="020B0600070205080204" pitchFamily="34" charset="-128"/>
+              </a:rPr>
+              <a:t>arguments</a:t>
+            </a:r>
+            <a:r>
+              <a:rPr lang="en-US" altLang="en-US" sz="2000" b="0" dirty="0">
+                <a:ea typeface="ＭＳ Ｐゴシック" panose="020B0600070205080204" pitchFamily="34" charset="-128"/>
+              </a:rPr>
+              <a:t>:</a:t>
+            </a:r>
+            <a:endParaRPr lang="en-US" altLang="en-US" sz="2000" dirty="0">
+              <a:ea typeface="ＭＳ Ｐゴシック" panose="020B0600070205080204" pitchFamily="34" charset="-128"/>
+            </a:endParaRPr>
+          </a:p>
+          <a:p>
+            <a:pPr marL="914400" lvl="1" indent="-457200"/>
+            <a:endParaRPr lang="en-US" altLang="en-US" sz="2400" dirty="0">
+              <a:ea typeface="ＭＳ Ｐゴシック" panose="020B0600070205080204" pitchFamily="34" charset="-128"/>
+            </a:endParaRPr>
+          </a:p>
+          <a:p>
+            <a:pPr marL="914400" lvl="1" indent="-457200"/>
+            <a:endParaRPr lang="en-US" altLang="en-US" sz="2400" dirty="0">
+              <a:ea typeface="ＭＳ Ｐゴシック" panose="020B0600070205080204" pitchFamily="34" charset="-128"/>
+            </a:endParaRPr>
+          </a:p>
+          <a:p>
+            <a:pPr marL="914400" lvl="1" indent="-457200"/>
+            <a:endParaRPr lang="en-US" altLang="en-US" sz="2400" dirty="0">
+              <a:ea typeface="ＭＳ Ｐゴシック" panose="020B0600070205080204" pitchFamily="34" charset="-128"/>
+            </a:endParaRPr>
+          </a:p>
+          <a:p>
+            <a:pPr marL="914400" lvl="1" indent="-457200"/>
+            <a:endParaRPr lang="en-US" altLang="en-US" sz="2400" dirty="0">
+              <a:ea typeface="ＭＳ Ｐゴシック" panose="020B0600070205080204" pitchFamily="34" charset="-128"/>
+            </a:endParaRPr>
+          </a:p>
+          <a:p>
+            <a:pPr marL="914400" lvl="1" indent="-457200"/>
+            <a:endParaRPr lang="en-US" altLang="en-US" sz="2400" dirty="0">
+              <a:ea typeface="ＭＳ Ｐゴシック" panose="020B0600070205080204" pitchFamily="34" charset="-128"/>
+            </a:endParaRPr>
+          </a:p>
+          <a:p>
+            <a:pPr marL="914400" lvl="1" indent="-457200"/>
+            <a:r>
+              <a:rPr lang="en-US" altLang="en-US" sz="2400" dirty="0">
+                <a:ea typeface="ＭＳ Ｐゴシック" panose="020B0600070205080204" pitchFamily="34" charset="-128"/>
+              </a:rPr>
+              <a:t>We don’t use </a:t>
+            </a:r>
+            <a:r>
+              <a:rPr lang="en-US" altLang="en-US" sz="2400" dirty="0" err="1">
+                <a:ea typeface="ＭＳ Ｐゴシック" panose="020B0600070205080204" pitchFamily="34" charset="-128"/>
+              </a:rPr>
+              <a:t>createElement</a:t>
+            </a:r>
+            <a:r>
+              <a:rPr lang="en-US" altLang="en-US" sz="2400" dirty="0">
+                <a:ea typeface="ＭＳ Ｐゴシック" panose="020B0600070205080204" pitchFamily="34" charset="-128"/>
+              </a:rPr>
+              <a:t>() directly - too cumbersome. More later…</a:t>
+            </a:r>
+            <a:endParaRPr lang="en-US" altLang="en-US" sz="2000" b="0" dirty="0">
+              <a:ea typeface="ＭＳ Ｐゴシック" panose="020B0600070205080204" pitchFamily="34" charset="-128"/>
+            </a:endParaRPr>
+          </a:p>
+          <a:p>
+            <a:r>
+              <a:rPr lang="en-US" altLang="en-US" sz="2000" b="0" dirty="0" err="1">
+                <a:ea typeface="ＭＳ Ｐゴシック" panose="020B0600070205080204" pitchFamily="34" charset="-128"/>
+              </a:rPr>
+              <a:t>ReactDOM.createRoot</a:t>
+            </a:r>
+            <a:r>
+              <a:rPr lang="en-US" altLang="en-US" sz="2000" b="0" dirty="0">
+                <a:ea typeface="ＭＳ Ｐゴシック" panose="020B0600070205080204" pitchFamily="34" charset="-128"/>
+              </a:rPr>
+              <a:t> () has 1 </a:t>
+            </a:r>
+            <a:r>
+              <a:rPr lang="en-US" altLang="en-US" sz="2000" dirty="0">
+                <a:ea typeface="ＭＳ Ｐゴシック" panose="020B0600070205080204" pitchFamily="34" charset="-128"/>
+              </a:rPr>
+              <a:t>argument:</a:t>
+            </a:r>
+          </a:p>
+        </p:txBody>
+      </p:sp>
+      <p:sp>
+        <p:nvSpPr>
+          <p:cNvPr id="20483" name="Slide Number Placeholder 3">
+            <a:extLst>
+              <a:ext uri="{FF2B5EF4-FFF2-40B4-BE49-F238E27FC236}">
+                <a16:creationId xmlns:a16="http://schemas.microsoft.com/office/drawing/2014/main" id="{4353AC8F-4284-9A65-C178-213CF254B6EB}"/>
+              </a:ext>
+            </a:extLst>
+          </p:cNvPr>
+          <p:cNvSpPr>
+            <a:spLocks noGrp="1"/>
+          </p:cNvSpPr>
+          <p:nvPr>
+            <p:ph type="sldNum" sz="quarter" idx="12"/>
+          </p:nvPr>
+        </p:nvSpPr>
+        <p:spPr>
+          <a:noFill/>
+          <a:ln/>
+          <a:extLst>
+            <a:ext uri="{909E8E84-426E-40DD-AFC4-6F175D3DCCD1}">
+              <a14:hiddenFill xmlns:a14="http://schemas.microsoft.com/office/drawing/2010/main">
+                <a:solidFill>
+                  <a:srgbClr val="FFFFFF"/>
+                </a:solidFill>
+              </a14:hiddenFill>
+            </a:ext>
+            <a:ext uri="{91240B29-F687-4F45-9708-019B960494DF}">
+              <a14:hiddenLine xmlns:a14="http://schemas.microsoft.com/office/drawing/2010/main" w="9525">
+                <a:solidFill>
+                  <a:srgbClr val="000000"/>
+                </a:solidFill>
+                <a:miter lim="800000"/>
+                <a:headEnd/>
+                <a:tailEnd/>
+              </a14:hiddenLine>
+            </a:ext>
+          </a:extLst>
+        </p:spPr>
+        <p:txBody>
+          <a:bodyPr/>
+          <a:lstStyle>
+            <a:lvl1pPr>
+              <a:spcBef>
+                <a:spcPct val="20000"/>
+              </a:spcBef>
+              <a:buChar char="•"/>
+              <a:defRPr b="1">
+                <a:solidFill>
+                  <a:schemeClr val="tx1"/>
+                </a:solidFill>
+                <a:latin typeface="Arial" panose="020B0604020202020204" pitchFamily="34" charset="0"/>
+                <a:ea typeface="ＭＳ Ｐゴシック" panose="020B0600070205080204" pitchFamily="34" charset="-128"/>
+              </a:defRPr>
+            </a:lvl1pPr>
+            <a:lvl2pPr marL="742950" indent="-285750">
+              <a:spcBef>
+                <a:spcPct val="20000"/>
+              </a:spcBef>
+              <a:buChar char="–"/>
+              <a:defRPr b="1">
+                <a:solidFill>
+                  <a:schemeClr val="tx1"/>
+                </a:solidFill>
+                <a:latin typeface="Arial" panose="020B0604020202020204" pitchFamily="34" charset="0"/>
+                <a:ea typeface="ＭＳ Ｐゴシック" panose="020B0600070205080204" pitchFamily="34" charset="-128"/>
+              </a:defRPr>
+            </a:lvl2pPr>
+            <a:lvl3pPr marL="1143000" indent="-228600">
+              <a:spcBef>
+                <a:spcPct val="20000"/>
+              </a:spcBef>
+              <a:buChar char="•"/>
+              <a:defRPr b="1">
+                <a:solidFill>
+                  <a:schemeClr val="tx1"/>
+                </a:solidFill>
+                <a:latin typeface="Arial" panose="020B0604020202020204" pitchFamily="34" charset="0"/>
+                <a:ea typeface="ＭＳ Ｐゴシック" panose="020B0600070205080204" pitchFamily="34" charset="-128"/>
+              </a:defRPr>
+            </a:lvl3pPr>
+            <a:lvl4pPr marL="1600200" indent="-228600">
+              <a:spcBef>
+                <a:spcPct val="20000"/>
+              </a:spcBef>
+              <a:buChar char="–"/>
+              <a:defRPr b="1">
+                <a:solidFill>
+                  <a:schemeClr val="tx1"/>
+                </a:solidFill>
+                <a:latin typeface="Arial" panose="020B0604020202020204" pitchFamily="34" charset="0"/>
+                <a:ea typeface="ＭＳ Ｐゴシック" panose="020B0600070205080204" pitchFamily="34" charset="-128"/>
+              </a:defRPr>
+            </a:lvl4pPr>
+            <a:lvl5pPr marL="2057400" indent="-228600">
+              <a:spcBef>
+                <a:spcPct val="20000"/>
+              </a:spcBef>
+              <a:buChar char="»"/>
+              <a:defRPr b="1">
+                <a:solidFill>
+                  <a:schemeClr val="tx1"/>
+                </a:solidFill>
+                <a:latin typeface="Arial" panose="020B0604020202020204" pitchFamily="34" charset="0"/>
+                <a:ea typeface="ＭＳ Ｐゴシック" panose="020B0600070205080204" pitchFamily="34" charset="-128"/>
+              </a:defRPr>
+            </a:lvl5pPr>
+            <a:lvl6pPr marL="2514600" indent="-228600" eaLnBrk="0" fontAlgn="base" hangingPunct="0">
+              <a:spcBef>
+                <a:spcPct val="20000"/>
+              </a:spcBef>
+              <a:spcAft>
+                <a:spcPct val="0"/>
+              </a:spcAft>
+              <a:buChar char="»"/>
+              <a:defRPr b="1">
+                <a:solidFill>
+                  <a:schemeClr val="tx1"/>
+                </a:solidFill>
+                <a:latin typeface="Arial" panose="020B0604020202020204" pitchFamily="34" charset="0"/>
+                <a:ea typeface="ＭＳ Ｐゴシック" panose="020B0600070205080204" pitchFamily="34" charset="-128"/>
+              </a:defRPr>
+            </a:lvl6pPr>
+            <a:lvl7pPr marL="2971800" indent="-228600" eaLnBrk="0" fontAlgn="base" hangingPunct="0">
+              <a:spcBef>
+                <a:spcPct val="20000"/>
+              </a:spcBef>
+              <a:spcAft>
+                <a:spcPct val="0"/>
+              </a:spcAft>
+              <a:buChar char="»"/>
+              <a:defRPr b="1">
+                <a:solidFill>
+                  <a:schemeClr val="tx1"/>
+                </a:solidFill>
+                <a:latin typeface="Arial" panose="020B0604020202020204" pitchFamily="34" charset="0"/>
+                <a:ea typeface="ＭＳ Ｐゴシック" panose="020B0600070205080204" pitchFamily="34" charset="-128"/>
+              </a:defRPr>
+            </a:lvl7pPr>
+            <a:lvl8pPr marL="3429000" indent="-228600" eaLnBrk="0" fontAlgn="base" hangingPunct="0">
+              <a:spcBef>
+                <a:spcPct val="20000"/>
+              </a:spcBef>
+              <a:spcAft>
+                <a:spcPct val="0"/>
+              </a:spcAft>
+              <a:buChar char="»"/>
+              <a:defRPr b="1">
+                <a:solidFill>
+                  <a:schemeClr val="tx1"/>
+                </a:solidFill>
+                <a:latin typeface="Arial" panose="020B0604020202020204" pitchFamily="34" charset="0"/>
+                <a:ea typeface="ＭＳ Ｐゴシック" panose="020B0600070205080204" pitchFamily="34" charset="-128"/>
+              </a:defRPr>
+            </a:lvl8pPr>
+            <a:lvl9pPr marL="3886200" indent="-228600" eaLnBrk="0" fontAlgn="base" hangingPunct="0">
+              <a:spcBef>
+                <a:spcPct val="20000"/>
+              </a:spcBef>
+              <a:spcAft>
+                <a:spcPct val="0"/>
+              </a:spcAft>
+              <a:buChar char="»"/>
+              <a:defRPr b="1">
+                <a:solidFill>
+                  <a:schemeClr val="tx1"/>
+                </a:solidFill>
+                <a:latin typeface="Arial" panose="020B0604020202020204" pitchFamily="34" charset="0"/>
+                <a:ea typeface="ＭＳ Ｐゴシック" panose="020B0600070205080204" pitchFamily="34" charset="-128"/>
+              </a:defRPr>
+            </a:lvl9pPr>
+          </a:lstStyle>
+          <a:p>
+            <a:pPr>
+              <a:spcBef>
+                <a:spcPct val="0"/>
+              </a:spcBef>
+              <a:buFontTx/>
+              <a:buNone/>
+            </a:pPr>
+            <a:fld id="{3DD7C3FE-7D52-4A36-BD7A-9D4C77E680D3}" type="slidenum">
+              <a:rPr lang="en-US" altLang="en-US" b="0" smtClean="0"/>
+              <a:pPr>
+                <a:spcBef>
+                  <a:spcPct val="0"/>
+                </a:spcBef>
+                <a:buFontTx/>
+                <a:buNone/>
+              </a:pPr>
+              <a:t>11</a:t>
+            </a:fld>
+            <a:endParaRPr lang="en-US" altLang="en-US" b="0"/>
+          </a:p>
+        </p:txBody>
+      </p:sp>
+      <p:pic>
+        <p:nvPicPr>
+          <p:cNvPr id="3" name="Picture 2">
+            <a:extLst>
+              <a:ext uri="{FF2B5EF4-FFF2-40B4-BE49-F238E27FC236}">
+                <a16:creationId xmlns:a16="http://schemas.microsoft.com/office/drawing/2014/main" id="{C473DACA-71B9-2A21-701A-2A8310A533E7}"/>
+              </a:ext>
+            </a:extLst>
+          </p:cNvPr>
+          <p:cNvPicPr>
+            <a:picLocks noChangeAspect="1"/>
+          </p:cNvPicPr>
+          <p:nvPr/>
+        </p:nvPicPr>
+        <p:blipFill rotWithShape="1">
+          <a:blip r:embed="rId3"/>
+          <a:srcRect b="12836"/>
+          <a:stretch/>
+        </p:blipFill>
+        <p:spPr>
+          <a:xfrm>
+            <a:off x="761527" y="3312799"/>
+            <a:ext cx="9134345" cy="1591648"/>
+          </a:xfrm>
+          <a:prstGeom prst="rect">
+            <a:avLst/>
+          </a:prstGeom>
+        </p:spPr>
+      </p:pic>
+      <p:sp>
+        <p:nvSpPr>
+          <p:cNvPr id="4" name="Callout: Line 3">
+            <a:extLst>
+              <a:ext uri="{FF2B5EF4-FFF2-40B4-BE49-F238E27FC236}">
+                <a16:creationId xmlns:a16="http://schemas.microsoft.com/office/drawing/2014/main" id="{67394963-C090-4C1E-D11D-F53DE8695A92}"/>
+              </a:ext>
+            </a:extLst>
+          </p:cNvPr>
+          <p:cNvSpPr/>
+          <p:nvPr/>
+        </p:nvSpPr>
+        <p:spPr>
+          <a:xfrm>
+            <a:off x="1218727" y="2639686"/>
+            <a:ext cx="2895600" cy="451683"/>
+          </a:xfrm>
+          <a:prstGeom prst="borderCallout1">
+            <a:avLst>
+              <a:gd name="adj1" fmla="val 123815"/>
+              <a:gd name="adj2" fmla="val 46431"/>
+              <a:gd name="adj3" fmla="val 417446"/>
+              <a:gd name="adj4" fmla="val 122760"/>
+            </a:avLst>
+          </a:prstGeom>
+        </p:spPr>
+        <p:style>
+          <a:lnRef idx="1">
+            <a:schemeClr val="accent1"/>
+          </a:lnRef>
+          <a:fillRef idx="3">
+            <a:schemeClr val="accent1"/>
+          </a:fillRef>
+          <a:effectRef idx="2">
+            <a:schemeClr val="accent1"/>
+          </a:effectRef>
+          <a:fontRef idx="minor">
+            <a:schemeClr val="lt1"/>
+          </a:fontRef>
+        </p:style>
+        <p:txBody>
+          <a:bodyPr rtlCol="0" anchor="ctr"/>
+          <a:lstStyle/>
+          <a:p>
+            <a:pPr lvl="1"/>
+            <a:r>
+              <a:rPr lang="en-US" altLang="en-US" sz="1800" dirty="0">
+                <a:solidFill>
+                  <a:schemeClr val="tx1"/>
+                </a:solidFill>
+                <a:ea typeface="ＭＳ Ｐゴシック" panose="020B0600070205080204" pitchFamily="34" charset="-128"/>
+              </a:rPr>
+              <a:t>Type (e.g. h1, div, …)</a:t>
+            </a:r>
+          </a:p>
+        </p:txBody>
+      </p:sp>
+      <p:sp>
+        <p:nvSpPr>
+          <p:cNvPr id="6" name="Callout: Line 5">
+            <a:extLst>
+              <a:ext uri="{FF2B5EF4-FFF2-40B4-BE49-F238E27FC236}">
+                <a16:creationId xmlns:a16="http://schemas.microsoft.com/office/drawing/2014/main" id="{932076F7-9D5F-2CDA-42D4-DAAA8B96B1F2}"/>
+              </a:ext>
+            </a:extLst>
+          </p:cNvPr>
+          <p:cNvSpPr/>
+          <p:nvPr/>
+        </p:nvSpPr>
+        <p:spPr>
+          <a:xfrm>
+            <a:off x="4847390" y="2612715"/>
+            <a:ext cx="2895600" cy="590547"/>
+          </a:xfrm>
+          <a:prstGeom prst="borderCallout1">
+            <a:avLst>
+              <a:gd name="adj1" fmla="val 104990"/>
+              <a:gd name="adj2" fmla="val 45231"/>
+              <a:gd name="adj3" fmla="val 339859"/>
+              <a:gd name="adj4" fmla="val 42413"/>
+            </a:avLst>
+          </a:prstGeom>
+        </p:spPr>
+        <p:style>
+          <a:lnRef idx="1">
+            <a:schemeClr val="accent1"/>
+          </a:lnRef>
+          <a:fillRef idx="3">
+            <a:schemeClr val="accent1"/>
+          </a:fillRef>
+          <a:effectRef idx="2">
+            <a:schemeClr val="accent1"/>
+          </a:effectRef>
+          <a:fontRef idx="minor">
+            <a:schemeClr val="lt1"/>
+          </a:fontRef>
+        </p:style>
+        <p:txBody>
+          <a:bodyPr rtlCol="0" anchor="ctr"/>
+          <a:lstStyle/>
+          <a:p>
+            <a:pPr lvl="1"/>
+            <a:r>
+              <a:rPr lang="en-US" altLang="en-US" sz="1800" dirty="0">
+                <a:solidFill>
+                  <a:schemeClr val="tx1"/>
+                </a:solidFill>
+                <a:ea typeface="ＭＳ Ｐゴシック" panose="020B0600070205080204" pitchFamily="34" charset="-128"/>
+              </a:rPr>
+              <a:t>Properties (style, event handler…)</a:t>
+            </a:r>
+          </a:p>
+        </p:txBody>
+      </p:sp>
+      <p:sp>
+        <p:nvSpPr>
+          <p:cNvPr id="7" name="Callout: Line 6">
+            <a:extLst>
+              <a:ext uri="{FF2B5EF4-FFF2-40B4-BE49-F238E27FC236}">
+                <a16:creationId xmlns:a16="http://schemas.microsoft.com/office/drawing/2014/main" id="{7C726BD1-9D5A-381D-1950-58D59FD94C52}"/>
+              </a:ext>
+            </a:extLst>
+          </p:cNvPr>
+          <p:cNvSpPr/>
+          <p:nvPr/>
+        </p:nvSpPr>
+        <p:spPr>
+          <a:xfrm>
+            <a:off x="8608671" y="2585744"/>
+            <a:ext cx="3124200" cy="673113"/>
+          </a:xfrm>
+          <a:prstGeom prst="borderCallout1">
+            <a:avLst>
+              <a:gd name="adj1" fmla="val 108168"/>
+              <a:gd name="adj2" fmla="val 49833"/>
+              <a:gd name="adj3" fmla="val 296494"/>
+              <a:gd name="adj4" fmla="val -8694"/>
+            </a:avLst>
+          </a:prstGeom>
+        </p:spPr>
+        <p:style>
+          <a:lnRef idx="1">
+            <a:schemeClr val="accent1"/>
+          </a:lnRef>
+          <a:fillRef idx="3">
+            <a:schemeClr val="accent1"/>
+          </a:fillRef>
+          <a:effectRef idx="2">
+            <a:schemeClr val="accent1"/>
+          </a:effectRef>
+          <a:fontRef idx="minor">
+            <a:schemeClr val="lt1"/>
+          </a:fontRef>
+        </p:style>
+        <p:txBody>
+          <a:bodyPr rtlCol="0" anchor="ctr"/>
+          <a:lstStyle/>
+          <a:p>
+            <a:pPr lvl="1"/>
+            <a:r>
+              <a:rPr lang="en-US" altLang="en-US" sz="1800" dirty="0">
+                <a:solidFill>
+                  <a:schemeClr val="tx1"/>
+                </a:solidFill>
+                <a:ea typeface="ＭＳ Ｐゴシック" panose="020B0600070205080204" pitchFamily="34" charset="-128"/>
+              </a:rPr>
+              <a:t>Children(0 to many child elements)</a:t>
+            </a:r>
+          </a:p>
+        </p:txBody>
+      </p:sp>
+      <p:pic>
+        <p:nvPicPr>
+          <p:cNvPr id="9" name="Picture 8">
+            <a:extLst>
+              <a:ext uri="{FF2B5EF4-FFF2-40B4-BE49-F238E27FC236}">
+                <a16:creationId xmlns:a16="http://schemas.microsoft.com/office/drawing/2014/main" id="{9EBDC0DF-ABA8-4953-FFF4-D38F89E6ADB2}"/>
+              </a:ext>
+            </a:extLst>
+          </p:cNvPr>
+          <p:cNvPicPr>
+            <a:picLocks noChangeAspect="1"/>
+          </p:cNvPicPr>
+          <p:nvPr/>
+        </p:nvPicPr>
+        <p:blipFill>
+          <a:blip r:embed="rId4"/>
+          <a:stretch>
+            <a:fillRect/>
+          </a:stretch>
+        </p:blipFill>
+        <p:spPr>
+          <a:xfrm>
+            <a:off x="640466" y="6016958"/>
+            <a:ext cx="9027811" cy="783502"/>
+          </a:xfrm>
+          <a:prstGeom prst="rect">
+            <a:avLst/>
+          </a:prstGeom>
+        </p:spPr>
+      </p:pic>
+      <p:sp>
+        <p:nvSpPr>
+          <p:cNvPr id="10" name="Callout: Line 9">
+            <a:extLst>
+              <a:ext uri="{FF2B5EF4-FFF2-40B4-BE49-F238E27FC236}">
+                <a16:creationId xmlns:a16="http://schemas.microsoft.com/office/drawing/2014/main" id="{B1FB3F51-14C0-2C76-7D76-624E5CDE394F}"/>
+              </a:ext>
+            </a:extLst>
+          </p:cNvPr>
+          <p:cNvSpPr/>
+          <p:nvPr/>
+        </p:nvSpPr>
+        <p:spPr>
+          <a:xfrm>
+            <a:off x="6508516" y="5275048"/>
+            <a:ext cx="4235684" cy="673113"/>
+          </a:xfrm>
+          <a:prstGeom prst="borderCallout1">
+            <a:avLst>
+              <a:gd name="adj1" fmla="val 108168"/>
+              <a:gd name="adj2" fmla="val 49833"/>
+              <a:gd name="adj3" fmla="val 150082"/>
+              <a:gd name="adj4" fmla="val 22851"/>
+            </a:avLst>
+          </a:prstGeom>
+        </p:spPr>
+        <p:style>
+          <a:lnRef idx="1">
+            <a:schemeClr val="accent1"/>
+          </a:lnRef>
+          <a:fillRef idx="3">
+            <a:schemeClr val="accent1"/>
+          </a:fillRef>
+          <a:effectRef idx="2">
+            <a:schemeClr val="accent1"/>
+          </a:effectRef>
+          <a:fontRef idx="minor">
+            <a:schemeClr val="lt1"/>
+          </a:fontRef>
+        </p:style>
+        <p:txBody>
+          <a:bodyPr rtlCol="0" anchor="ctr"/>
+          <a:lstStyle/>
+          <a:p>
+            <a:pPr lvl="1"/>
+            <a:r>
+              <a:rPr lang="en-US" altLang="en-US" sz="1800" dirty="0">
+                <a:solidFill>
+                  <a:schemeClr val="tx1"/>
+                </a:solidFill>
+                <a:ea typeface="ＭＳ Ｐゴシック" panose="020B0600070205080204" pitchFamily="34" charset="-128"/>
+              </a:rPr>
+              <a:t>DOM element on which to render your React Root Element</a:t>
+            </a:r>
+          </a:p>
+        </p:txBody>
+      </p:sp>
+    </p:spTree>
+  </p:cSld>
+  <p:clrMapOvr>
+    <a:masterClrMapping/>
+  </p:clrMapOvr>
+  <p:timing>
+    <p:tnLst>
+      <p:par>
+        <p:cTn id="1" dur="indefinite" restart="never" nodeType="tmRoot">
+          <p:childTnLst>
+            <p:seq concurrent="1" nextAc="seek">
+              <p:cTn id="2" dur="indefinite" nodeType="mainSeq">
+                <p:childTnLst>
+                  <p:par>
+                    <p:cTn id="3" fill="hold" nodeType="clickPar">
+                      <p:stCondLst>
+                        <p:cond delay="indefinite"/>
+                      </p:stCondLst>
+                      <p:childTnLst>
+                        <p:par>
+                          <p:cTn id="4" fill="hold" nodeType="withGroup">
+                            <p:stCondLst>
+                              <p:cond delay="0"/>
+                            </p:stCondLst>
+                            <p:childTnLst>
+                              <p:par>
+                                <p:cTn id="5" presetID="1" presetClass="entr" presetSubtype="0" fill="hold" nodeType="clickEffect">
+                                  <p:stCondLst>
+                                    <p:cond delay="0"/>
+                                  </p:stCondLst>
+                                  <p:childTnLst>
+                                    <p:set>
+                                      <p:cBhvr>
+                                        <p:cTn id="6" dur="1" fill="hold">
+                                          <p:stCondLst>
+                                            <p:cond delay="0"/>
+                                          </p:stCondLst>
+                                        </p:cTn>
+                                        <p:tgtEl>
+                                          <p:spTgt spid="20482">
+                                            <p:txEl>
+                                              <p:pRg st="2" end="2"/>
+                                            </p:txEl>
+                                          </p:spTgt>
+                                        </p:tgtEl>
+                                        <p:attrNameLst>
+                                          <p:attrName>style.visibility</p:attrName>
+                                        </p:attrNameLst>
+                                      </p:cBhvr>
+                                      <p:to>
+                                        <p:strVal val="visible"/>
+                                      </p:to>
+                                    </p:set>
+                                  </p:childTnLst>
+                                </p:cTn>
+                              </p:par>
+                            </p:childTnLst>
+                          </p:cTn>
+                        </p:par>
+                      </p:childTnLst>
+                    </p:cTn>
+                  </p:par>
+                  <p:par>
+                    <p:cTn id="7" fill="hold" nodeType="clickPar">
+                      <p:stCondLst>
+                        <p:cond delay="indefinite"/>
+                      </p:stCondLst>
+                      <p:childTnLst>
+                        <p:par>
+                          <p:cTn id="8" fill="hold" nodeType="withGroup">
+                            <p:stCondLst>
+                              <p:cond delay="0"/>
+                            </p:stCondLst>
+                            <p:childTnLst>
+                              <p:par>
+                                <p:cTn id="9" presetID="1" presetClass="entr" presetSubtype="0" fill="hold" grpId="0" nodeType="clickEffect">
+                                  <p:stCondLst>
+                                    <p:cond delay="0"/>
+                                  </p:stCondLst>
+                                  <p:childTnLst>
+                                    <p:set>
+                                      <p:cBhvr>
+                                        <p:cTn id="10" dur="1" fill="hold">
+                                          <p:stCondLst>
+                                            <p:cond delay="0"/>
+                                          </p:stCondLst>
+                                        </p:cTn>
+                                        <p:tgtEl>
+                                          <p:spTgt spid="4"/>
+                                        </p:tgtEl>
+                                        <p:attrNameLst>
+                                          <p:attrName>style.visibility</p:attrName>
+                                        </p:attrNameLst>
+                                      </p:cBhvr>
+                                      <p:to>
+                                        <p:strVal val="visible"/>
+                                      </p:to>
+                                    </p:set>
+                                  </p:childTnLst>
+                                </p:cTn>
+                              </p:par>
+                              <p:par>
+                                <p:cTn id="11" presetID="1" presetClass="entr" presetSubtype="0" fill="hold" grpId="0" nodeType="withEffect">
+                                  <p:stCondLst>
+                                    <p:cond delay="0"/>
+                                  </p:stCondLst>
+                                  <p:childTnLst>
+                                    <p:set>
+                                      <p:cBhvr>
+                                        <p:cTn id="12" dur="1" fill="hold">
+                                          <p:stCondLst>
+                                            <p:cond delay="0"/>
+                                          </p:stCondLst>
+                                        </p:cTn>
+                                        <p:tgtEl>
+                                          <p:spTgt spid="6"/>
+                                        </p:tgtEl>
+                                        <p:attrNameLst>
+                                          <p:attrName>style.visibility</p:attrName>
+                                        </p:attrNameLst>
+                                      </p:cBhvr>
+                                      <p:to>
+                                        <p:strVal val="visible"/>
+                                      </p:to>
+                                    </p:set>
+                                  </p:childTnLst>
+                                </p:cTn>
+                              </p:par>
+                              <p:par>
+                                <p:cTn id="13" presetID="1" presetClass="entr" presetSubtype="0" fill="hold" grpId="0" nodeType="withEffect">
+                                  <p:stCondLst>
+                                    <p:cond delay="0"/>
+                                  </p:stCondLst>
+                                  <p:childTnLst>
+                                    <p:set>
+                                      <p:cBhvr>
+                                        <p:cTn id="14" dur="1" fill="hold">
+                                          <p:stCondLst>
+                                            <p:cond delay="0"/>
+                                          </p:stCondLst>
+                                        </p:cTn>
+                                        <p:tgtEl>
+                                          <p:spTgt spid="7"/>
+                                        </p:tgtEl>
+                                        <p:attrNameLst>
+                                          <p:attrName>style.visibility</p:attrName>
+                                        </p:attrNameLst>
+                                      </p:cBhvr>
+                                      <p:to>
+                                        <p:strVal val="visible"/>
+                                      </p:to>
+                                    </p:set>
+                                  </p:childTnLst>
+                                </p:cTn>
+                              </p:par>
+                              <p:par>
+                                <p:cTn id="15" presetID="1" presetClass="entr" presetSubtype="0" fill="hold" nodeType="withEffect">
+                                  <p:stCondLst>
+                                    <p:cond delay="0"/>
+                                  </p:stCondLst>
+                                  <p:childTnLst>
+                                    <p:set>
+                                      <p:cBhvr>
+                                        <p:cTn id="16" dur="1" fill="hold">
+                                          <p:stCondLst>
+                                            <p:cond delay="0"/>
+                                          </p:stCondLst>
+                                        </p:cTn>
+                                        <p:tgtEl>
+                                          <p:spTgt spid="3"/>
+                                        </p:tgtEl>
+                                        <p:attrNameLst>
+                                          <p:attrName>style.visibility</p:attrName>
+                                        </p:attrNameLst>
+                                      </p:cBhvr>
+                                      <p:to>
+                                        <p:strVal val="visible"/>
+                                      </p:to>
+                                    </p:set>
+                                  </p:childTnLst>
+                                </p:cTn>
+                              </p:par>
+                            </p:childTnLst>
+                          </p:cTn>
+                        </p:par>
+                      </p:childTnLst>
+                    </p:cTn>
+                  </p:par>
+                  <p:par>
+                    <p:cTn id="17" fill="hold">
+                      <p:stCondLst>
+                        <p:cond delay="indefinite"/>
+                      </p:stCondLst>
+                      <p:childTnLst>
+                        <p:par>
+                          <p:cTn id="18" fill="hold">
+                            <p:stCondLst>
+                              <p:cond delay="0"/>
+                            </p:stCondLst>
+                            <p:childTnLst>
+                              <p:par>
+                                <p:cTn id="19" presetID="1" presetClass="entr" presetSubtype="0" fill="hold" nodeType="clickEffect">
+                                  <p:stCondLst>
+                                    <p:cond delay="0"/>
+                                  </p:stCondLst>
+                                  <p:childTnLst>
+                                    <p:set>
+                                      <p:cBhvr>
+                                        <p:cTn id="20" dur="1" fill="hold">
+                                          <p:stCondLst>
+                                            <p:cond delay="0"/>
+                                          </p:stCondLst>
+                                        </p:cTn>
+                                        <p:tgtEl>
+                                          <p:spTgt spid="20482">
+                                            <p:txEl>
+                                              <p:pRg st="8" end="8"/>
+                                            </p:txEl>
+                                          </p:spTgt>
+                                        </p:tgtEl>
+                                        <p:attrNameLst>
+                                          <p:attrName>style.visibility</p:attrName>
+                                        </p:attrNameLst>
+                                      </p:cBhvr>
+                                      <p:to>
+                                        <p:strVal val="visible"/>
+                                      </p:to>
+                                    </p:set>
+                                  </p:childTnLst>
+                                </p:cTn>
+                              </p:par>
+                            </p:childTnLst>
+                          </p:cTn>
+                        </p:par>
+                      </p:childTnLst>
+                    </p:cTn>
+                  </p:par>
+                  <p:par>
+                    <p:cTn id="21" fill="hold" nodeType="clickPar">
+                      <p:stCondLst>
+                        <p:cond delay="indefinite"/>
+                      </p:stCondLst>
+                      <p:childTnLst>
+                        <p:par>
+                          <p:cTn id="22" fill="hold" nodeType="withGroup">
+                            <p:stCondLst>
+                              <p:cond delay="0"/>
+                            </p:stCondLst>
+                            <p:childTnLst>
+                              <p:par>
+                                <p:cTn id="23" presetID="1" presetClass="entr" presetSubtype="0" fill="hold" nodeType="clickEffect">
+                                  <p:stCondLst>
+                                    <p:cond delay="0"/>
+                                  </p:stCondLst>
+                                  <p:childTnLst>
+                                    <p:set>
+                                      <p:cBhvr>
+                                        <p:cTn id="24" dur="1" fill="hold">
+                                          <p:stCondLst>
+                                            <p:cond delay="0"/>
+                                          </p:stCondLst>
+                                        </p:cTn>
+                                        <p:tgtEl>
+                                          <p:spTgt spid="20482">
+                                            <p:txEl>
+                                              <p:pRg st="9" end="9"/>
+                                            </p:txEl>
+                                          </p:spTgt>
+                                        </p:tgtEl>
+                                        <p:attrNameLst>
+                                          <p:attrName>style.visibility</p:attrName>
+                                        </p:attrNameLst>
+                                      </p:cBhvr>
+                                      <p:to>
+                                        <p:strVal val="visible"/>
+                                      </p:to>
+                                    </p:set>
+                                  </p:childTnLst>
+                                </p:cTn>
+                              </p:par>
+                            </p:childTnLst>
+                          </p:cTn>
+                        </p:par>
+                      </p:childTnLst>
+                    </p:cTn>
+                  </p:par>
+                  <p:par>
+                    <p:cTn id="25" fill="hold">
+                      <p:stCondLst>
+                        <p:cond delay="indefinite"/>
+                      </p:stCondLst>
+                      <p:childTnLst>
+                        <p:par>
+                          <p:cTn id="26" fill="hold">
+                            <p:stCondLst>
+                              <p:cond delay="0"/>
+                            </p:stCondLst>
+                            <p:childTnLst>
+                              <p:par>
+                                <p:cTn id="27" presetID="1" presetClass="entr" presetSubtype="0" fill="hold" grpId="0" nodeType="clickEffect">
+                                  <p:stCondLst>
+                                    <p:cond delay="0"/>
+                                  </p:stCondLst>
+                                  <p:childTnLst>
+                                    <p:set>
+                                      <p:cBhvr>
+                                        <p:cTn id="28" dur="1" fill="hold">
+                                          <p:stCondLst>
+                                            <p:cond delay="0"/>
+                                          </p:stCondLst>
+                                        </p:cTn>
+                                        <p:tgtEl>
+                                          <p:spTgt spid="10"/>
+                                        </p:tgtEl>
+                                        <p:attrNameLst>
+                                          <p:attrName>style.visibility</p:attrName>
+                                        </p:attrNameLst>
+                                      </p:cBhvr>
+                                      <p:to>
+                                        <p:strVal val="visible"/>
+                                      </p:to>
+                                    </p:set>
+                                  </p:childTnLst>
+                                </p:cTn>
+                              </p:par>
+                              <p:par>
+                                <p:cTn id="29" presetID="1" presetClass="entr" presetSubtype="0" fill="hold" nodeType="withEffect">
+                                  <p:stCondLst>
+                                    <p:cond delay="0"/>
+                                  </p:stCondLst>
+                                  <p:childTnLst>
+                                    <p:set>
+                                      <p:cBhvr>
+                                        <p:cTn id="30" dur="1" fill="hold">
+                                          <p:stCondLst>
+                                            <p:cond delay="0"/>
+                                          </p:stCondLst>
+                                        </p:cTn>
+                                        <p:tgtEl>
+                                          <p:spTgt spid="9"/>
+                                        </p:tgtEl>
+                                        <p:attrNameLst>
+                                          <p:attrName>style.visibility</p:attrName>
+                                        </p:attrNameLst>
+                                      </p:cBhvr>
+                                      <p:to>
+                                        <p:strVal val="visible"/>
+                                      </p:to>
+                                    </p:set>
+                                  </p:childTnLst>
+                                </p:cTn>
+                              </p:par>
+                            </p:childTnLst>
+                          </p:cTn>
+                        </p:par>
+                      </p:childTnLst>
+                    </p:cTn>
+                  </p:par>
+                </p:childTnLst>
+              </p:cTn>
+              <p:prevCondLst>
+                <p:cond evt="onPrev" delay="0">
+                  <p:tgtEl>
+                    <p:sldTgt/>
+                  </p:tgtEl>
+                </p:cond>
+              </p:prevCondLst>
+              <p:nextCondLst>
+                <p:cond evt="onNext" delay="0">
+                  <p:tgtEl>
+                    <p:sldTgt/>
+                  </p:tgtEl>
+                </p:cond>
+              </p:nextCondLst>
+            </p:seq>
+          </p:childTnLst>
+        </p:cTn>
+      </p:par>
+    </p:tnLst>
+    <p:bldLst>
+      <p:bldP spid="4" grpId="0" animBg="1"/>
+      <p:bldP spid="6" grpId="0" animBg="1"/>
+      <p:bldP spid="7" grpId="0" animBg="1"/>
+      <p:bldP spid="10" grpId="0" animBg="1"/>
+    </p:bldLst>
+  </p:timing>
+</p:sld>
+</file>
+
+<file path=ppt/slides/slide12.xml><?xml version="1.0" encoding="utf-8"?>
+<p:sld xmlns:a="http://schemas.openxmlformats.org/drawingml/2006/main" xmlns:r="http://schemas.openxmlformats.org/officeDocument/2006/relationships" xmlns:p="http://schemas.openxmlformats.org/presentationml/2006/main">
+  <p:cSld>
+    <p:spTree>
+      <p:nvGrpSpPr>
+        <p:cNvPr id="1" name=""/>
+        <p:cNvGrpSpPr/>
+        <p:nvPr/>
+      </p:nvGrpSpPr>
+      <p:grpSpPr>
+        <a:xfrm>
+          <a:off x="0" y="0"/>
+          <a:ext cx="0" cy="0"/>
+          <a:chOff x="0" y="0"/>
+          <a:chExt cx="0" cy="0"/>
+        </a:xfrm>
+      </p:grpSpPr>
+      <p:sp>
+        <p:nvSpPr>
           <p:cNvPr id="22529" name="Title 1">
             <a:extLst>
               <a:ext uri="{FF2B5EF4-FFF2-40B4-BE49-F238E27FC236}">
@@ -13285,22 +14871,25 @@
           <a:lstStyle/>
           <a:p>
             <a:r>
-              <a:rPr lang="en-US" altLang="en-US" dirty="0">
+              <a:rPr lang="en-US" altLang="en-US">
                 <a:ea typeface="ＭＳ Ｐゴシック" panose="020B0600070205080204" pitchFamily="34" charset="-128"/>
               </a:rPr>
               <a:t>UI Description Implementation</a:t>
             </a:r>
             <a:br>
-              <a:rPr lang="en-US" altLang="en-US" dirty="0">
+              <a:rPr lang="en-US" altLang="en-US">
                 <a:ea typeface="ＭＳ Ｐゴシック" panose="020B0600070205080204" pitchFamily="34" charset="-128"/>
               </a:rPr>
             </a:br>
             <a:r>
-              <a:rPr lang="en-US" altLang="en-US" sz="1800" dirty="0">
+              <a:rPr lang="en-US" altLang="en-US" sz="1800">
                 <a:ea typeface="ＭＳ Ｐゴシック" panose="020B0600070205080204" pitchFamily="34" charset="-128"/>
               </a:rPr>
               <a:t>(the imperative way)</a:t>
             </a:r>
+            <a:endParaRPr lang="en-US" altLang="en-US" sz="1800" dirty="0">
+              <a:ea typeface="ＭＳ Ｐゴシック" panose="020B0600070205080204" pitchFamily="34" charset="-128"/>
+            </a:endParaRPr>
           </a:p>
         </p:txBody>
       </p:sp>
@@ -13657,7 +15246,7 @@
                 <a:buFontTx/>
                 <a:buNone/>
               </a:pPr>
-              <a:t>10</a:t>
+              <a:t>12</a:t>
             </a:fld>
             <a:endParaRPr lang="en-US" altLang="en-US" b="0"/>
           </a:p>
@@ -13671,7 +15260,7 @@
 </p:sld>
 </file>
 
-<file path=ppt/slides/slide11.xml><?xml version="1.0" encoding="utf-8"?>
+<file path=ppt/slides/slide13.xml><?xml version="1.0" encoding="utf-8"?>
 <p:sld xmlns:a="http://schemas.openxmlformats.org/drawingml/2006/main" xmlns:r="http://schemas.openxmlformats.org/officeDocument/2006/relationships" xmlns:p="http://schemas.openxmlformats.org/presentationml/2006/main">
   <p:cSld>
     <p:spTree>
@@ -14061,7 +15650,7 @@
                 <a:buFontTx/>
                 <a:buNone/>
               </a:pPr>
-              <a:t>11</a:t>
+              <a:t>13</a:t>
             </a:fld>
             <a:endParaRPr lang="en-US" altLang="en-US" b="0"/>
           </a:p>
@@ -14105,7 +15694,7 @@
 </p:sld>
 </file>
 
-<file path=ppt/slides/slide12.xml><?xml version="1.0" encoding="utf-8"?>
+<file path=ppt/slides/slide14.xml><?xml version="1.0" encoding="utf-8"?>
 <p:sld xmlns:a="http://schemas.openxmlformats.org/drawingml/2006/main" xmlns:r="http://schemas.openxmlformats.org/officeDocument/2006/relationships" xmlns:p="http://schemas.openxmlformats.org/presentationml/2006/main">
   <p:cSld>
     <p:spTree>
@@ -14515,7 +16104,7 @@
                 <a:buFontTx/>
                 <a:buNone/>
               </a:pPr>
-              <a:t>12</a:t>
+              <a:t>14</a:t>
             </a:fld>
             <a:endParaRPr lang="en-US" altLang="en-US" b="0"/>
           </a:p>
@@ -14599,7 +16188,7 @@
 </p:sld>
 </file>
 
-<file path=ppt/slides/slide13.xml><?xml version="1.0" encoding="utf-8"?>
+<file path=ppt/slides/slide15.xml><?xml version="1.0" encoding="utf-8"?>
 <p:sld xmlns:a="http://schemas.openxmlformats.org/drawingml/2006/main" xmlns:r="http://schemas.openxmlformats.org/officeDocument/2006/relationships" xmlns:p="http://schemas.openxmlformats.org/presentationml/2006/main">
   <p:cSld>
     <p:bg>
@@ -15379,7 +16968,7 @@
                 </a:spcAft>
                 <a:buNone/>
               </a:pPr>
-              <a:t>13</a:t>
+              <a:t>15</a:t>
             </a:fld>
             <a:endParaRPr lang="en-US" altLang="en-US" sz="1000" b="0">
               <a:solidFill>
@@ -15507,7 +17096,7 @@
 </p:sld>
 </file>
 
-<file path=ppt/slides/slide14.xml><?xml version="1.0" encoding="utf-8"?>
+<file path=ppt/slides/slide16.xml><?xml version="1.0" encoding="utf-8"?>
 <p:sld xmlns:a="http://schemas.openxmlformats.org/drawingml/2006/main" xmlns:r="http://schemas.openxmlformats.org/officeDocument/2006/relationships" xmlns:p="http://schemas.openxmlformats.org/presentationml/2006/main">
   <p:cSld>
     <p:bg>
@@ -16207,7 +17796,7 @@
                 </a:spcAft>
                 <a:buNone/>
               </a:pPr>
-              <a:t>14</a:t>
+              <a:t>16</a:t>
             </a:fld>
             <a:endParaRPr lang="en-US" altLang="en-US" sz="920" b="0">
               <a:solidFill>
@@ -16580,7 +18169,7 @@
 </p:sld>
 </file>
 
-<file path=ppt/slides/slide15.xml><?xml version="1.0" encoding="utf-8"?>
+<file path=ppt/slides/slide17.xml><?xml version="1.0" encoding="utf-8"?>
 <p:sld xmlns:a="http://schemas.openxmlformats.org/drawingml/2006/main" xmlns:r="http://schemas.openxmlformats.org/officeDocument/2006/relationships" xmlns:p="http://schemas.openxmlformats.org/presentationml/2006/main">
   <p:cSld>
     <p:spTree>
@@ -17059,7 +18648,7 @@
                 <a:buFontTx/>
                 <a:buNone/>
               </a:pPr>
-              <a:t>15</a:t>
+              <a:t>17</a:t>
             </a:fld>
             <a:endParaRPr lang="en-US" altLang="en-US" b="0"/>
           </a:p>
@@ -17326,6 +18915,624 @@
 </file>
 
 <file path=ppt/slides/slide2.xml><?xml version="1.0" encoding="utf-8"?>
+<p:sld xmlns:a="http://schemas.openxmlformats.org/drawingml/2006/main" xmlns:r="http://schemas.openxmlformats.org/officeDocument/2006/relationships" xmlns:p="http://schemas.openxmlformats.org/presentationml/2006/main">
+  <p:cSld>
+    <p:bg>
+      <p:bgPr>
+        <a:solidFill>
+          <a:schemeClr val="bg1"/>
+        </a:solidFill>
+        <a:effectLst/>
+      </p:bgPr>
+    </p:bg>
+    <p:spTree>
+      <p:nvGrpSpPr>
+        <p:cNvPr id="1" name=""/>
+        <p:cNvGrpSpPr/>
+        <p:nvPr/>
+      </p:nvGrpSpPr>
+      <p:grpSpPr>
+        <a:xfrm>
+          <a:off x="0" y="0"/>
+          <a:ext cx="0" cy="0"/>
+          <a:chOff x="0" y="0"/>
+          <a:chExt cx="0" cy="0"/>
+        </a:xfrm>
+      </p:grpSpPr>
+      <p:sp>
+        <p:nvSpPr>
+          <p:cNvPr id="9" name="Rectangle 8">
+            <a:extLst>
+              <a:ext uri="{FF2B5EF4-FFF2-40B4-BE49-F238E27FC236}">
+                <a16:creationId xmlns:a16="http://schemas.microsoft.com/office/drawing/2014/main" id="{70DFC902-7D23-471A-B557-B6B6917D7A0D}"/>
+              </a:ext>
+              <a:ext uri="{C183D7F6-B498-43B3-948B-1728B52AA6E4}">
+                <adec:decorative xmlns:adec="http://schemas.microsoft.com/office/drawing/2017/decorative" val="1"/>
+              </a:ext>
+            </a:extLst>
+          </p:cNvPr>
+          <p:cNvSpPr>
+            <a:spLocks noGrp="1" noRot="1" noChangeAspect="1" noMove="1" noResize="1" noEditPoints="1" noAdjustHandles="1" noChangeArrowheads="1" noChangeShapeType="1" noTextEdit="1"/>
+          </p:cNvSpPr>
+          <p:nvPr>
+            <p:extLst>
+              <p:ext uri="{386F3935-93C4-4BCD-93E2-E3B085C9AB24}">
+                <p16:designElem xmlns:p16="http://schemas.microsoft.com/office/powerpoint/2015/main" val="1"/>
+              </p:ext>
+            </p:extLst>
+          </p:nvPr>
+        </p:nvSpPr>
+        <p:spPr>
+          <a:xfrm>
+            <a:off x="10" y="-5705"/>
+            <a:ext cx="12191990" cy="1694346"/>
+          </a:xfrm>
+          <a:prstGeom prst="rect">
+            <a:avLst/>
+          </a:prstGeom>
+          <a:solidFill>
+            <a:schemeClr val="tx1">
+              <a:lumMod val="85000"/>
+              <a:lumOff val="15000"/>
+            </a:schemeClr>
+          </a:solidFill>
+          <a:ln>
+            <a:noFill/>
+          </a:ln>
+        </p:spPr>
+        <p:style>
+          <a:lnRef idx="2">
+            <a:schemeClr val="accent1">
+              <a:shade val="50000"/>
+            </a:schemeClr>
+          </a:lnRef>
+          <a:fillRef idx="1">
+            <a:schemeClr val="accent1"/>
+          </a:fillRef>
+          <a:effectRef idx="0">
+            <a:schemeClr val="accent1"/>
+          </a:effectRef>
+          <a:fontRef idx="minor">
+            <a:schemeClr val="lt1"/>
+          </a:fontRef>
+        </p:style>
+        <p:txBody>
+          <a:bodyPr rtlCol="0" anchor="ctr"/>
+          <a:lstStyle/>
+          <a:p>
+            <a:pPr algn="ctr"/>
+            <a:endParaRPr lang="en-US"/>
+          </a:p>
+        </p:txBody>
+      </p:sp>
+      <p:sp>
+        <p:nvSpPr>
+          <p:cNvPr id="2" name="Title 1">
+            <a:extLst>
+              <a:ext uri="{FF2B5EF4-FFF2-40B4-BE49-F238E27FC236}">
+                <a16:creationId xmlns:a16="http://schemas.microsoft.com/office/drawing/2014/main" id="{9DD1DE96-CF78-D4D9-B716-F34228250301}"/>
+              </a:ext>
+            </a:extLst>
+          </p:cNvPr>
+          <p:cNvSpPr>
+            <a:spLocks noGrp="1"/>
+          </p:cNvSpPr>
+          <p:nvPr>
+            <p:ph type="title"/>
+          </p:nvPr>
+        </p:nvSpPr>
+        <p:spPr>
+          <a:xfrm>
+            <a:off x="1156851" y="637762"/>
+            <a:ext cx="9888496" cy="900131"/>
+          </a:xfrm>
+        </p:spPr>
+        <p:txBody>
+          <a:bodyPr anchor="t">
+            <a:normAutofit/>
+          </a:bodyPr>
+          <a:lstStyle/>
+          <a:p>
+            <a:pPr algn="l"/>
+            <a:r>
+              <a:rPr lang="en-GB" sz="4000">
+                <a:solidFill>
+                  <a:schemeClr val="bg1"/>
+                </a:solidFill>
+              </a:rPr>
+              <a:t>Tentative Plan</a:t>
+            </a:r>
+            <a:endParaRPr lang="en-IE" sz="4000">
+              <a:solidFill>
+                <a:schemeClr val="bg1"/>
+              </a:solidFill>
+            </a:endParaRPr>
+          </a:p>
+        </p:txBody>
+      </p:sp>
+      <p:sp>
+        <p:nvSpPr>
+          <p:cNvPr id="11" name="Rectangle 10">
+            <a:extLst>
+              <a:ext uri="{FF2B5EF4-FFF2-40B4-BE49-F238E27FC236}">
+                <a16:creationId xmlns:a16="http://schemas.microsoft.com/office/drawing/2014/main" id="{A55D5633-D557-4DCA-982C-FF36EB7A1C00}"/>
+              </a:ext>
+              <a:ext uri="{C183D7F6-B498-43B3-948B-1728B52AA6E4}">
+                <adec:decorative xmlns:adec="http://schemas.microsoft.com/office/drawing/2017/decorative" val="1"/>
+              </a:ext>
+            </a:extLst>
+          </p:cNvPr>
+          <p:cNvSpPr>
+            <a:spLocks noGrp="1" noRot="1" noChangeAspect="1" noMove="1" noResize="1" noEditPoints="1" noAdjustHandles="1" noChangeArrowheads="1" noChangeShapeType="1" noTextEdit="1"/>
+          </p:cNvSpPr>
+          <p:nvPr>
+            <p:extLst>
+              <p:ext uri="{386F3935-93C4-4BCD-93E2-E3B085C9AB24}">
+                <p16:designElem xmlns:p16="http://schemas.microsoft.com/office/powerpoint/2015/main" val="1"/>
+              </p:ext>
+            </p:extLst>
+          </p:nvPr>
+        </p:nvSpPr>
+        <p:spPr>
+          <a:xfrm>
+            <a:off x="0" y="1688641"/>
+            <a:ext cx="12191990" cy="5169359"/>
+          </a:xfrm>
+          <a:prstGeom prst="rect">
+            <a:avLst/>
+          </a:prstGeom>
+          <a:solidFill>
+            <a:schemeClr val="bg1">
+              <a:lumMod val="95000"/>
+            </a:schemeClr>
+          </a:solidFill>
+          <a:ln>
+            <a:noFill/>
+          </a:ln>
+        </p:spPr>
+        <p:style>
+          <a:lnRef idx="2">
+            <a:schemeClr val="accent1">
+              <a:shade val="50000"/>
+            </a:schemeClr>
+          </a:lnRef>
+          <a:fillRef idx="1">
+            <a:schemeClr val="accent1"/>
+          </a:fillRef>
+          <a:effectRef idx="0">
+            <a:schemeClr val="accent1"/>
+          </a:effectRef>
+          <a:fontRef idx="minor">
+            <a:schemeClr val="lt1"/>
+          </a:fontRef>
+        </p:style>
+        <p:txBody>
+          <a:bodyPr rtlCol="0" anchor="ctr"/>
+          <a:lstStyle/>
+          <a:p>
+            <a:pPr algn="ctr"/>
+            <a:endParaRPr lang="en-US"/>
+          </a:p>
+        </p:txBody>
+      </p:sp>
+      <p:sp>
+        <p:nvSpPr>
+          <p:cNvPr id="13" name="Rectangle 12">
+            <a:extLst>
+              <a:ext uri="{FF2B5EF4-FFF2-40B4-BE49-F238E27FC236}">
+                <a16:creationId xmlns:a16="http://schemas.microsoft.com/office/drawing/2014/main" id="{450D3AD2-FA80-415F-A9CE-54D884561CD7}"/>
+              </a:ext>
+              <a:ext uri="{C183D7F6-B498-43B3-948B-1728B52AA6E4}">
+                <adec:decorative xmlns:adec="http://schemas.microsoft.com/office/drawing/2017/decorative" val="1"/>
+              </a:ext>
+            </a:extLst>
+          </p:cNvPr>
+          <p:cNvSpPr>
+            <a:spLocks noGrp="1" noRot="1" noChangeAspect="1" noMove="1" noResize="1" noEditPoints="1" noAdjustHandles="1" noChangeArrowheads="1" noChangeShapeType="1" noTextEdit="1"/>
+          </p:cNvSpPr>
+          <p:nvPr>
+            <p:extLst>
+              <p:ext uri="{386F3935-93C4-4BCD-93E2-E3B085C9AB24}">
+                <p16:designElem xmlns:p16="http://schemas.microsoft.com/office/powerpoint/2015/main" val="1"/>
+              </p:ext>
+            </p:extLst>
+          </p:nvPr>
+        </p:nvSpPr>
+        <p:spPr>
+          <a:xfrm>
+            <a:off x="1156851" y="2010758"/>
+            <a:ext cx="457190" cy="45719"/>
+          </a:xfrm>
+          <a:prstGeom prst="rect">
+            <a:avLst/>
+          </a:prstGeom>
+          <a:solidFill>
+            <a:schemeClr val="tx1"/>
+          </a:solidFill>
+          <a:ln>
+            <a:noFill/>
+          </a:ln>
+        </p:spPr>
+        <p:style>
+          <a:lnRef idx="2">
+            <a:schemeClr val="accent1">
+              <a:shade val="50000"/>
+            </a:schemeClr>
+          </a:lnRef>
+          <a:fillRef idx="1">
+            <a:schemeClr val="accent1"/>
+          </a:fillRef>
+          <a:effectRef idx="0">
+            <a:schemeClr val="accent1"/>
+          </a:effectRef>
+          <a:fontRef idx="minor">
+            <a:schemeClr val="lt1"/>
+          </a:fontRef>
+        </p:style>
+        <p:txBody>
+          <a:bodyPr rtlCol="0" anchor="ctr"/>
+          <a:lstStyle/>
+          <a:p>
+            <a:pPr algn="ctr"/>
+            <a:endParaRPr lang="en-US"/>
+          </a:p>
+        </p:txBody>
+      </p:sp>
+      <p:sp>
+        <p:nvSpPr>
+          <p:cNvPr id="4" name="Slide Number Placeholder 3">
+            <a:extLst>
+              <a:ext uri="{FF2B5EF4-FFF2-40B4-BE49-F238E27FC236}">
+                <a16:creationId xmlns:a16="http://schemas.microsoft.com/office/drawing/2014/main" id="{81D816A7-F0BB-8DEB-2E1E-2BE876EA2E23}"/>
+              </a:ext>
+            </a:extLst>
+          </p:cNvPr>
+          <p:cNvSpPr>
+            <a:spLocks noGrp="1"/>
+          </p:cNvSpPr>
+          <p:nvPr>
+            <p:ph type="sldNum" sz="quarter" idx="12"/>
+          </p:nvPr>
+        </p:nvSpPr>
+        <p:spPr>
+          <a:xfrm>
+            <a:off x="160867" y="3246439"/>
+            <a:ext cx="672957" cy="343768"/>
+          </a:xfrm>
+        </p:spPr>
+        <p:txBody>
+          <a:bodyPr anchor="ctr">
+            <a:normAutofit/>
+          </a:bodyPr>
+          <a:lstStyle/>
+          <a:p>
+            <a:pPr algn="ctr">
+              <a:spcAft>
+                <a:spcPts val="600"/>
+              </a:spcAft>
+              <a:defRPr/>
+            </a:pPr>
+            <a:fld id="{FF20FD76-2600-470C-B220-FCD85C8E166D}" type="slidenum">
+              <a:rPr lang="en-US" altLang="en-US" smtClean="0"/>
+              <a:pPr algn="ctr">
+                <a:spcAft>
+                  <a:spcPts val="600"/>
+                </a:spcAft>
+                <a:defRPr/>
+              </a:pPr>
+              <a:t>2</a:t>
+            </a:fld>
+            <a:endParaRPr lang="en-US" altLang="en-US"/>
+          </a:p>
+        </p:txBody>
+      </p:sp>
+      <p:sp>
+        <p:nvSpPr>
+          <p:cNvPr id="3" name="Content Placeholder 2">
+            <a:extLst>
+              <a:ext uri="{FF2B5EF4-FFF2-40B4-BE49-F238E27FC236}">
+                <a16:creationId xmlns:a16="http://schemas.microsoft.com/office/drawing/2014/main" id="{38CE3104-437E-49A4-6C07-A4408103BC91}"/>
+              </a:ext>
+            </a:extLst>
+          </p:cNvPr>
+          <p:cNvSpPr>
+            <a:spLocks noGrp="1"/>
+          </p:cNvSpPr>
+          <p:nvPr>
+            <p:ph idx="1"/>
+          </p:nvPr>
+        </p:nvSpPr>
+        <p:spPr>
+          <a:xfrm>
+            <a:off x="1155548" y="2217343"/>
+            <a:ext cx="9880893" cy="3959619"/>
+          </a:xfrm>
+        </p:spPr>
+        <p:txBody>
+          <a:bodyPr>
+            <a:normAutofit lnSpcReduction="10000"/>
+          </a:bodyPr>
+          <a:lstStyle/>
+          <a:p>
+            <a:pPr>
+              <a:lnSpc>
+                <a:spcPct val="90000"/>
+              </a:lnSpc>
+            </a:pPr>
+            <a:r>
+              <a:rPr lang="en-GB" sz="2000" dirty="0"/>
+              <a:t>React/Vite/Typescript/Material UI/Programming Patterns</a:t>
+            </a:r>
+          </a:p>
+          <a:p>
+            <a:pPr>
+              <a:lnSpc>
+                <a:spcPct val="90000"/>
+              </a:lnSpc>
+            </a:pPr>
+            <a:r>
+              <a:rPr lang="en-IE" sz="2000" dirty="0"/>
+              <a:t>Growing use of AI assistants in Software Dev </a:t>
+            </a:r>
+          </a:p>
+          <a:p>
+            <a:pPr>
+              <a:lnSpc>
+                <a:spcPct val="90000"/>
+              </a:lnSpc>
+            </a:pPr>
+            <a:r>
+              <a:rPr lang="en-IE" sz="2000" dirty="0"/>
+              <a:t>“Effective AI </a:t>
+            </a:r>
+            <a:r>
+              <a:rPr lang="en-IE" sz="2000" dirty="0" err="1"/>
+              <a:t>Useage</a:t>
+            </a:r>
+            <a:r>
+              <a:rPr lang="en-IE" sz="2000" dirty="0"/>
+              <a:t> in Software Development”</a:t>
+            </a:r>
+          </a:p>
+          <a:p>
+            <a:pPr lvl="1">
+              <a:lnSpc>
+                <a:spcPct val="90000"/>
+              </a:lnSpc>
+            </a:pPr>
+            <a:r>
+              <a:rPr lang="en-IE" sz="2000" dirty="0"/>
+              <a:t>Need to know Technologies, tools, patterns, styles that work for you</a:t>
+            </a:r>
+          </a:p>
+          <a:p>
+            <a:pPr lvl="1">
+              <a:lnSpc>
+                <a:spcPct val="90000"/>
+              </a:lnSpc>
+            </a:pPr>
+            <a:r>
+              <a:rPr lang="en-IE" sz="2000" dirty="0"/>
+              <a:t>Need AI assistant to match that</a:t>
+            </a:r>
+          </a:p>
+          <a:p>
+            <a:pPr>
+              <a:lnSpc>
+                <a:spcPct val="90000"/>
+              </a:lnSpc>
+            </a:pPr>
+            <a:r>
+              <a:rPr lang="en-IE" sz="2000" dirty="0"/>
+              <a:t>Skills-based AI assistance</a:t>
+            </a:r>
+          </a:p>
+          <a:p>
+            <a:pPr lvl="1">
+              <a:lnSpc>
+                <a:spcPct val="90000"/>
+              </a:lnSpc>
+            </a:pPr>
+            <a:r>
+              <a:rPr lang="en-IE" sz="2000" dirty="0"/>
+              <a:t>Build knowledge/skills though initial labs/lectures</a:t>
+            </a:r>
+          </a:p>
+          <a:p>
+            <a:pPr lvl="1">
+              <a:lnSpc>
+                <a:spcPct val="90000"/>
+              </a:lnSpc>
+            </a:pPr>
+            <a:r>
+              <a:rPr lang="en-IE" sz="2000" dirty="0"/>
+              <a:t>Start to construct a personal “Skills Repo” that AI can reference</a:t>
+            </a:r>
+          </a:p>
+          <a:p>
+            <a:pPr lvl="1">
+              <a:lnSpc>
+                <a:spcPct val="90000"/>
+              </a:lnSpc>
+            </a:pPr>
+            <a:r>
+              <a:rPr lang="en-IE" sz="2000" dirty="0"/>
+              <a:t>Use AI to develop artifacts/code that you can review/maintain/understand</a:t>
+            </a:r>
+          </a:p>
+          <a:p>
+            <a:pPr lvl="2">
+              <a:lnSpc>
+                <a:spcPct val="90000"/>
+              </a:lnSpc>
+            </a:pPr>
+            <a:r>
+              <a:rPr lang="en-IE" sz="2000" dirty="0"/>
+              <a:t>Not Vibe coding</a:t>
+            </a:r>
+          </a:p>
+          <a:p>
+            <a:pPr lvl="2">
+              <a:lnSpc>
+                <a:spcPct val="90000"/>
+              </a:lnSpc>
+            </a:pPr>
+            <a:r>
+              <a:rPr lang="en-IE" sz="2000" dirty="0"/>
+              <a:t>Informed by Spec Driven Development</a:t>
+            </a:r>
+          </a:p>
+          <a:p>
+            <a:pPr>
+              <a:lnSpc>
+                <a:spcPct val="90000"/>
+              </a:lnSpc>
+            </a:pPr>
+            <a:r>
+              <a:rPr lang="en-IE" sz="2000" dirty="0"/>
+              <a:t>Still forming assignment goals/assessment/deliverables for this!!!!</a:t>
+            </a:r>
+          </a:p>
+        </p:txBody>
+      </p:sp>
+    </p:spTree>
+    <p:extLst>
+      <p:ext uri="{BB962C8B-B14F-4D97-AF65-F5344CB8AC3E}">
+        <p14:creationId xmlns:p14="http://schemas.microsoft.com/office/powerpoint/2010/main" val="1098908316"/>
+      </p:ext>
+    </p:extLst>
+  </p:cSld>
+  <p:clrMapOvr>
+    <a:masterClrMapping/>
+  </p:clrMapOvr>
+</p:sld>
+</file>
+
+<file path=ppt/slides/slide3.xml><?xml version="1.0" encoding="utf-8"?>
+<p:sld xmlns:a="http://schemas.openxmlformats.org/drawingml/2006/main" xmlns:r="http://schemas.openxmlformats.org/officeDocument/2006/relationships" xmlns:p="http://schemas.openxmlformats.org/presentationml/2006/main">
+  <p:cSld>
+    <p:spTree>
+      <p:nvGrpSpPr>
+        <p:cNvPr id="1" name=""/>
+        <p:cNvGrpSpPr/>
+        <p:nvPr/>
+      </p:nvGrpSpPr>
+      <p:grpSpPr>
+        <a:xfrm>
+          <a:off x="0" y="0"/>
+          <a:ext cx="0" cy="0"/>
+          <a:chOff x="0" y="0"/>
+          <a:chExt cx="0" cy="0"/>
+        </a:xfrm>
+      </p:grpSpPr>
+      <p:sp>
+        <p:nvSpPr>
+          <p:cNvPr id="2" name="Title 1">
+            <a:extLst>
+              <a:ext uri="{FF2B5EF4-FFF2-40B4-BE49-F238E27FC236}">
+                <a16:creationId xmlns:a16="http://schemas.microsoft.com/office/drawing/2014/main" id="{BF820529-59E2-D44D-CDF6-5F25593ECC9B}"/>
+              </a:ext>
+            </a:extLst>
+          </p:cNvPr>
+          <p:cNvSpPr>
+            <a:spLocks noGrp="1"/>
+          </p:cNvSpPr>
+          <p:nvPr>
+            <p:ph type="title"/>
+          </p:nvPr>
+        </p:nvSpPr>
+        <p:spPr/>
+        <p:txBody>
+          <a:bodyPr/>
+          <a:lstStyle/>
+          <a:p>
+            <a:r>
+              <a:rPr lang="en-GB"/>
+              <a:t>Tentative Plan</a:t>
+            </a:r>
+            <a:endParaRPr lang="en-IE" dirty="0"/>
+          </a:p>
+        </p:txBody>
+      </p:sp>
+      <p:sp>
+        <p:nvSpPr>
+          <p:cNvPr id="3" name="Slide Number Placeholder 2">
+            <a:extLst>
+              <a:ext uri="{FF2B5EF4-FFF2-40B4-BE49-F238E27FC236}">
+                <a16:creationId xmlns:a16="http://schemas.microsoft.com/office/drawing/2014/main" id="{05B96712-A760-9DCD-3DAD-01D6E5EAFE64}"/>
+              </a:ext>
+            </a:extLst>
+          </p:cNvPr>
+          <p:cNvSpPr>
+            <a:spLocks noGrp="1"/>
+          </p:cNvSpPr>
+          <p:nvPr>
+            <p:ph type="sldNum" sz="quarter" idx="12"/>
+          </p:nvPr>
+        </p:nvSpPr>
+        <p:spPr/>
+        <p:txBody>
+          <a:bodyPr/>
+          <a:lstStyle/>
+          <a:p>
+            <a:pPr>
+              <a:defRPr/>
+            </a:pPr>
+            <a:fld id="{15C525B3-71AC-4963-81CC-476B7FE86059}" type="slidenum">
+              <a:rPr lang="en-US" altLang="en-US" smtClean="0"/>
+              <a:pPr>
+                <a:defRPr/>
+              </a:pPr>
+              <a:t>3</a:t>
+            </a:fld>
+            <a:endParaRPr lang="en-US" altLang="en-US"/>
+          </a:p>
+        </p:txBody>
+      </p:sp>
+      <p:pic>
+        <p:nvPicPr>
+          <p:cNvPr id="6" name="Picture 5">
+            <a:extLst>
+              <a:ext uri="{FF2B5EF4-FFF2-40B4-BE49-F238E27FC236}">
+                <a16:creationId xmlns:a16="http://schemas.microsoft.com/office/drawing/2014/main" id="{B52D0F5C-58FF-40BC-C684-DE2B127A6934}"/>
+              </a:ext>
+            </a:extLst>
+          </p:cNvPr>
+          <p:cNvPicPr>
+            <a:picLocks noChangeAspect="1"/>
+          </p:cNvPicPr>
+          <p:nvPr/>
+        </p:nvPicPr>
+        <p:blipFill>
+          <a:blip r:embed="rId3"/>
+          <a:stretch>
+            <a:fillRect/>
+          </a:stretch>
+        </p:blipFill>
+        <p:spPr>
+          <a:xfrm>
+            <a:off x="825229" y="47451"/>
+            <a:ext cx="10541542" cy="6763098"/>
+          </a:xfrm>
+          <a:prstGeom prst="rect">
+            <a:avLst/>
+          </a:prstGeom>
+        </p:spPr>
+      </p:pic>
+    </p:spTree>
+    <p:extLst>
+      <p:ext uri="{BB962C8B-B14F-4D97-AF65-F5344CB8AC3E}">
+        <p14:creationId xmlns:p14="http://schemas.microsoft.com/office/powerpoint/2010/main" val="4194420870"/>
+      </p:ext>
+    </p:extLst>
+  </p:cSld>
+  <p:clrMapOvr>
+    <a:masterClrMapping/>
+  </p:clrMapOvr>
+</p:sld>
+</file>
+
+<file path=ppt/slides/slide4.xml><?xml version="1.0" encoding="utf-8"?>
 <p:sld xmlns:a="http://schemas.openxmlformats.org/drawingml/2006/main" xmlns:r="http://schemas.openxmlformats.org/officeDocument/2006/relationships" xmlns:p="http://schemas.openxmlformats.org/presentationml/2006/main">
   <p:cSld>
     <p:bg>
@@ -17646,7 +19853,7 @@
                 <a:buFontTx/>
                 <a:buNone/>
               </a:pPr>
-              <a:t>2</a:t>
+              <a:t>4</a:t>
             </a:fld>
             <a:endParaRPr lang="en-US" altLang="en-US" b="0"/>
           </a:p>
@@ -17691,7 +19898,7 @@
 </p:sld>
 </file>
 
-<file path=ppt/slides/slide3.xml><?xml version="1.0" encoding="utf-8"?>
+<file path=ppt/slides/slide5.xml><?xml version="1.0" encoding="utf-8"?>
 <p:sld xmlns:a="http://schemas.openxmlformats.org/drawingml/2006/main" xmlns:r="http://schemas.openxmlformats.org/officeDocument/2006/relationships" xmlns:p="http://schemas.openxmlformats.org/presentationml/2006/main">
   <p:cSld>
     <p:bg>
@@ -23139,7 +25346,7 @@
                 </a:spcAft>
                 <a:buNone/>
               </a:pPr>
-              <a:t>3</a:t>
+              <a:t>5</a:t>
             </a:fld>
             <a:endParaRPr lang="en-US" altLang="en-US" b="0"/>
           </a:p>
@@ -23153,7 +25360,7 @@
 </p:sld>
 </file>
 
-<file path=ppt/slides/slide4.xml><?xml version="1.0" encoding="utf-8"?>
+<file path=ppt/slides/slide6.xml><?xml version="1.0" encoding="utf-8"?>
 <p:sld xmlns:a="http://schemas.openxmlformats.org/drawingml/2006/main" xmlns:r="http://schemas.openxmlformats.org/officeDocument/2006/relationships" xmlns:p="http://schemas.openxmlformats.org/presentationml/2006/main">
   <p:cSld>
     <p:spTree>
@@ -23222,17 +25429,17 @@
         </p:blipFill>
         <p:spPr>
           <a:xfrm>
-            <a:off x="2197376" y="1987153"/>
+            <a:off x="2209800" y="1981200"/>
             <a:ext cx="5692637" cy="3916073"/>
           </a:xfrm>
         </p:spPr>
       </p:pic>
       <p:pic>
         <p:nvPicPr>
-          <p:cNvPr id="11" name="Picture 10">
+          <p:cNvPr id="4" name="Picture 3">
             <a:extLst>
               <a:ext uri="{FF2B5EF4-FFF2-40B4-BE49-F238E27FC236}">
-                <a16:creationId xmlns:a16="http://schemas.microsoft.com/office/drawing/2014/main" id="{52F422A0-4294-3F7A-372B-0529CBF48FE1}"/>
+                <a16:creationId xmlns:a16="http://schemas.microsoft.com/office/drawing/2014/main" id="{9BA940DD-8B32-3B9C-37C6-56A40415AE5C}"/>
               </a:ext>
             </a:extLst>
           </p:cNvPr>
@@ -23249,8 +25456,8 @@
         </p:blipFill>
         <p:spPr>
           <a:xfrm>
-            <a:off x="4767543" y="1294391"/>
-            <a:ext cx="5012489" cy="1297418"/>
+            <a:off x="4572000" y="1171574"/>
+            <a:ext cx="4876800" cy="2257426"/>
           </a:xfrm>
           <a:prstGeom prst="rect">
             <a:avLst/>
@@ -23270,7 +25477,7 @@
 </p:sld>
 </file>
 
-<file path=ppt/slides/slide5.xml><?xml version="1.0" encoding="utf-8"?>
+<file path=ppt/slides/slide7.xml><?xml version="1.0" encoding="utf-8"?>
 <p:sld xmlns:a="http://schemas.openxmlformats.org/drawingml/2006/main" xmlns:r="http://schemas.openxmlformats.org/officeDocument/2006/relationships" xmlns:p="http://schemas.openxmlformats.org/presentationml/2006/main">
   <p:cSld>
     <p:bg>
@@ -26388,7 +28595,7 @@
                 </a:spcAft>
                 <a:buNone/>
               </a:pPr>
-              <a:t>5</a:t>
+              <a:t>7</a:t>
             </a:fld>
             <a:endParaRPr lang="en-US" altLang="en-US" b="0"/>
           </a:p>
@@ -26601,7 +28808,7 @@
 </p:sld>
 </file>
 
-<file path=ppt/slides/slide6.xml><?xml version="1.0" encoding="utf-8"?>
+<file path=ppt/slides/slide8.xml><?xml version="1.0" encoding="utf-8"?>
 <p:sld xmlns:a="http://schemas.openxmlformats.org/drawingml/2006/main" xmlns:r="http://schemas.openxmlformats.org/officeDocument/2006/relationships" xmlns:p="http://schemas.openxmlformats.org/presentationml/2006/main">
   <p:cSld>
     <p:bg>
@@ -29781,7 +31988,7 @@
                 <a:buFontTx/>
                 <a:buNone/>
               </a:pPr>
-              <a:t>6</a:t>
+              <a:t>8</a:t>
             </a:fld>
             <a:endParaRPr lang="en-US" altLang="en-US" b="0"/>
           </a:p>
@@ -30167,7 +32374,7 @@
 </p:sld>
 </file>
 
-<file path=ppt/slides/slide7.xml><?xml version="1.0" encoding="utf-8"?>
+<file path=ppt/slides/slide9.xml><?xml version="1.0" encoding="utf-8"?>
 <p:sld xmlns:a="http://schemas.openxmlformats.org/drawingml/2006/main" xmlns:r="http://schemas.openxmlformats.org/officeDocument/2006/relationships" xmlns:p="http://schemas.openxmlformats.org/presentationml/2006/main">
   <p:cSld>
     <p:bg>
@@ -32894,7 +35101,7 @@
                 </a:spcAft>
                 <a:defRPr/>
               </a:pPr>
-              <a:t>7</a:t>
+              <a:t>9</a:t>
             </a:fld>
             <a:endParaRPr lang="en-US" altLang="en-US"/>
           </a:p>
@@ -32999,1500 +35206,6 @@
   <p:clrMapOvr>
     <a:masterClrMapping/>
   </p:clrMapOvr>
-</p:sld>
-</file>
-
-<file path=ppt/slides/slide8.xml><?xml version="1.0" encoding="utf-8"?>
-<p:sld xmlns:a="http://schemas.openxmlformats.org/drawingml/2006/main" xmlns:r="http://schemas.openxmlformats.org/officeDocument/2006/relationships" xmlns:p="http://schemas.openxmlformats.org/presentationml/2006/main">
-  <p:cSld>
-    <p:spTree>
-      <p:nvGrpSpPr>
-        <p:cNvPr id="1" name=""/>
-        <p:cNvGrpSpPr/>
-        <p:nvPr/>
-      </p:nvGrpSpPr>
-      <p:grpSpPr>
-        <a:xfrm>
-          <a:off x="0" y="0"/>
-          <a:ext cx="0" cy="0"/>
-          <a:chOff x="0" y="0"/>
-          <a:chExt cx="0" cy="0"/>
-        </a:xfrm>
-      </p:grpSpPr>
-      <p:sp>
-        <p:nvSpPr>
-          <p:cNvPr id="21505" name="Title 1">
-            <a:extLst>
-              <a:ext uri="{FF2B5EF4-FFF2-40B4-BE49-F238E27FC236}">
-                <a16:creationId xmlns:a16="http://schemas.microsoft.com/office/drawing/2014/main" id="{5540338F-0047-817D-33BC-1F0F33ECC917}"/>
-              </a:ext>
-            </a:extLst>
-          </p:cNvPr>
-          <p:cNvSpPr>
-            <a:spLocks noGrp="1" noChangeArrowheads="1"/>
-          </p:cNvSpPr>
-          <p:nvPr>
-            <p:ph type="title"/>
-          </p:nvPr>
-        </p:nvSpPr>
-        <p:spPr/>
-        <p:txBody>
-          <a:bodyPr/>
-          <a:lstStyle/>
-          <a:p>
-            <a:r>
-              <a:rPr lang="en-US" altLang="en-US" dirty="0">
-                <a:ea typeface="ＭＳ Ｐゴシック" panose="020B0600070205080204" pitchFamily="34" charset="-128"/>
-              </a:rPr>
-              <a:t>In-Class Code Demos.</a:t>
-            </a:r>
-            <a:br>
-              <a:rPr lang="en-US" altLang="en-US" dirty="0">
-                <a:ea typeface="ＭＳ Ｐゴシック" panose="020B0600070205080204" pitchFamily="34" charset="-128"/>
-              </a:rPr>
-            </a:br>
-            <a:r>
-              <a:rPr lang="en-US" altLang="en-US" sz="2400" dirty="0">
-                <a:ea typeface="ＭＳ Ｐゴシック" panose="020B0600070205080204" pitchFamily="34" charset="-128"/>
-              </a:rPr>
-              <a:t>(See lecture archive)</a:t>
-            </a:r>
-          </a:p>
-        </p:txBody>
-      </p:sp>
-      <p:sp>
-        <p:nvSpPr>
-          <p:cNvPr id="21506" name="Slide Number Placeholder 3">
-            <a:extLst>
-              <a:ext uri="{FF2B5EF4-FFF2-40B4-BE49-F238E27FC236}">
-                <a16:creationId xmlns:a16="http://schemas.microsoft.com/office/drawing/2014/main" id="{BFCD649D-2ECE-3525-5908-56A7B8D9D2BC}"/>
-              </a:ext>
-            </a:extLst>
-          </p:cNvPr>
-          <p:cNvSpPr>
-            <a:spLocks noGrp="1"/>
-          </p:cNvSpPr>
-          <p:nvPr>
-            <p:ph type="sldNum" sz="quarter" idx="12"/>
-          </p:nvPr>
-        </p:nvSpPr>
-        <p:spPr>
-          <a:noFill/>
-          <a:ln/>
-          <a:extLst>
-            <a:ext uri="{909E8E84-426E-40DD-AFC4-6F175D3DCCD1}">
-              <a14:hiddenFill xmlns:a14="http://schemas.microsoft.com/office/drawing/2010/main">
-                <a:solidFill>
-                  <a:srgbClr val="FFFFFF"/>
-                </a:solidFill>
-              </a14:hiddenFill>
-            </a:ext>
-            <a:ext uri="{91240B29-F687-4F45-9708-019B960494DF}">
-              <a14:hiddenLine xmlns:a14="http://schemas.microsoft.com/office/drawing/2010/main" w="9525">
-                <a:solidFill>
-                  <a:srgbClr val="000000"/>
-                </a:solidFill>
-                <a:miter lim="800000"/>
-                <a:headEnd/>
-                <a:tailEnd/>
-              </a14:hiddenLine>
-            </a:ext>
-          </a:extLst>
-        </p:spPr>
-        <p:txBody>
-          <a:bodyPr/>
-          <a:lstStyle>
-            <a:lvl1pPr>
-              <a:spcBef>
-                <a:spcPct val="20000"/>
-              </a:spcBef>
-              <a:buChar char="•"/>
-              <a:defRPr b="1">
-                <a:solidFill>
-                  <a:schemeClr val="tx1"/>
-                </a:solidFill>
-                <a:latin typeface="Arial" panose="020B0604020202020204" pitchFamily="34" charset="0"/>
-                <a:ea typeface="ＭＳ Ｐゴシック" panose="020B0600070205080204" pitchFamily="34" charset="-128"/>
-              </a:defRPr>
-            </a:lvl1pPr>
-            <a:lvl2pPr marL="742950" indent="-285750">
-              <a:spcBef>
-                <a:spcPct val="20000"/>
-              </a:spcBef>
-              <a:buChar char="–"/>
-              <a:defRPr b="1">
-                <a:solidFill>
-                  <a:schemeClr val="tx1"/>
-                </a:solidFill>
-                <a:latin typeface="Arial" panose="020B0604020202020204" pitchFamily="34" charset="0"/>
-                <a:ea typeface="ＭＳ Ｐゴシック" panose="020B0600070205080204" pitchFamily="34" charset="-128"/>
-              </a:defRPr>
-            </a:lvl2pPr>
-            <a:lvl3pPr marL="1143000" indent="-228600">
-              <a:spcBef>
-                <a:spcPct val="20000"/>
-              </a:spcBef>
-              <a:buChar char="•"/>
-              <a:defRPr b="1">
-                <a:solidFill>
-                  <a:schemeClr val="tx1"/>
-                </a:solidFill>
-                <a:latin typeface="Arial" panose="020B0604020202020204" pitchFamily="34" charset="0"/>
-                <a:ea typeface="ＭＳ Ｐゴシック" panose="020B0600070205080204" pitchFamily="34" charset="-128"/>
-              </a:defRPr>
-            </a:lvl3pPr>
-            <a:lvl4pPr marL="1600200" indent="-228600">
-              <a:spcBef>
-                <a:spcPct val="20000"/>
-              </a:spcBef>
-              <a:buChar char="–"/>
-              <a:defRPr b="1">
-                <a:solidFill>
-                  <a:schemeClr val="tx1"/>
-                </a:solidFill>
-                <a:latin typeface="Arial" panose="020B0604020202020204" pitchFamily="34" charset="0"/>
-                <a:ea typeface="ＭＳ Ｐゴシック" panose="020B0600070205080204" pitchFamily="34" charset="-128"/>
-              </a:defRPr>
-            </a:lvl4pPr>
-            <a:lvl5pPr marL="2057400" indent="-228600">
-              <a:spcBef>
-                <a:spcPct val="20000"/>
-              </a:spcBef>
-              <a:buChar char="»"/>
-              <a:defRPr b="1">
-                <a:solidFill>
-                  <a:schemeClr val="tx1"/>
-                </a:solidFill>
-                <a:latin typeface="Arial" panose="020B0604020202020204" pitchFamily="34" charset="0"/>
-                <a:ea typeface="ＭＳ Ｐゴシック" panose="020B0600070205080204" pitchFamily="34" charset="-128"/>
-              </a:defRPr>
-            </a:lvl5pPr>
-            <a:lvl6pPr marL="2514600" indent="-228600" eaLnBrk="0" fontAlgn="base" hangingPunct="0">
-              <a:spcBef>
-                <a:spcPct val="20000"/>
-              </a:spcBef>
-              <a:spcAft>
-                <a:spcPct val="0"/>
-              </a:spcAft>
-              <a:buChar char="»"/>
-              <a:defRPr b="1">
-                <a:solidFill>
-                  <a:schemeClr val="tx1"/>
-                </a:solidFill>
-                <a:latin typeface="Arial" panose="020B0604020202020204" pitchFamily="34" charset="0"/>
-                <a:ea typeface="ＭＳ Ｐゴシック" panose="020B0600070205080204" pitchFamily="34" charset="-128"/>
-              </a:defRPr>
-            </a:lvl6pPr>
-            <a:lvl7pPr marL="2971800" indent="-228600" eaLnBrk="0" fontAlgn="base" hangingPunct="0">
-              <a:spcBef>
-                <a:spcPct val="20000"/>
-              </a:spcBef>
-              <a:spcAft>
-                <a:spcPct val="0"/>
-              </a:spcAft>
-              <a:buChar char="»"/>
-              <a:defRPr b="1">
-                <a:solidFill>
-                  <a:schemeClr val="tx1"/>
-                </a:solidFill>
-                <a:latin typeface="Arial" panose="020B0604020202020204" pitchFamily="34" charset="0"/>
-                <a:ea typeface="ＭＳ Ｐゴシック" panose="020B0600070205080204" pitchFamily="34" charset="-128"/>
-              </a:defRPr>
-            </a:lvl7pPr>
-            <a:lvl8pPr marL="3429000" indent="-228600" eaLnBrk="0" fontAlgn="base" hangingPunct="0">
-              <a:spcBef>
-                <a:spcPct val="20000"/>
-              </a:spcBef>
-              <a:spcAft>
-                <a:spcPct val="0"/>
-              </a:spcAft>
-              <a:buChar char="»"/>
-              <a:defRPr b="1">
-                <a:solidFill>
-                  <a:schemeClr val="tx1"/>
-                </a:solidFill>
-                <a:latin typeface="Arial" panose="020B0604020202020204" pitchFamily="34" charset="0"/>
-                <a:ea typeface="ＭＳ Ｐゴシック" panose="020B0600070205080204" pitchFamily="34" charset="-128"/>
-              </a:defRPr>
-            </a:lvl8pPr>
-            <a:lvl9pPr marL="3886200" indent="-228600" eaLnBrk="0" fontAlgn="base" hangingPunct="0">
-              <a:spcBef>
-                <a:spcPct val="20000"/>
-              </a:spcBef>
-              <a:spcAft>
-                <a:spcPct val="0"/>
-              </a:spcAft>
-              <a:buChar char="»"/>
-              <a:defRPr b="1">
-                <a:solidFill>
-                  <a:schemeClr val="tx1"/>
-                </a:solidFill>
-                <a:latin typeface="Arial" panose="020B0604020202020204" pitchFamily="34" charset="0"/>
-                <a:ea typeface="ＭＳ Ｐゴシック" panose="020B0600070205080204" pitchFamily="34" charset="-128"/>
-              </a:defRPr>
-            </a:lvl9pPr>
-          </a:lstStyle>
-          <a:p>
-            <a:pPr>
-              <a:spcBef>
-                <a:spcPct val="0"/>
-              </a:spcBef>
-              <a:buFontTx/>
-              <a:buNone/>
-            </a:pPr>
-            <a:fld id="{9C6B1C8A-6C76-417A-BCA1-70D0DFFCDDE2}" type="slidenum">
-              <a:rPr lang="en-US" altLang="en-US" b="0" smtClean="0"/>
-              <a:pPr>
-                <a:spcBef>
-                  <a:spcPct val="0"/>
-                </a:spcBef>
-                <a:buFontTx/>
-                <a:buNone/>
-              </a:pPr>
-              <a:t>8</a:t>
-            </a:fld>
-            <a:endParaRPr lang="en-US" altLang="en-US" b="0"/>
-          </a:p>
-        </p:txBody>
-      </p:sp>
-      <p:pic>
-        <p:nvPicPr>
-          <p:cNvPr id="6" name="Picture 5">
-            <a:extLst>
-              <a:ext uri="{FF2B5EF4-FFF2-40B4-BE49-F238E27FC236}">
-                <a16:creationId xmlns:a16="http://schemas.microsoft.com/office/drawing/2014/main" id="{6E91695F-7035-993A-4DE0-A9E5E72A204F}"/>
-              </a:ext>
-            </a:extLst>
-          </p:cNvPr>
-          <p:cNvPicPr>
-            <a:picLocks noChangeAspect="1" noChangeArrowheads="1"/>
-          </p:cNvPicPr>
-          <p:nvPr/>
-        </p:nvPicPr>
-        <p:blipFill>
-          <a:blip r:embed="rId2">
-            <a:extLst>
-              <a:ext uri="{28A0092B-C50C-407E-A947-70E740481C1C}">
-                <a14:useLocalDpi xmlns:a14="http://schemas.microsoft.com/office/drawing/2010/main" val="0"/>
-              </a:ext>
-            </a:extLst>
-          </a:blip>
-          <a:srcRect/>
-          <a:stretch>
-            <a:fillRect/>
-          </a:stretch>
-        </p:blipFill>
-        <p:spPr bwMode="auto">
-          <a:xfrm>
-            <a:off x="1981200" y="1417640"/>
-            <a:ext cx="8001000" cy="4413324"/>
-          </a:xfrm>
-          <a:prstGeom prst="rect">
-            <a:avLst/>
-          </a:prstGeom>
-          <a:noFill/>
-          <a:ln>
-            <a:noFill/>
-          </a:ln>
-          <a:effectLst>
-            <a:outerShdw blurRad="50800" dist="50800" dir="5400000" sx="102000" sy="102000" algn="ctr" rotWithShape="0">
-              <a:srgbClr val="000000">
-                <a:alpha val="43137"/>
-              </a:srgbClr>
-            </a:outerShdw>
-          </a:effectLst>
-          <a:extLst>
-            <a:ext uri="{909E8E84-426E-40DD-AFC4-6F175D3DCCD1}">
-              <a14:hiddenFill xmlns:a14="http://schemas.microsoft.com/office/drawing/2010/main">
-                <a:solidFill>
-                  <a:srgbClr val="FFFFFF"/>
-                </a:solidFill>
-              </a14:hiddenFill>
-            </a:ext>
-            <a:ext uri="{91240B29-F687-4F45-9708-019B960494DF}">
-              <a14:hiddenLine xmlns:a14="http://schemas.microsoft.com/office/drawing/2010/main" w="9525">
-                <a:solidFill>
-                  <a:srgbClr val="000000"/>
-                </a:solidFill>
-                <a:miter lim="800000"/>
-                <a:headEnd/>
-                <a:tailEnd/>
-              </a14:hiddenLine>
-            </a:ext>
-          </a:extLst>
-        </p:spPr>
-      </p:pic>
-      <p:sp>
-        <p:nvSpPr>
-          <p:cNvPr id="7" name="Rectangle 6">
-            <a:extLst>
-              <a:ext uri="{FF2B5EF4-FFF2-40B4-BE49-F238E27FC236}">
-                <a16:creationId xmlns:a16="http://schemas.microsoft.com/office/drawing/2014/main" id="{7973ACA3-F0FD-0A7C-E890-8D2DB0C5857A}"/>
-              </a:ext>
-            </a:extLst>
-          </p:cNvPr>
-          <p:cNvSpPr/>
-          <p:nvPr/>
-        </p:nvSpPr>
-        <p:spPr>
-          <a:xfrm>
-            <a:off x="3822700" y="4648200"/>
-            <a:ext cx="4559300" cy="914400"/>
-          </a:xfrm>
-          <a:prstGeom prst="rect">
-            <a:avLst/>
-          </a:prstGeom>
-        </p:spPr>
-        <p:style>
-          <a:lnRef idx="3">
-            <a:schemeClr val="lt1"/>
-          </a:lnRef>
-          <a:fillRef idx="1">
-            <a:schemeClr val="accent6"/>
-          </a:fillRef>
-          <a:effectRef idx="1">
-            <a:schemeClr val="accent6"/>
-          </a:effectRef>
-          <a:fontRef idx="minor">
-            <a:schemeClr val="lt1"/>
-          </a:fontRef>
-        </p:style>
-        <p:txBody>
-          <a:bodyPr anchor="ctr"/>
-          <a:lstStyle/>
-          <a:p>
-            <a:pPr algn="ctr">
-              <a:defRPr/>
-            </a:pPr>
-            <a:r>
-              <a:rPr lang="en-US" dirty="0"/>
-              <a:t>See Archive  accompanying these slides.</a:t>
-            </a:r>
-          </a:p>
-          <a:p>
-            <a:pPr algn="ctr">
-              <a:defRPr/>
-            </a:pPr>
-            <a:r>
-              <a:rPr lang="en-US" dirty="0"/>
-              <a:t>Run code using VS Code Live Server extension.</a:t>
-            </a:r>
-          </a:p>
-        </p:txBody>
-      </p:sp>
-    </p:spTree>
-  </p:cSld>
-  <p:clrMapOvr>
-    <a:masterClrMapping/>
-  </p:clrMapOvr>
-</p:sld>
-</file>
-
-<file path=ppt/slides/slide9.xml><?xml version="1.0" encoding="utf-8"?>
-<p:sld xmlns:a="http://schemas.openxmlformats.org/drawingml/2006/main" xmlns:r="http://schemas.openxmlformats.org/officeDocument/2006/relationships" xmlns:p="http://schemas.openxmlformats.org/presentationml/2006/main">
-  <p:cSld>
-    <p:spTree>
-      <p:nvGrpSpPr>
-        <p:cNvPr id="1" name=""/>
-        <p:cNvGrpSpPr/>
-        <p:nvPr/>
-      </p:nvGrpSpPr>
-      <p:grpSpPr>
-        <a:xfrm>
-          <a:off x="0" y="0"/>
-          <a:ext cx="0" cy="0"/>
-          <a:chOff x="0" y="0"/>
-          <a:chExt cx="0" cy="0"/>
-        </a:xfrm>
-      </p:grpSpPr>
-      <p:sp>
-        <p:nvSpPr>
-          <p:cNvPr id="20481" name="Title 1">
-            <a:extLst>
-              <a:ext uri="{FF2B5EF4-FFF2-40B4-BE49-F238E27FC236}">
-                <a16:creationId xmlns:a16="http://schemas.microsoft.com/office/drawing/2014/main" id="{0CAA7637-C6F8-9B80-2A93-0A207F49DD20}"/>
-              </a:ext>
-            </a:extLst>
-          </p:cNvPr>
-          <p:cNvSpPr>
-            <a:spLocks noGrp="1" noChangeArrowheads="1"/>
-          </p:cNvSpPr>
-          <p:nvPr>
-            <p:ph type="title"/>
-          </p:nvPr>
-        </p:nvSpPr>
-        <p:spPr/>
-        <p:txBody>
-          <a:bodyPr/>
-          <a:lstStyle/>
-          <a:p>
-            <a:r>
-              <a:rPr lang="en-US" altLang="en-US" dirty="0">
-                <a:ea typeface="ＭＳ Ｐゴシック" panose="020B0600070205080204" pitchFamily="34" charset="-128"/>
-              </a:rPr>
-              <a:t>Creating the </a:t>
-            </a:r>
-            <a:r>
-              <a:rPr lang="en-US" altLang="en-US" u="sng" dirty="0">
-                <a:ea typeface="ＭＳ Ｐゴシック" panose="020B0600070205080204" pitchFamily="34" charset="-128"/>
-              </a:rPr>
-              <a:t>UI Description.</a:t>
-            </a:r>
-            <a:br>
-              <a:rPr lang="en-US" altLang="en-US" u="sng" dirty="0">
-                <a:ea typeface="ＭＳ Ｐゴシック" panose="020B0600070205080204" pitchFamily="34" charset="-128"/>
-              </a:rPr>
-            </a:br>
-            <a:r>
-              <a:rPr lang="en-US" altLang="en-US" sz="2000" dirty="0">
-                <a:ea typeface="ＭＳ Ｐゴシック" panose="020B0600070205080204" pitchFamily="34" charset="-128"/>
-              </a:rPr>
-              <a:t>(Vanilla React)</a:t>
-            </a:r>
-          </a:p>
-        </p:txBody>
-      </p:sp>
-      <p:sp>
-        <p:nvSpPr>
-          <p:cNvPr id="20482" name="Content Placeholder 2">
-            <a:extLst>
-              <a:ext uri="{FF2B5EF4-FFF2-40B4-BE49-F238E27FC236}">
-                <a16:creationId xmlns:a16="http://schemas.microsoft.com/office/drawing/2014/main" id="{7F23EA52-ACFF-3685-55E9-F291679C5A7B}"/>
-              </a:ext>
-            </a:extLst>
-          </p:cNvPr>
-          <p:cNvSpPr>
-            <a:spLocks noGrp="1" noChangeArrowheads="1"/>
-          </p:cNvSpPr>
-          <p:nvPr>
-            <p:ph idx="1"/>
-          </p:nvPr>
-        </p:nvSpPr>
-        <p:spPr>
-          <a:xfrm>
-            <a:off x="457200" y="1527175"/>
-            <a:ext cx="11430000" cy="4718050"/>
-          </a:xfrm>
-        </p:spPr>
-        <p:txBody>
-          <a:bodyPr/>
-          <a:lstStyle/>
-          <a:p>
-            <a:r>
-              <a:rPr lang="en-US" altLang="en-US" sz="2000" b="0" dirty="0" err="1">
-                <a:ea typeface="ＭＳ Ｐゴシック" panose="020B0600070205080204" pitchFamily="34" charset="-128"/>
-              </a:rPr>
-              <a:t>React.createElement</a:t>
-            </a:r>
-            <a:r>
-              <a:rPr lang="en-US" altLang="en-US" sz="2000" b="0" dirty="0">
-                <a:ea typeface="ＭＳ Ｐゴシック" panose="020B0600070205080204" pitchFamily="34" charset="-128"/>
-              </a:rPr>
-              <a:t>() </a:t>
-            </a:r>
-            <a:r>
-              <a:rPr lang="en-US" altLang="en-US" sz="2000" dirty="0">
-                <a:ea typeface="ＭＳ Ｐゴシック" panose="020B0600070205080204" pitchFamily="34" charset="-128"/>
-              </a:rPr>
-              <a:t>– creates a HTML element.</a:t>
-            </a:r>
-          </a:p>
-          <a:p>
-            <a:r>
-              <a:rPr lang="en-US" altLang="en-US" sz="2000" b="0" dirty="0" err="1">
-                <a:ea typeface="ＭＳ Ｐゴシック" panose="020B0600070205080204" pitchFamily="34" charset="-128"/>
-              </a:rPr>
-              <a:t>ReactDOM.createRoot</a:t>
-            </a:r>
-            <a:r>
-              <a:rPr lang="en-US" altLang="en-US" sz="2000" b="0" dirty="0">
-                <a:ea typeface="ＭＳ Ｐゴシック" panose="020B0600070205080204" pitchFamily="34" charset="-128"/>
-              </a:rPr>
-              <a:t>() – </a:t>
-            </a:r>
-            <a:r>
-              <a:rPr lang="en-US" altLang="en-US" sz="2000" dirty="0">
-                <a:ea typeface="ＭＳ Ｐゴシック" panose="020B0600070205080204" pitchFamily="34" charset="-128"/>
-              </a:rPr>
-              <a:t>used to attach the created element to existing DOM node. </a:t>
-            </a:r>
-            <a:endParaRPr lang="en-US" altLang="en-US" sz="2000" b="0" dirty="0">
-              <a:ea typeface="ＭＳ Ｐゴシック" panose="020B0600070205080204" pitchFamily="34" charset="-128"/>
-            </a:endParaRPr>
-          </a:p>
-          <a:p>
-            <a:r>
-              <a:rPr lang="en-US" altLang="en-US" sz="2000" b="0" dirty="0" err="1">
-                <a:ea typeface="ＭＳ Ｐゴシック" panose="020B0600070205080204" pitchFamily="34" charset="-128"/>
-              </a:rPr>
-              <a:t>React.createElement</a:t>
-            </a:r>
-            <a:r>
-              <a:rPr lang="en-US" altLang="en-US" sz="2000" b="0" dirty="0">
-                <a:ea typeface="ＭＳ Ｐゴシック" panose="020B0600070205080204" pitchFamily="34" charset="-128"/>
-              </a:rPr>
-              <a:t>() takes three or more </a:t>
-            </a:r>
-            <a:r>
-              <a:rPr lang="en-US" altLang="en-US" sz="2000" dirty="0">
-                <a:ea typeface="ＭＳ Ｐゴシック" panose="020B0600070205080204" pitchFamily="34" charset="-128"/>
-              </a:rPr>
-              <a:t>arguments</a:t>
-            </a:r>
-            <a:r>
-              <a:rPr lang="en-US" altLang="en-US" sz="2000" b="0" dirty="0">
-                <a:ea typeface="ＭＳ Ｐゴシック" panose="020B0600070205080204" pitchFamily="34" charset="-128"/>
-              </a:rPr>
-              <a:t>:</a:t>
-            </a:r>
-            <a:endParaRPr lang="en-US" altLang="en-US" sz="2000" dirty="0">
-              <a:ea typeface="ＭＳ Ｐゴシック" panose="020B0600070205080204" pitchFamily="34" charset="-128"/>
-            </a:endParaRPr>
-          </a:p>
-          <a:p>
-            <a:pPr marL="914400" lvl="1" indent="-457200"/>
-            <a:endParaRPr lang="en-US" altLang="en-US" sz="2400" dirty="0">
-              <a:ea typeface="ＭＳ Ｐゴシック" panose="020B0600070205080204" pitchFamily="34" charset="-128"/>
-            </a:endParaRPr>
-          </a:p>
-          <a:p>
-            <a:pPr marL="914400" lvl="1" indent="-457200"/>
-            <a:endParaRPr lang="en-US" altLang="en-US" sz="2400" dirty="0">
-              <a:ea typeface="ＭＳ Ｐゴシック" panose="020B0600070205080204" pitchFamily="34" charset="-128"/>
-            </a:endParaRPr>
-          </a:p>
-          <a:p>
-            <a:pPr marL="914400" lvl="1" indent="-457200"/>
-            <a:endParaRPr lang="en-US" altLang="en-US" sz="2400" dirty="0">
-              <a:ea typeface="ＭＳ Ｐゴシック" panose="020B0600070205080204" pitchFamily="34" charset="-128"/>
-            </a:endParaRPr>
-          </a:p>
-          <a:p>
-            <a:pPr marL="914400" lvl="1" indent="-457200"/>
-            <a:endParaRPr lang="en-US" altLang="en-US" sz="2400" dirty="0">
-              <a:ea typeface="ＭＳ Ｐゴシック" panose="020B0600070205080204" pitchFamily="34" charset="-128"/>
-            </a:endParaRPr>
-          </a:p>
-          <a:p>
-            <a:pPr marL="914400" lvl="1" indent="-457200"/>
-            <a:endParaRPr lang="en-US" altLang="en-US" sz="2400" dirty="0">
-              <a:ea typeface="ＭＳ Ｐゴシック" panose="020B0600070205080204" pitchFamily="34" charset="-128"/>
-            </a:endParaRPr>
-          </a:p>
-          <a:p>
-            <a:pPr marL="914400" lvl="1" indent="-457200"/>
-            <a:r>
-              <a:rPr lang="en-US" altLang="en-US" sz="2400" dirty="0">
-                <a:ea typeface="ＭＳ Ｐゴシック" panose="020B0600070205080204" pitchFamily="34" charset="-128"/>
-              </a:rPr>
-              <a:t>We don’t use </a:t>
-            </a:r>
-            <a:r>
-              <a:rPr lang="en-US" altLang="en-US" sz="2400" dirty="0" err="1">
-                <a:ea typeface="ＭＳ Ｐゴシック" panose="020B0600070205080204" pitchFamily="34" charset="-128"/>
-              </a:rPr>
-              <a:t>createElement</a:t>
-            </a:r>
-            <a:r>
-              <a:rPr lang="en-US" altLang="en-US" sz="2400" dirty="0">
-                <a:ea typeface="ＭＳ Ｐゴシック" panose="020B0600070205080204" pitchFamily="34" charset="-128"/>
-              </a:rPr>
-              <a:t>() directly - too cumbersome. More later…</a:t>
-            </a:r>
-            <a:endParaRPr lang="en-US" altLang="en-US" sz="2000" b="0" dirty="0">
-              <a:ea typeface="ＭＳ Ｐゴシック" panose="020B0600070205080204" pitchFamily="34" charset="-128"/>
-            </a:endParaRPr>
-          </a:p>
-          <a:p>
-            <a:r>
-              <a:rPr lang="en-US" altLang="en-US" sz="2000" b="0" dirty="0" err="1">
-                <a:ea typeface="ＭＳ Ｐゴシック" panose="020B0600070205080204" pitchFamily="34" charset="-128"/>
-              </a:rPr>
-              <a:t>ReactDOM.createRoot</a:t>
-            </a:r>
-            <a:r>
-              <a:rPr lang="en-US" altLang="en-US" sz="2000" b="0" dirty="0">
-                <a:ea typeface="ＭＳ Ｐゴシック" panose="020B0600070205080204" pitchFamily="34" charset="-128"/>
-              </a:rPr>
-              <a:t> () has 1 </a:t>
-            </a:r>
-            <a:r>
-              <a:rPr lang="en-US" altLang="en-US" sz="2000" dirty="0">
-                <a:ea typeface="ＭＳ Ｐゴシック" panose="020B0600070205080204" pitchFamily="34" charset="-128"/>
-              </a:rPr>
-              <a:t>argument:</a:t>
-            </a:r>
-          </a:p>
-        </p:txBody>
-      </p:sp>
-      <p:sp>
-        <p:nvSpPr>
-          <p:cNvPr id="20483" name="Slide Number Placeholder 3">
-            <a:extLst>
-              <a:ext uri="{FF2B5EF4-FFF2-40B4-BE49-F238E27FC236}">
-                <a16:creationId xmlns:a16="http://schemas.microsoft.com/office/drawing/2014/main" id="{4353AC8F-4284-9A65-C178-213CF254B6EB}"/>
-              </a:ext>
-            </a:extLst>
-          </p:cNvPr>
-          <p:cNvSpPr>
-            <a:spLocks noGrp="1"/>
-          </p:cNvSpPr>
-          <p:nvPr>
-            <p:ph type="sldNum" sz="quarter" idx="12"/>
-          </p:nvPr>
-        </p:nvSpPr>
-        <p:spPr>
-          <a:noFill/>
-          <a:ln/>
-          <a:extLst>
-            <a:ext uri="{909E8E84-426E-40DD-AFC4-6F175D3DCCD1}">
-              <a14:hiddenFill xmlns:a14="http://schemas.microsoft.com/office/drawing/2010/main">
-                <a:solidFill>
-                  <a:srgbClr val="FFFFFF"/>
-                </a:solidFill>
-              </a14:hiddenFill>
-            </a:ext>
-            <a:ext uri="{91240B29-F687-4F45-9708-019B960494DF}">
-              <a14:hiddenLine xmlns:a14="http://schemas.microsoft.com/office/drawing/2010/main" w="9525">
-                <a:solidFill>
-                  <a:srgbClr val="000000"/>
-                </a:solidFill>
-                <a:miter lim="800000"/>
-                <a:headEnd/>
-                <a:tailEnd/>
-              </a14:hiddenLine>
-            </a:ext>
-          </a:extLst>
-        </p:spPr>
-        <p:txBody>
-          <a:bodyPr/>
-          <a:lstStyle>
-            <a:lvl1pPr>
-              <a:spcBef>
-                <a:spcPct val="20000"/>
-              </a:spcBef>
-              <a:buChar char="•"/>
-              <a:defRPr b="1">
-                <a:solidFill>
-                  <a:schemeClr val="tx1"/>
-                </a:solidFill>
-                <a:latin typeface="Arial" panose="020B0604020202020204" pitchFamily="34" charset="0"/>
-                <a:ea typeface="ＭＳ Ｐゴシック" panose="020B0600070205080204" pitchFamily="34" charset="-128"/>
-              </a:defRPr>
-            </a:lvl1pPr>
-            <a:lvl2pPr marL="742950" indent="-285750">
-              <a:spcBef>
-                <a:spcPct val="20000"/>
-              </a:spcBef>
-              <a:buChar char="–"/>
-              <a:defRPr b="1">
-                <a:solidFill>
-                  <a:schemeClr val="tx1"/>
-                </a:solidFill>
-                <a:latin typeface="Arial" panose="020B0604020202020204" pitchFamily="34" charset="0"/>
-                <a:ea typeface="ＭＳ Ｐゴシック" panose="020B0600070205080204" pitchFamily="34" charset="-128"/>
-              </a:defRPr>
-            </a:lvl2pPr>
-            <a:lvl3pPr marL="1143000" indent="-228600">
-              <a:spcBef>
-                <a:spcPct val="20000"/>
-              </a:spcBef>
-              <a:buChar char="•"/>
-              <a:defRPr b="1">
-                <a:solidFill>
-                  <a:schemeClr val="tx1"/>
-                </a:solidFill>
-                <a:latin typeface="Arial" panose="020B0604020202020204" pitchFamily="34" charset="0"/>
-                <a:ea typeface="ＭＳ Ｐゴシック" panose="020B0600070205080204" pitchFamily="34" charset="-128"/>
-              </a:defRPr>
-            </a:lvl3pPr>
-            <a:lvl4pPr marL="1600200" indent="-228600">
-              <a:spcBef>
-                <a:spcPct val="20000"/>
-              </a:spcBef>
-              <a:buChar char="–"/>
-              <a:defRPr b="1">
-                <a:solidFill>
-                  <a:schemeClr val="tx1"/>
-                </a:solidFill>
-                <a:latin typeface="Arial" panose="020B0604020202020204" pitchFamily="34" charset="0"/>
-                <a:ea typeface="ＭＳ Ｐゴシック" panose="020B0600070205080204" pitchFamily="34" charset="-128"/>
-              </a:defRPr>
-            </a:lvl4pPr>
-            <a:lvl5pPr marL="2057400" indent="-228600">
-              <a:spcBef>
-                <a:spcPct val="20000"/>
-              </a:spcBef>
-              <a:buChar char="»"/>
-              <a:defRPr b="1">
-                <a:solidFill>
-                  <a:schemeClr val="tx1"/>
-                </a:solidFill>
-                <a:latin typeface="Arial" panose="020B0604020202020204" pitchFamily="34" charset="0"/>
-                <a:ea typeface="ＭＳ Ｐゴシック" panose="020B0600070205080204" pitchFamily="34" charset="-128"/>
-              </a:defRPr>
-            </a:lvl5pPr>
-            <a:lvl6pPr marL="2514600" indent="-228600" eaLnBrk="0" fontAlgn="base" hangingPunct="0">
-              <a:spcBef>
-                <a:spcPct val="20000"/>
-              </a:spcBef>
-              <a:spcAft>
-                <a:spcPct val="0"/>
-              </a:spcAft>
-              <a:buChar char="»"/>
-              <a:defRPr b="1">
-                <a:solidFill>
-                  <a:schemeClr val="tx1"/>
-                </a:solidFill>
-                <a:latin typeface="Arial" panose="020B0604020202020204" pitchFamily="34" charset="0"/>
-                <a:ea typeface="ＭＳ Ｐゴシック" panose="020B0600070205080204" pitchFamily="34" charset="-128"/>
-              </a:defRPr>
-            </a:lvl6pPr>
-            <a:lvl7pPr marL="2971800" indent="-228600" eaLnBrk="0" fontAlgn="base" hangingPunct="0">
-              <a:spcBef>
-                <a:spcPct val="20000"/>
-              </a:spcBef>
-              <a:spcAft>
-                <a:spcPct val="0"/>
-              </a:spcAft>
-              <a:buChar char="»"/>
-              <a:defRPr b="1">
-                <a:solidFill>
-                  <a:schemeClr val="tx1"/>
-                </a:solidFill>
-                <a:latin typeface="Arial" panose="020B0604020202020204" pitchFamily="34" charset="0"/>
-                <a:ea typeface="ＭＳ Ｐゴシック" panose="020B0600070205080204" pitchFamily="34" charset="-128"/>
-              </a:defRPr>
-            </a:lvl7pPr>
-            <a:lvl8pPr marL="3429000" indent="-228600" eaLnBrk="0" fontAlgn="base" hangingPunct="0">
-              <a:spcBef>
-                <a:spcPct val="20000"/>
-              </a:spcBef>
-              <a:spcAft>
-                <a:spcPct val="0"/>
-              </a:spcAft>
-              <a:buChar char="»"/>
-              <a:defRPr b="1">
-                <a:solidFill>
-                  <a:schemeClr val="tx1"/>
-                </a:solidFill>
-                <a:latin typeface="Arial" panose="020B0604020202020204" pitchFamily="34" charset="0"/>
-                <a:ea typeface="ＭＳ Ｐゴシック" panose="020B0600070205080204" pitchFamily="34" charset="-128"/>
-              </a:defRPr>
-            </a:lvl8pPr>
-            <a:lvl9pPr marL="3886200" indent="-228600" eaLnBrk="0" fontAlgn="base" hangingPunct="0">
-              <a:spcBef>
-                <a:spcPct val="20000"/>
-              </a:spcBef>
-              <a:spcAft>
-                <a:spcPct val="0"/>
-              </a:spcAft>
-              <a:buChar char="»"/>
-              <a:defRPr b="1">
-                <a:solidFill>
-                  <a:schemeClr val="tx1"/>
-                </a:solidFill>
-                <a:latin typeface="Arial" panose="020B0604020202020204" pitchFamily="34" charset="0"/>
-                <a:ea typeface="ＭＳ Ｐゴシック" panose="020B0600070205080204" pitchFamily="34" charset="-128"/>
-              </a:defRPr>
-            </a:lvl9pPr>
-          </a:lstStyle>
-          <a:p>
-            <a:pPr>
-              <a:spcBef>
-                <a:spcPct val="0"/>
-              </a:spcBef>
-              <a:buFontTx/>
-              <a:buNone/>
-            </a:pPr>
-            <a:fld id="{3DD7C3FE-7D52-4A36-BD7A-9D4C77E680D3}" type="slidenum">
-              <a:rPr lang="en-US" altLang="en-US" b="0" smtClean="0"/>
-              <a:pPr>
-                <a:spcBef>
-                  <a:spcPct val="0"/>
-                </a:spcBef>
-                <a:buFontTx/>
-                <a:buNone/>
-              </a:pPr>
-              <a:t>9</a:t>
-            </a:fld>
-            <a:endParaRPr lang="en-US" altLang="en-US" b="0"/>
-          </a:p>
-        </p:txBody>
-      </p:sp>
-      <p:pic>
-        <p:nvPicPr>
-          <p:cNvPr id="3" name="Picture 2">
-            <a:extLst>
-              <a:ext uri="{FF2B5EF4-FFF2-40B4-BE49-F238E27FC236}">
-                <a16:creationId xmlns:a16="http://schemas.microsoft.com/office/drawing/2014/main" id="{C473DACA-71B9-2A21-701A-2A8310A533E7}"/>
-              </a:ext>
-            </a:extLst>
-          </p:cNvPr>
-          <p:cNvPicPr>
-            <a:picLocks noChangeAspect="1"/>
-          </p:cNvPicPr>
-          <p:nvPr/>
-        </p:nvPicPr>
-        <p:blipFill rotWithShape="1">
-          <a:blip r:embed="rId3"/>
-          <a:srcRect b="12836"/>
-          <a:stretch/>
-        </p:blipFill>
-        <p:spPr>
-          <a:xfrm>
-            <a:off x="761527" y="3312799"/>
-            <a:ext cx="9134345" cy="1591648"/>
-          </a:xfrm>
-          <a:prstGeom prst="rect">
-            <a:avLst/>
-          </a:prstGeom>
-        </p:spPr>
-      </p:pic>
-      <p:sp>
-        <p:nvSpPr>
-          <p:cNvPr id="4" name="Callout: Line 3">
-            <a:extLst>
-              <a:ext uri="{FF2B5EF4-FFF2-40B4-BE49-F238E27FC236}">
-                <a16:creationId xmlns:a16="http://schemas.microsoft.com/office/drawing/2014/main" id="{67394963-C090-4C1E-D11D-F53DE8695A92}"/>
-              </a:ext>
-            </a:extLst>
-          </p:cNvPr>
-          <p:cNvSpPr/>
-          <p:nvPr/>
-        </p:nvSpPr>
-        <p:spPr>
-          <a:xfrm>
-            <a:off x="1218727" y="2639686"/>
-            <a:ext cx="2895600" cy="451683"/>
-          </a:xfrm>
-          <a:prstGeom prst="borderCallout1">
-            <a:avLst>
-              <a:gd name="adj1" fmla="val 123815"/>
-              <a:gd name="adj2" fmla="val 46431"/>
-              <a:gd name="adj3" fmla="val 417446"/>
-              <a:gd name="adj4" fmla="val 122760"/>
-            </a:avLst>
-          </a:prstGeom>
-        </p:spPr>
-        <p:style>
-          <a:lnRef idx="1">
-            <a:schemeClr val="accent1"/>
-          </a:lnRef>
-          <a:fillRef idx="3">
-            <a:schemeClr val="accent1"/>
-          </a:fillRef>
-          <a:effectRef idx="2">
-            <a:schemeClr val="accent1"/>
-          </a:effectRef>
-          <a:fontRef idx="minor">
-            <a:schemeClr val="lt1"/>
-          </a:fontRef>
-        </p:style>
-        <p:txBody>
-          <a:bodyPr rtlCol="0" anchor="ctr"/>
-          <a:lstStyle/>
-          <a:p>
-            <a:pPr lvl="1"/>
-            <a:r>
-              <a:rPr lang="en-US" altLang="en-US" sz="1800" dirty="0">
-                <a:solidFill>
-                  <a:schemeClr val="tx1"/>
-                </a:solidFill>
-                <a:ea typeface="ＭＳ Ｐゴシック" panose="020B0600070205080204" pitchFamily="34" charset="-128"/>
-              </a:rPr>
-              <a:t>Type (e.g. h1, div, …)</a:t>
-            </a:r>
-          </a:p>
-        </p:txBody>
-      </p:sp>
-      <p:sp>
-        <p:nvSpPr>
-          <p:cNvPr id="6" name="Callout: Line 5">
-            <a:extLst>
-              <a:ext uri="{FF2B5EF4-FFF2-40B4-BE49-F238E27FC236}">
-                <a16:creationId xmlns:a16="http://schemas.microsoft.com/office/drawing/2014/main" id="{932076F7-9D5F-2CDA-42D4-DAAA8B96B1F2}"/>
-              </a:ext>
-            </a:extLst>
-          </p:cNvPr>
-          <p:cNvSpPr/>
-          <p:nvPr/>
-        </p:nvSpPr>
-        <p:spPr>
-          <a:xfrm>
-            <a:off x="4847390" y="2612715"/>
-            <a:ext cx="2895600" cy="590547"/>
-          </a:xfrm>
-          <a:prstGeom prst="borderCallout1">
-            <a:avLst>
-              <a:gd name="adj1" fmla="val 104990"/>
-              <a:gd name="adj2" fmla="val 45231"/>
-              <a:gd name="adj3" fmla="val 339859"/>
-              <a:gd name="adj4" fmla="val 42413"/>
-            </a:avLst>
-          </a:prstGeom>
-        </p:spPr>
-        <p:style>
-          <a:lnRef idx="1">
-            <a:schemeClr val="accent1"/>
-          </a:lnRef>
-          <a:fillRef idx="3">
-            <a:schemeClr val="accent1"/>
-          </a:fillRef>
-          <a:effectRef idx="2">
-            <a:schemeClr val="accent1"/>
-          </a:effectRef>
-          <a:fontRef idx="minor">
-            <a:schemeClr val="lt1"/>
-          </a:fontRef>
-        </p:style>
-        <p:txBody>
-          <a:bodyPr rtlCol="0" anchor="ctr"/>
-          <a:lstStyle/>
-          <a:p>
-            <a:pPr lvl="1"/>
-            <a:r>
-              <a:rPr lang="en-US" altLang="en-US" sz="1800" dirty="0">
-                <a:solidFill>
-                  <a:schemeClr val="tx1"/>
-                </a:solidFill>
-                <a:ea typeface="ＭＳ Ｐゴシック" panose="020B0600070205080204" pitchFamily="34" charset="-128"/>
-              </a:rPr>
-              <a:t>Properties (style, event handler…)</a:t>
-            </a:r>
-          </a:p>
-        </p:txBody>
-      </p:sp>
-      <p:sp>
-        <p:nvSpPr>
-          <p:cNvPr id="7" name="Callout: Line 6">
-            <a:extLst>
-              <a:ext uri="{FF2B5EF4-FFF2-40B4-BE49-F238E27FC236}">
-                <a16:creationId xmlns:a16="http://schemas.microsoft.com/office/drawing/2014/main" id="{7C726BD1-9D5A-381D-1950-58D59FD94C52}"/>
-              </a:ext>
-            </a:extLst>
-          </p:cNvPr>
-          <p:cNvSpPr/>
-          <p:nvPr/>
-        </p:nvSpPr>
-        <p:spPr>
-          <a:xfrm>
-            <a:off x="8608671" y="2585744"/>
-            <a:ext cx="3124200" cy="673113"/>
-          </a:xfrm>
-          <a:prstGeom prst="borderCallout1">
-            <a:avLst>
-              <a:gd name="adj1" fmla="val 108168"/>
-              <a:gd name="adj2" fmla="val 49833"/>
-              <a:gd name="adj3" fmla="val 296494"/>
-              <a:gd name="adj4" fmla="val -8694"/>
-            </a:avLst>
-          </a:prstGeom>
-        </p:spPr>
-        <p:style>
-          <a:lnRef idx="1">
-            <a:schemeClr val="accent1"/>
-          </a:lnRef>
-          <a:fillRef idx="3">
-            <a:schemeClr val="accent1"/>
-          </a:fillRef>
-          <a:effectRef idx="2">
-            <a:schemeClr val="accent1"/>
-          </a:effectRef>
-          <a:fontRef idx="minor">
-            <a:schemeClr val="lt1"/>
-          </a:fontRef>
-        </p:style>
-        <p:txBody>
-          <a:bodyPr rtlCol="0" anchor="ctr"/>
-          <a:lstStyle/>
-          <a:p>
-            <a:pPr lvl="1"/>
-            <a:r>
-              <a:rPr lang="en-US" altLang="en-US" sz="1800" dirty="0">
-                <a:solidFill>
-                  <a:schemeClr val="tx1"/>
-                </a:solidFill>
-                <a:ea typeface="ＭＳ Ｐゴシック" panose="020B0600070205080204" pitchFamily="34" charset="-128"/>
-              </a:rPr>
-              <a:t>Children(0 to many child elements)</a:t>
-            </a:r>
-          </a:p>
-        </p:txBody>
-      </p:sp>
-      <p:pic>
-        <p:nvPicPr>
-          <p:cNvPr id="9" name="Picture 8">
-            <a:extLst>
-              <a:ext uri="{FF2B5EF4-FFF2-40B4-BE49-F238E27FC236}">
-                <a16:creationId xmlns:a16="http://schemas.microsoft.com/office/drawing/2014/main" id="{9EBDC0DF-ABA8-4953-FFF4-D38F89E6ADB2}"/>
-              </a:ext>
-            </a:extLst>
-          </p:cNvPr>
-          <p:cNvPicPr>
-            <a:picLocks noChangeAspect="1"/>
-          </p:cNvPicPr>
-          <p:nvPr/>
-        </p:nvPicPr>
-        <p:blipFill>
-          <a:blip r:embed="rId4"/>
-          <a:stretch>
-            <a:fillRect/>
-          </a:stretch>
-        </p:blipFill>
-        <p:spPr>
-          <a:xfrm>
-            <a:off x="640466" y="6016958"/>
-            <a:ext cx="9027811" cy="783502"/>
-          </a:xfrm>
-          <a:prstGeom prst="rect">
-            <a:avLst/>
-          </a:prstGeom>
-        </p:spPr>
-      </p:pic>
-      <p:sp>
-        <p:nvSpPr>
-          <p:cNvPr id="10" name="Callout: Line 9">
-            <a:extLst>
-              <a:ext uri="{FF2B5EF4-FFF2-40B4-BE49-F238E27FC236}">
-                <a16:creationId xmlns:a16="http://schemas.microsoft.com/office/drawing/2014/main" id="{B1FB3F51-14C0-2C76-7D76-624E5CDE394F}"/>
-              </a:ext>
-            </a:extLst>
-          </p:cNvPr>
-          <p:cNvSpPr/>
-          <p:nvPr/>
-        </p:nvSpPr>
-        <p:spPr>
-          <a:xfrm>
-            <a:off x="6508516" y="5275048"/>
-            <a:ext cx="4235684" cy="673113"/>
-          </a:xfrm>
-          <a:prstGeom prst="borderCallout1">
-            <a:avLst>
-              <a:gd name="adj1" fmla="val 108168"/>
-              <a:gd name="adj2" fmla="val 49833"/>
-              <a:gd name="adj3" fmla="val 150082"/>
-              <a:gd name="adj4" fmla="val 22851"/>
-            </a:avLst>
-          </a:prstGeom>
-        </p:spPr>
-        <p:style>
-          <a:lnRef idx="1">
-            <a:schemeClr val="accent1"/>
-          </a:lnRef>
-          <a:fillRef idx="3">
-            <a:schemeClr val="accent1"/>
-          </a:fillRef>
-          <a:effectRef idx="2">
-            <a:schemeClr val="accent1"/>
-          </a:effectRef>
-          <a:fontRef idx="minor">
-            <a:schemeClr val="lt1"/>
-          </a:fontRef>
-        </p:style>
-        <p:txBody>
-          <a:bodyPr rtlCol="0" anchor="ctr"/>
-          <a:lstStyle/>
-          <a:p>
-            <a:pPr lvl="1"/>
-            <a:r>
-              <a:rPr lang="en-US" altLang="en-US" sz="1800" dirty="0">
-                <a:solidFill>
-                  <a:schemeClr val="tx1"/>
-                </a:solidFill>
-                <a:ea typeface="ＭＳ Ｐゴシック" panose="020B0600070205080204" pitchFamily="34" charset="-128"/>
-              </a:rPr>
-              <a:t>DOM element on which to render your React Root Element</a:t>
-            </a:r>
-          </a:p>
-        </p:txBody>
-      </p:sp>
-    </p:spTree>
-  </p:cSld>
-  <p:clrMapOvr>
-    <a:masterClrMapping/>
-  </p:clrMapOvr>
-  <p:timing>
-    <p:tnLst>
-      <p:par>
-        <p:cTn id="1" dur="indefinite" restart="never" nodeType="tmRoot">
-          <p:childTnLst>
-            <p:seq concurrent="1" nextAc="seek">
-              <p:cTn id="2" dur="indefinite" nodeType="mainSeq">
-                <p:childTnLst>
-                  <p:par>
-                    <p:cTn id="3" fill="hold" nodeType="clickPar">
-                      <p:stCondLst>
-                        <p:cond delay="indefinite"/>
-                      </p:stCondLst>
-                      <p:childTnLst>
-                        <p:par>
-                          <p:cTn id="4" fill="hold" nodeType="withGroup">
-                            <p:stCondLst>
-                              <p:cond delay="0"/>
-                            </p:stCondLst>
-                            <p:childTnLst>
-                              <p:par>
-                                <p:cTn id="5" presetID="1" presetClass="entr" presetSubtype="0" fill="hold" nodeType="clickEffect">
-                                  <p:stCondLst>
-                                    <p:cond delay="0"/>
-                                  </p:stCondLst>
-                                  <p:childTnLst>
-                                    <p:set>
-                                      <p:cBhvr>
-                                        <p:cTn id="6" dur="1" fill="hold">
-                                          <p:stCondLst>
-                                            <p:cond delay="0"/>
-                                          </p:stCondLst>
-                                        </p:cTn>
-                                        <p:tgtEl>
-                                          <p:spTgt spid="20482">
-                                            <p:txEl>
-                                              <p:pRg st="2" end="2"/>
-                                            </p:txEl>
-                                          </p:spTgt>
-                                        </p:tgtEl>
-                                        <p:attrNameLst>
-                                          <p:attrName>style.visibility</p:attrName>
-                                        </p:attrNameLst>
-                                      </p:cBhvr>
-                                      <p:to>
-                                        <p:strVal val="visible"/>
-                                      </p:to>
-                                    </p:set>
-                                  </p:childTnLst>
-                                </p:cTn>
-                              </p:par>
-                            </p:childTnLst>
-                          </p:cTn>
-                        </p:par>
-                      </p:childTnLst>
-                    </p:cTn>
-                  </p:par>
-                  <p:par>
-                    <p:cTn id="7" fill="hold" nodeType="clickPar">
-                      <p:stCondLst>
-                        <p:cond delay="indefinite"/>
-                      </p:stCondLst>
-                      <p:childTnLst>
-                        <p:par>
-                          <p:cTn id="8" fill="hold" nodeType="withGroup">
-                            <p:stCondLst>
-                              <p:cond delay="0"/>
-                            </p:stCondLst>
-                            <p:childTnLst>
-                              <p:par>
-                                <p:cTn id="9" presetID="1" presetClass="entr" presetSubtype="0" fill="hold" grpId="0" nodeType="clickEffect">
-                                  <p:stCondLst>
-                                    <p:cond delay="0"/>
-                                  </p:stCondLst>
-                                  <p:childTnLst>
-                                    <p:set>
-                                      <p:cBhvr>
-                                        <p:cTn id="10" dur="1" fill="hold">
-                                          <p:stCondLst>
-                                            <p:cond delay="0"/>
-                                          </p:stCondLst>
-                                        </p:cTn>
-                                        <p:tgtEl>
-                                          <p:spTgt spid="4"/>
-                                        </p:tgtEl>
-                                        <p:attrNameLst>
-                                          <p:attrName>style.visibility</p:attrName>
-                                        </p:attrNameLst>
-                                      </p:cBhvr>
-                                      <p:to>
-                                        <p:strVal val="visible"/>
-                                      </p:to>
-                                    </p:set>
-                                  </p:childTnLst>
-                                </p:cTn>
-                              </p:par>
-                              <p:par>
-                                <p:cTn id="11" presetID="1" presetClass="entr" presetSubtype="0" fill="hold" grpId="0" nodeType="withEffect">
-                                  <p:stCondLst>
-                                    <p:cond delay="0"/>
-                                  </p:stCondLst>
-                                  <p:childTnLst>
-                                    <p:set>
-                                      <p:cBhvr>
-                                        <p:cTn id="12" dur="1" fill="hold">
-                                          <p:stCondLst>
-                                            <p:cond delay="0"/>
-                                          </p:stCondLst>
-                                        </p:cTn>
-                                        <p:tgtEl>
-                                          <p:spTgt spid="6"/>
-                                        </p:tgtEl>
-                                        <p:attrNameLst>
-                                          <p:attrName>style.visibility</p:attrName>
-                                        </p:attrNameLst>
-                                      </p:cBhvr>
-                                      <p:to>
-                                        <p:strVal val="visible"/>
-                                      </p:to>
-                                    </p:set>
-                                  </p:childTnLst>
-                                </p:cTn>
-                              </p:par>
-                              <p:par>
-                                <p:cTn id="13" presetID="1" presetClass="entr" presetSubtype="0" fill="hold" grpId="0" nodeType="withEffect">
-                                  <p:stCondLst>
-                                    <p:cond delay="0"/>
-                                  </p:stCondLst>
-                                  <p:childTnLst>
-                                    <p:set>
-                                      <p:cBhvr>
-                                        <p:cTn id="14" dur="1" fill="hold">
-                                          <p:stCondLst>
-                                            <p:cond delay="0"/>
-                                          </p:stCondLst>
-                                        </p:cTn>
-                                        <p:tgtEl>
-                                          <p:spTgt spid="7"/>
-                                        </p:tgtEl>
-                                        <p:attrNameLst>
-                                          <p:attrName>style.visibility</p:attrName>
-                                        </p:attrNameLst>
-                                      </p:cBhvr>
-                                      <p:to>
-                                        <p:strVal val="visible"/>
-                                      </p:to>
-                                    </p:set>
-                                  </p:childTnLst>
-                                </p:cTn>
-                              </p:par>
-                              <p:par>
-                                <p:cTn id="15" presetID="1" presetClass="entr" presetSubtype="0" fill="hold" nodeType="withEffect">
-                                  <p:stCondLst>
-                                    <p:cond delay="0"/>
-                                  </p:stCondLst>
-                                  <p:childTnLst>
-                                    <p:set>
-                                      <p:cBhvr>
-                                        <p:cTn id="16" dur="1" fill="hold">
-                                          <p:stCondLst>
-                                            <p:cond delay="0"/>
-                                          </p:stCondLst>
-                                        </p:cTn>
-                                        <p:tgtEl>
-                                          <p:spTgt spid="3"/>
-                                        </p:tgtEl>
-                                        <p:attrNameLst>
-                                          <p:attrName>style.visibility</p:attrName>
-                                        </p:attrNameLst>
-                                      </p:cBhvr>
-                                      <p:to>
-                                        <p:strVal val="visible"/>
-                                      </p:to>
-                                    </p:set>
-                                  </p:childTnLst>
-                                </p:cTn>
-                              </p:par>
-                            </p:childTnLst>
-                          </p:cTn>
-                        </p:par>
-                      </p:childTnLst>
-                    </p:cTn>
-                  </p:par>
-                  <p:par>
-                    <p:cTn id="17" fill="hold">
-                      <p:stCondLst>
-                        <p:cond delay="indefinite"/>
-                      </p:stCondLst>
-                      <p:childTnLst>
-                        <p:par>
-                          <p:cTn id="18" fill="hold">
-                            <p:stCondLst>
-                              <p:cond delay="0"/>
-                            </p:stCondLst>
-                            <p:childTnLst>
-                              <p:par>
-                                <p:cTn id="19" presetID="1" presetClass="entr" presetSubtype="0" fill="hold" nodeType="clickEffect">
-                                  <p:stCondLst>
-                                    <p:cond delay="0"/>
-                                  </p:stCondLst>
-                                  <p:childTnLst>
-                                    <p:set>
-                                      <p:cBhvr>
-                                        <p:cTn id="20" dur="1" fill="hold">
-                                          <p:stCondLst>
-                                            <p:cond delay="0"/>
-                                          </p:stCondLst>
-                                        </p:cTn>
-                                        <p:tgtEl>
-                                          <p:spTgt spid="20482">
-                                            <p:txEl>
-                                              <p:pRg st="8" end="8"/>
-                                            </p:txEl>
-                                          </p:spTgt>
-                                        </p:tgtEl>
-                                        <p:attrNameLst>
-                                          <p:attrName>style.visibility</p:attrName>
-                                        </p:attrNameLst>
-                                      </p:cBhvr>
-                                      <p:to>
-                                        <p:strVal val="visible"/>
-                                      </p:to>
-                                    </p:set>
-                                  </p:childTnLst>
-                                </p:cTn>
-                              </p:par>
-                            </p:childTnLst>
-                          </p:cTn>
-                        </p:par>
-                      </p:childTnLst>
-                    </p:cTn>
-                  </p:par>
-                  <p:par>
-                    <p:cTn id="21" fill="hold" nodeType="clickPar">
-                      <p:stCondLst>
-                        <p:cond delay="indefinite"/>
-                      </p:stCondLst>
-                      <p:childTnLst>
-                        <p:par>
-                          <p:cTn id="22" fill="hold" nodeType="withGroup">
-                            <p:stCondLst>
-                              <p:cond delay="0"/>
-                            </p:stCondLst>
-                            <p:childTnLst>
-                              <p:par>
-                                <p:cTn id="23" presetID="1" presetClass="entr" presetSubtype="0" fill="hold" nodeType="clickEffect">
-                                  <p:stCondLst>
-                                    <p:cond delay="0"/>
-                                  </p:stCondLst>
-                                  <p:childTnLst>
-                                    <p:set>
-                                      <p:cBhvr>
-                                        <p:cTn id="24" dur="1" fill="hold">
-                                          <p:stCondLst>
-                                            <p:cond delay="0"/>
-                                          </p:stCondLst>
-                                        </p:cTn>
-                                        <p:tgtEl>
-                                          <p:spTgt spid="20482">
-                                            <p:txEl>
-                                              <p:pRg st="9" end="9"/>
-                                            </p:txEl>
-                                          </p:spTgt>
-                                        </p:tgtEl>
-                                        <p:attrNameLst>
-                                          <p:attrName>style.visibility</p:attrName>
-                                        </p:attrNameLst>
-                                      </p:cBhvr>
-                                      <p:to>
-                                        <p:strVal val="visible"/>
-                                      </p:to>
-                                    </p:set>
-                                  </p:childTnLst>
-                                </p:cTn>
-                              </p:par>
-                            </p:childTnLst>
-                          </p:cTn>
-                        </p:par>
-                      </p:childTnLst>
-                    </p:cTn>
-                  </p:par>
-                  <p:par>
-                    <p:cTn id="25" fill="hold">
-                      <p:stCondLst>
-                        <p:cond delay="indefinite"/>
-                      </p:stCondLst>
-                      <p:childTnLst>
-                        <p:par>
-                          <p:cTn id="26" fill="hold">
-                            <p:stCondLst>
-                              <p:cond delay="0"/>
-                            </p:stCondLst>
-                            <p:childTnLst>
-                              <p:par>
-                                <p:cTn id="27" presetID="1" presetClass="entr" presetSubtype="0" fill="hold" grpId="0" nodeType="clickEffect">
-                                  <p:stCondLst>
-                                    <p:cond delay="0"/>
-                                  </p:stCondLst>
-                                  <p:childTnLst>
-                                    <p:set>
-                                      <p:cBhvr>
-                                        <p:cTn id="28" dur="1" fill="hold">
-                                          <p:stCondLst>
-                                            <p:cond delay="0"/>
-                                          </p:stCondLst>
-                                        </p:cTn>
-                                        <p:tgtEl>
-                                          <p:spTgt spid="10"/>
-                                        </p:tgtEl>
-                                        <p:attrNameLst>
-                                          <p:attrName>style.visibility</p:attrName>
-                                        </p:attrNameLst>
-                                      </p:cBhvr>
-                                      <p:to>
-                                        <p:strVal val="visible"/>
-                                      </p:to>
-                                    </p:set>
-                                  </p:childTnLst>
-                                </p:cTn>
-                              </p:par>
-                              <p:par>
-                                <p:cTn id="29" presetID="1" presetClass="entr" presetSubtype="0" fill="hold" nodeType="withEffect">
-                                  <p:stCondLst>
-                                    <p:cond delay="0"/>
-                                  </p:stCondLst>
-                                  <p:childTnLst>
-                                    <p:set>
-                                      <p:cBhvr>
-                                        <p:cTn id="30" dur="1" fill="hold">
-                                          <p:stCondLst>
-                                            <p:cond delay="0"/>
-                                          </p:stCondLst>
-                                        </p:cTn>
-                                        <p:tgtEl>
-                                          <p:spTgt spid="9"/>
-                                        </p:tgtEl>
-                                        <p:attrNameLst>
-                                          <p:attrName>style.visibility</p:attrName>
-                                        </p:attrNameLst>
-                                      </p:cBhvr>
-                                      <p:to>
-                                        <p:strVal val="visible"/>
-                                      </p:to>
-                                    </p:set>
-                                  </p:childTnLst>
-                                </p:cTn>
-                              </p:par>
-                            </p:childTnLst>
-                          </p:cTn>
-                        </p:par>
-                      </p:childTnLst>
-                    </p:cTn>
-                  </p:par>
-                </p:childTnLst>
-              </p:cTn>
-              <p:prevCondLst>
-                <p:cond evt="onPrev" delay="0">
-                  <p:tgtEl>
-                    <p:sldTgt/>
-                  </p:tgtEl>
-                </p:cond>
-              </p:prevCondLst>
-              <p:nextCondLst>
-                <p:cond evt="onNext" delay="0">
-                  <p:tgtEl>
-                    <p:sldTgt/>
-                  </p:tgtEl>
-                </p:cond>
-              </p:nextCondLst>
-            </p:seq>
-          </p:childTnLst>
-        </p:cTn>
-      </p:par>
-    </p:tnLst>
-    <p:bldLst>
-      <p:bldP spid="4" grpId="0" animBg="1"/>
-      <p:bldP spid="6" grpId="0" animBg="1"/>
-      <p:bldP spid="7" grpId="0" animBg="1"/>
-      <p:bldP spid="10" grpId="0" animBg="1"/>
-    </p:bldLst>
-  </p:timing>
 </p:sld>
 </file>
 

--- a/topic04/talk-1/ReactJS_01.pptx
+++ b/topic04/talk-1/ReactJS_01.pptx
@@ -5,26 +5,24 @@
     <p:sldMasterId id="2147483648" r:id="rId1"/>
   </p:sldMasterIdLst>
   <p:notesMasterIdLst>
-    <p:notesMasterId r:id="rId19"/>
+    <p:notesMasterId r:id="rId17"/>
   </p:notesMasterIdLst>
   <p:sldIdLst>
     <p:sldId id="325" r:id="rId2"/>
-    <p:sldId id="679" r:id="rId3"/>
-    <p:sldId id="678" r:id="rId4"/>
-    <p:sldId id="627" r:id="rId5"/>
-    <p:sldId id="552" r:id="rId6"/>
-    <p:sldId id="264" r:id="rId7"/>
-    <p:sldId id="531" r:id="rId8"/>
-    <p:sldId id="571" r:id="rId9"/>
-    <p:sldId id="677" r:id="rId10"/>
-    <p:sldId id="632" r:id="rId11"/>
-    <p:sldId id="572" r:id="rId12"/>
-    <p:sldId id="674" r:id="rId13"/>
-    <p:sldId id="591" r:id="rId14"/>
-    <p:sldId id="615" r:id="rId15"/>
-    <p:sldId id="541" r:id="rId16"/>
-    <p:sldId id="610" r:id="rId17"/>
-    <p:sldId id="609" r:id="rId18"/>
+    <p:sldId id="627" r:id="rId3"/>
+    <p:sldId id="552" r:id="rId4"/>
+    <p:sldId id="264" r:id="rId5"/>
+    <p:sldId id="531" r:id="rId6"/>
+    <p:sldId id="571" r:id="rId7"/>
+    <p:sldId id="677" r:id="rId8"/>
+    <p:sldId id="632" r:id="rId9"/>
+    <p:sldId id="572" r:id="rId10"/>
+    <p:sldId id="674" r:id="rId11"/>
+    <p:sldId id="591" r:id="rId12"/>
+    <p:sldId id="615" r:id="rId13"/>
+    <p:sldId id="541" r:id="rId14"/>
+    <p:sldId id="610" r:id="rId15"/>
+    <p:sldId id="609" r:id="rId16"/>
   </p:sldIdLst>
   <p:sldSz cx="12192000" cy="6858000"/>
   <p:notesSz cx="6858000" cy="9144000"/>
@@ -4307,131 +4305,6 @@
       </p:grpSpPr>
       <p:sp>
         <p:nvSpPr>
-          <p:cNvPr id="2" name="Slide Image Placeholder 1"/>
-          <p:cNvSpPr>
-            <a:spLocks noGrp="1" noRot="1" noChangeAspect="1"/>
-          </p:cNvSpPr>
-          <p:nvPr>
-            <p:ph type="sldImg"/>
-          </p:nvPr>
-        </p:nvSpPr>
-        <p:spPr>
-          <a:xfrm>
-            <a:off x="381000" y="685800"/>
-            <a:ext cx="6096000" cy="3429000"/>
-          </a:xfrm>
-        </p:spPr>
-      </p:sp>
-      <p:sp>
-        <p:nvSpPr>
-          <p:cNvPr id="3" name="Notes Placeholder 2"/>
-          <p:cNvSpPr>
-            <a:spLocks noGrp="1"/>
-          </p:cNvSpPr>
-          <p:nvPr>
-            <p:ph type="body" idx="1"/>
-          </p:nvPr>
-        </p:nvSpPr>
-        <p:spPr/>
-        <p:txBody>
-          <a:bodyPr/>
-          <a:lstStyle/>
-          <a:p>
-            <a:r>
-              <a:rPr lang="en-IE" b="0" i="0" dirty="0">
-                <a:solidFill>
-                  <a:srgbClr val="0D0D0D"/>
-                </a:solidFill>
-                <a:effectLst/>
-                <a:latin typeface="Söhne"/>
-              </a:rPr>
-              <a:t>It allows you to write HTML tags in TypeScript files. TypeScript supports JSX and provides type-checking for JSX code, enabling developers to use JSX syntax within TypeScript files (.</a:t>
-            </a:r>
-            <a:r>
-              <a:rPr lang="en-IE" b="0" i="0" dirty="0" err="1">
-                <a:solidFill>
-                  <a:srgbClr val="0D0D0D"/>
-                </a:solidFill>
-                <a:effectLst/>
-                <a:latin typeface="Söhne"/>
-              </a:rPr>
-              <a:t>tsx</a:t>
-            </a:r>
-            <a:r>
-              <a:rPr lang="en-IE" b="0" i="0" dirty="0">
-                <a:solidFill>
-                  <a:srgbClr val="0D0D0D"/>
-                </a:solidFill>
-                <a:effectLst/>
-                <a:latin typeface="Söhne"/>
-              </a:rPr>
-              <a:t> extension) for building user interfaces in a more expressive and HTML-like syntax.</a:t>
-            </a:r>
-            <a:endParaRPr lang="en-IE" dirty="0"/>
-          </a:p>
-        </p:txBody>
-      </p:sp>
-      <p:sp>
-        <p:nvSpPr>
-          <p:cNvPr id="4" name="Slide Number Placeholder 3"/>
-          <p:cNvSpPr>
-            <a:spLocks noGrp="1"/>
-          </p:cNvSpPr>
-          <p:nvPr>
-            <p:ph type="sldNum" sz="quarter" idx="5"/>
-          </p:nvPr>
-        </p:nvSpPr>
-        <p:spPr/>
-        <p:txBody>
-          <a:bodyPr/>
-          <a:lstStyle/>
-          <a:p>
-            <a:pPr>
-              <a:defRPr/>
-            </a:pPr>
-            <a:fld id="{59B5789E-C2A1-4F06-AD49-D6F9F59FBA85}" type="slidenum">
-              <a:rPr lang="en-US" altLang="en-US" smtClean="0"/>
-              <a:pPr>
-                <a:defRPr/>
-              </a:pPr>
-              <a:t>13</a:t>
-            </a:fld>
-            <a:endParaRPr lang="en-US" altLang="en-US"/>
-          </a:p>
-        </p:txBody>
-      </p:sp>
-    </p:spTree>
-    <p:extLst>
-      <p:ext uri="{BB962C8B-B14F-4D97-AF65-F5344CB8AC3E}">
-        <p14:creationId xmlns:p14="http://schemas.microsoft.com/office/powerpoint/2010/main" val="4258851525"/>
-      </p:ext>
-    </p:extLst>
-  </p:cSld>
-  <p:clrMapOvr>
-    <a:masterClrMapping/>
-  </p:clrMapOvr>
-</p:notes>
-</file>
-
-<file path=ppt/notesSlides/notesSlide11.xml><?xml version="1.0" encoding="utf-8"?>
-<p:notes xmlns:a="http://schemas.openxmlformats.org/drawingml/2006/main" xmlns:r="http://schemas.openxmlformats.org/officeDocument/2006/relationships" xmlns:p="http://schemas.openxmlformats.org/presentationml/2006/main">
-  <p:cSld>
-    <p:spTree>
-      <p:nvGrpSpPr>
-        <p:cNvPr id="1" name=""/>
-        <p:cNvGrpSpPr/>
-        <p:nvPr/>
-      </p:nvGrpSpPr>
-      <p:grpSpPr>
-        <a:xfrm>
-          <a:off x="0" y="0"/>
-          <a:ext cx="0" cy="0"/>
-          <a:chOff x="0" y="0"/>
-          <a:chExt cx="0" cy="0"/>
-        </a:xfrm>
-      </p:grpSpPr>
-      <p:sp>
-        <p:nvSpPr>
           <p:cNvPr id="27649" name="Slide Image Placeholder 1">
             <a:extLst>
               <a:ext uri="{FF2B5EF4-FFF2-40B4-BE49-F238E27FC236}">
@@ -4669,7 +4542,7 @@
             <a:fld id="{5BF2117E-EA09-4191-91CB-5C9296EDC926}" type="slidenum">
               <a:rPr lang="en-US" altLang="en-US" smtClean="0"/>
               <a:pPr/>
-              <a:t>16</a:t>
+              <a:t>14</a:t>
             </a:fld>
             <a:endParaRPr lang="en-US" altLang="en-US"/>
           </a:p>
@@ -4684,96 +4557,6 @@
 </file>
 
 <file path=ppt/notesSlides/notesSlide2.xml><?xml version="1.0" encoding="utf-8"?>
-<p:notes xmlns:a="http://schemas.openxmlformats.org/drawingml/2006/main" xmlns:r="http://schemas.openxmlformats.org/officeDocument/2006/relationships" xmlns:p="http://schemas.openxmlformats.org/presentationml/2006/main">
-  <p:cSld>
-    <p:spTree>
-      <p:nvGrpSpPr>
-        <p:cNvPr id="1" name=""/>
-        <p:cNvGrpSpPr/>
-        <p:nvPr/>
-      </p:nvGrpSpPr>
-      <p:grpSpPr>
-        <a:xfrm>
-          <a:off x="0" y="0"/>
-          <a:ext cx="0" cy="0"/>
-          <a:chOff x="0" y="0"/>
-          <a:chExt cx="0" cy="0"/>
-        </a:xfrm>
-      </p:grpSpPr>
-      <p:sp>
-        <p:nvSpPr>
-          <p:cNvPr id="2" name="Slide Image Placeholder 1"/>
-          <p:cNvSpPr>
-            <a:spLocks noGrp="1" noRot="1" noChangeAspect="1"/>
-          </p:cNvSpPr>
-          <p:nvPr>
-            <p:ph type="sldImg"/>
-          </p:nvPr>
-        </p:nvSpPr>
-        <p:spPr/>
-      </p:sp>
-      <p:sp>
-        <p:nvSpPr>
-          <p:cNvPr id="3" name="Notes Placeholder 2"/>
-          <p:cNvSpPr>
-            <a:spLocks noGrp="1"/>
-          </p:cNvSpPr>
-          <p:nvPr>
-            <p:ph type="body" idx="1"/>
-          </p:nvPr>
-        </p:nvSpPr>
-        <p:spPr/>
-        <p:txBody>
-          <a:bodyPr/>
-          <a:lstStyle/>
-          <a:p>
-            <a:endParaRPr lang="en-IE" dirty="0"/>
-          </a:p>
-        </p:txBody>
-      </p:sp>
-      <p:sp>
-        <p:nvSpPr>
-          <p:cNvPr id="4" name="Slide Number Placeholder 3"/>
-          <p:cNvSpPr>
-            <a:spLocks noGrp="1"/>
-          </p:cNvSpPr>
-          <p:nvPr>
-            <p:ph type="sldNum" sz="quarter" idx="5"/>
-          </p:nvPr>
-        </p:nvSpPr>
-        <p:spPr/>
-        <p:txBody>
-          <a:bodyPr/>
-          <a:lstStyle/>
-          <a:p>
-            <a:pPr>
-              <a:defRPr/>
-            </a:pPr>
-            <a:fld id="{59B5789E-C2A1-4F06-AD49-D6F9F59FBA85}" type="slidenum">
-              <a:rPr lang="en-US" altLang="en-US" smtClean="0"/>
-              <a:pPr>
-                <a:defRPr/>
-              </a:pPr>
-              <a:t>3</a:t>
-            </a:fld>
-            <a:endParaRPr lang="en-US" altLang="en-US"/>
-          </a:p>
-        </p:txBody>
-      </p:sp>
-    </p:spTree>
-    <p:extLst>
-      <p:ext uri="{BB962C8B-B14F-4D97-AF65-F5344CB8AC3E}">
-        <p14:creationId xmlns:p14="http://schemas.microsoft.com/office/powerpoint/2010/main" val="1726335478"/>
-      </p:ext>
-    </p:extLst>
-  </p:cSld>
-  <p:clrMapOvr>
-    <a:masterClrMapping/>
-  </p:clrMapOvr>
-</p:notes>
-</file>
-
-<file path=ppt/notesSlides/notesSlide3.xml><?xml version="1.0" encoding="utf-8"?>
 <p:notes xmlns:a="http://schemas.openxmlformats.org/drawingml/2006/main" xmlns:r="http://schemas.openxmlformats.org/officeDocument/2006/relationships" xmlns:p="http://schemas.openxmlformats.org/presentationml/2006/main">
   <p:cSld>
     <p:spTree>
@@ -4859,7 +4642,7 @@
               <a:pPr>
                 <a:defRPr/>
               </a:pPr>
-              <a:t>4</a:t>
+              <a:t>2</a:t>
             </a:fld>
             <a:endParaRPr lang="en-US" altLang="en-US"/>
           </a:p>
@@ -4878,7 +4661,7 @@
 </p:notes>
 </file>
 
-<file path=ppt/notesSlides/notesSlide4.xml><?xml version="1.0" encoding="utf-8"?>
+<file path=ppt/notesSlides/notesSlide3.xml><?xml version="1.0" encoding="utf-8"?>
 <p:notes xmlns:a="http://schemas.openxmlformats.org/drawingml/2006/main" xmlns:r="http://schemas.openxmlformats.org/officeDocument/2006/relationships" xmlns:p="http://schemas.openxmlformats.org/presentationml/2006/main">
   <p:cSld>
     <p:spTree>
@@ -4954,7 +4737,7 @@
               <a:pPr>
                 <a:defRPr/>
               </a:pPr>
-              <a:t>5</a:t>
+              <a:t>3</a:t>
             </a:fld>
             <a:endParaRPr lang="en-US" altLang="en-US"/>
           </a:p>
@@ -4973,7 +4756,7 @@
 </p:notes>
 </file>
 
-<file path=ppt/notesSlides/notesSlide5.xml><?xml version="1.0" encoding="utf-8"?>
+<file path=ppt/notesSlides/notesSlide4.xml><?xml version="1.0" encoding="utf-8"?>
 <p:notes xmlns:a="http://schemas.openxmlformats.org/drawingml/2006/main" xmlns:r="http://schemas.openxmlformats.org/officeDocument/2006/relationships" xmlns:p="http://schemas.openxmlformats.org/presentationml/2006/main">
   <p:cSld>
     <p:spTree>
@@ -5164,7 +4947,7 @@
               <a:pPr>
                 <a:defRPr/>
               </a:pPr>
-              <a:t>7</a:t>
+              <a:t>5</a:t>
             </a:fld>
             <a:endParaRPr lang="en-US" altLang="en-US"/>
           </a:p>
@@ -5183,7 +4966,7 @@
 </p:notes>
 </file>
 
-<file path=ppt/notesSlides/notesSlide6.xml><?xml version="1.0" encoding="utf-8"?>
+<file path=ppt/notesSlides/notesSlide5.xml><?xml version="1.0" encoding="utf-8"?>
 <p:notes xmlns:a="http://schemas.openxmlformats.org/drawingml/2006/main" xmlns:r="http://schemas.openxmlformats.org/officeDocument/2006/relationships" xmlns:p="http://schemas.openxmlformats.org/presentationml/2006/main">
   <p:cSld>
     <p:spTree>
@@ -5333,7 +5116,7 @@
               <a:pPr>
                 <a:defRPr/>
               </a:pPr>
-              <a:t>8</a:t>
+              <a:t>6</a:t>
             </a:fld>
             <a:endParaRPr lang="en-US" altLang="en-US"/>
           </a:p>
@@ -5352,7 +5135,7 @@
 </p:notes>
 </file>
 
-<file path=ppt/notesSlides/notesSlide7.xml><?xml version="1.0" encoding="utf-8"?>
+<file path=ppt/notesSlides/notesSlide6.xml><?xml version="1.0" encoding="utf-8"?>
 <p:notes xmlns:a="http://schemas.openxmlformats.org/drawingml/2006/main" xmlns:r="http://schemas.openxmlformats.org/officeDocument/2006/relationships" xmlns:p="http://schemas.openxmlformats.org/presentationml/2006/main">
   <p:cSld>
     <p:spTree>
@@ -5571,7 +5354,7 @@
               <a:pPr>
                 <a:defRPr/>
               </a:pPr>
-              <a:t>9</a:t>
+              <a:t>7</a:t>
             </a:fld>
             <a:endParaRPr lang="en-US" altLang="en-US"/>
           </a:p>
@@ -5590,7 +5373,7 @@
 </p:notes>
 </file>
 
-<file path=ppt/notesSlides/notesSlide8.xml><?xml version="1.0" encoding="utf-8"?>
+<file path=ppt/notesSlides/notesSlide7.xml><?xml version="1.0" encoding="utf-8"?>
 <p:notes xmlns:a="http://schemas.openxmlformats.org/drawingml/2006/main" xmlns:r="http://schemas.openxmlformats.org/officeDocument/2006/relationships" xmlns:p="http://schemas.openxmlformats.org/presentationml/2006/main">
   <p:cSld>
     <p:spTree>
@@ -5881,7 +5664,7 @@
               <a:pPr>
                 <a:defRPr/>
               </a:pPr>
-              <a:t>11</a:t>
+              <a:t>9</a:t>
             </a:fld>
             <a:endParaRPr lang="en-US" altLang="en-US"/>
           </a:p>
@@ -5900,7 +5683,7 @@
 </p:notes>
 </file>
 
-<file path=ppt/notesSlides/notesSlide9.xml><?xml version="1.0" encoding="utf-8"?>
+<file path=ppt/notesSlides/notesSlide8.xml><?xml version="1.0" encoding="utf-8"?>
 <p:notes xmlns:a="http://schemas.openxmlformats.org/drawingml/2006/main" xmlns:r="http://schemas.openxmlformats.org/officeDocument/2006/relationships" xmlns:p="http://schemas.openxmlformats.org/presentationml/2006/main">
   <p:cSld>
     <p:spTree>
@@ -6151,7 +5934,7 @@
               <a:pPr>
                 <a:defRPr/>
               </a:pPr>
-              <a:t>12</a:t>
+              <a:t>10</a:t>
             </a:fld>
             <a:endParaRPr lang="en-US" altLang="en-US"/>
           </a:p>
@@ -6161,6 +5944,131 @@
     <p:extLst>
       <p:ext uri="{BB962C8B-B14F-4D97-AF65-F5344CB8AC3E}">
         <p14:creationId xmlns:p14="http://schemas.microsoft.com/office/powerpoint/2010/main" val="1379595721"/>
+      </p:ext>
+    </p:extLst>
+  </p:cSld>
+  <p:clrMapOvr>
+    <a:masterClrMapping/>
+  </p:clrMapOvr>
+</p:notes>
+</file>
+
+<file path=ppt/notesSlides/notesSlide9.xml><?xml version="1.0" encoding="utf-8"?>
+<p:notes xmlns:a="http://schemas.openxmlformats.org/drawingml/2006/main" xmlns:r="http://schemas.openxmlformats.org/officeDocument/2006/relationships" xmlns:p="http://schemas.openxmlformats.org/presentationml/2006/main">
+  <p:cSld>
+    <p:spTree>
+      <p:nvGrpSpPr>
+        <p:cNvPr id="1" name=""/>
+        <p:cNvGrpSpPr/>
+        <p:nvPr/>
+      </p:nvGrpSpPr>
+      <p:grpSpPr>
+        <a:xfrm>
+          <a:off x="0" y="0"/>
+          <a:ext cx="0" cy="0"/>
+          <a:chOff x="0" y="0"/>
+          <a:chExt cx="0" cy="0"/>
+        </a:xfrm>
+      </p:grpSpPr>
+      <p:sp>
+        <p:nvSpPr>
+          <p:cNvPr id="2" name="Slide Image Placeholder 1"/>
+          <p:cNvSpPr>
+            <a:spLocks noGrp="1" noRot="1" noChangeAspect="1"/>
+          </p:cNvSpPr>
+          <p:nvPr>
+            <p:ph type="sldImg"/>
+          </p:nvPr>
+        </p:nvSpPr>
+        <p:spPr>
+          <a:xfrm>
+            <a:off x="381000" y="685800"/>
+            <a:ext cx="6096000" cy="3429000"/>
+          </a:xfrm>
+        </p:spPr>
+      </p:sp>
+      <p:sp>
+        <p:nvSpPr>
+          <p:cNvPr id="3" name="Notes Placeholder 2"/>
+          <p:cNvSpPr>
+            <a:spLocks noGrp="1"/>
+          </p:cNvSpPr>
+          <p:nvPr>
+            <p:ph type="body" idx="1"/>
+          </p:nvPr>
+        </p:nvSpPr>
+        <p:spPr/>
+        <p:txBody>
+          <a:bodyPr/>
+          <a:lstStyle/>
+          <a:p>
+            <a:r>
+              <a:rPr lang="en-IE" b="0" i="0" dirty="0">
+                <a:solidFill>
+                  <a:srgbClr val="0D0D0D"/>
+                </a:solidFill>
+                <a:effectLst/>
+                <a:latin typeface="Söhne"/>
+              </a:rPr>
+              <a:t>It allows you to write HTML tags in TypeScript files. TypeScript supports JSX and provides type-checking for JSX code, enabling developers to use JSX syntax within TypeScript files (.</a:t>
+            </a:r>
+            <a:r>
+              <a:rPr lang="en-IE" b="0" i="0" dirty="0" err="1">
+                <a:solidFill>
+                  <a:srgbClr val="0D0D0D"/>
+                </a:solidFill>
+                <a:effectLst/>
+                <a:latin typeface="Söhne"/>
+              </a:rPr>
+              <a:t>tsx</a:t>
+            </a:r>
+            <a:r>
+              <a:rPr lang="en-IE" b="0" i="0" dirty="0">
+                <a:solidFill>
+                  <a:srgbClr val="0D0D0D"/>
+                </a:solidFill>
+                <a:effectLst/>
+                <a:latin typeface="Söhne"/>
+              </a:rPr>
+              <a:t> extension) for building user interfaces in a more expressive and HTML-like syntax.</a:t>
+            </a:r>
+            <a:endParaRPr lang="en-IE" dirty="0"/>
+          </a:p>
+        </p:txBody>
+      </p:sp>
+      <p:sp>
+        <p:nvSpPr>
+          <p:cNvPr id="4" name="Slide Number Placeholder 3"/>
+          <p:cNvSpPr>
+            <a:spLocks noGrp="1"/>
+          </p:cNvSpPr>
+          <p:nvPr>
+            <p:ph type="sldNum" sz="quarter" idx="5"/>
+          </p:nvPr>
+        </p:nvSpPr>
+        <p:spPr/>
+        <p:txBody>
+          <a:bodyPr/>
+          <a:lstStyle/>
+          <a:p>
+            <a:pPr>
+              <a:defRPr/>
+            </a:pPr>
+            <a:fld id="{59B5789E-C2A1-4F06-AD49-D6F9F59FBA85}" type="slidenum">
+              <a:rPr lang="en-US" altLang="en-US" smtClean="0"/>
+              <a:pPr>
+                <a:defRPr/>
+              </a:pPr>
+              <a:t>11</a:t>
+            </a:fld>
+            <a:endParaRPr lang="en-US" altLang="en-US"/>
+          </a:p>
+        </p:txBody>
+      </p:sp>
+    </p:spTree>
+    <p:extLst>
+      <p:ext uri="{BB962C8B-B14F-4D97-AF65-F5344CB8AC3E}">
+        <p14:creationId xmlns:p14="http://schemas.microsoft.com/office/powerpoint/2010/main" val="4258851525"/>
       </p:ext>
     </p:extLst>
   </p:cSld>
@@ -13357,1500 +13265,6 @@
       </p:grpSpPr>
       <p:sp>
         <p:nvSpPr>
-          <p:cNvPr id="21505" name="Title 1">
-            <a:extLst>
-              <a:ext uri="{FF2B5EF4-FFF2-40B4-BE49-F238E27FC236}">
-                <a16:creationId xmlns:a16="http://schemas.microsoft.com/office/drawing/2014/main" id="{5540338F-0047-817D-33BC-1F0F33ECC917}"/>
-              </a:ext>
-            </a:extLst>
-          </p:cNvPr>
-          <p:cNvSpPr>
-            <a:spLocks noGrp="1" noChangeArrowheads="1"/>
-          </p:cNvSpPr>
-          <p:nvPr>
-            <p:ph type="title"/>
-          </p:nvPr>
-        </p:nvSpPr>
-        <p:spPr/>
-        <p:txBody>
-          <a:bodyPr/>
-          <a:lstStyle/>
-          <a:p>
-            <a:r>
-              <a:rPr lang="en-US" altLang="en-US" dirty="0">
-                <a:ea typeface="ＭＳ Ｐゴシック" panose="020B0600070205080204" pitchFamily="34" charset="-128"/>
-              </a:rPr>
-              <a:t>In-Class Code Demos.</a:t>
-            </a:r>
-            <a:br>
-              <a:rPr lang="en-US" altLang="en-US" dirty="0">
-                <a:ea typeface="ＭＳ Ｐゴシック" panose="020B0600070205080204" pitchFamily="34" charset="-128"/>
-              </a:rPr>
-            </a:br>
-            <a:r>
-              <a:rPr lang="en-US" altLang="en-US" sz="2400" dirty="0">
-                <a:ea typeface="ＭＳ Ｐゴシック" panose="020B0600070205080204" pitchFamily="34" charset="-128"/>
-              </a:rPr>
-              <a:t>(See lecture archive)</a:t>
-            </a:r>
-          </a:p>
-        </p:txBody>
-      </p:sp>
-      <p:sp>
-        <p:nvSpPr>
-          <p:cNvPr id="21506" name="Slide Number Placeholder 3">
-            <a:extLst>
-              <a:ext uri="{FF2B5EF4-FFF2-40B4-BE49-F238E27FC236}">
-                <a16:creationId xmlns:a16="http://schemas.microsoft.com/office/drawing/2014/main" id="{BFCD649D-2ECE-3525-5908-56A7B8D9D2BC}"/>
-              </a:ext>
-            </a:extLst>
-          </p:cNvPr>
-          <p:cNvSpPr>
-            <a:spLocks noGrp="1"/>
-          </p:cNvSpPr>
-          <p:nvPr>
-            <p:ph type="sldNum" sz="quarter" idx="12"/>
-          </p:nvPr>
-        </p:nvSpPr>
-        <p:spPr>
-          <a:noFill/>
-          <a:ln/>
-          <a:extLst>
-            <a:ext uri="{909E8E84-426E-40DD-AFC4-6F175D3DCCD1}">
-              <a14:hiddenFill xmlns:a14="http://schemas.microsoft.com/office/drawing/2010/main">
-                <a:solidFill>
-                  <a:srgbClr val="FFFFFF"/>
-                </a:solidFill>
-              </a14:hiddenFill>
-            </a:ext>
-            <a:ext uri="{91240B29-F687-4F45-9708-019B960494DF}">
-              <a14:hiddenLine xmlns:a14="http://schemas.microsoft.com/office/drawing/2010/main" w="9525">
-                <a:solidFill>
-                  <a:srgbClr val="000000"/>
-                </a:solidFill>
-                <a:miter lim="800000"/>
-                <a:headEnd/>
-                <a:tailEnd/>
-              </a14:hiddenLine>
-            </a:ext>
-          </a:extLst>
-        </p:spPr>
-        <p:txBody>
-          <a:bodyPr/>
-          <a:lstStyle>
-            <a:lvl1pPr>
-              <a:spcBef>
-                <a:spcPct val="20000"/>
-              </a:spcBef>
-              <a:buChar char="•"/>
-              <a:defRPr b="1">
-                <a:solidFill>
-                  <a:schemeClr val="tx1"/>
-                </a:solidFill>
-                <a:latin typeface="Arial" panose="020B0604020202020204" pitchFamily="34" charset="0"/>
-                <a:ea typeface="ＭＳ Ｐゴシック" panose="020B0600070205080204" pitchFamily="34" charset="-128"/>
-              </a:defRPr>
-            </a:lvl1pPr>
-            <a:lvl2pPr marL="742950" indent="-285750">
-              <a:spcBef>
-                <a:spcPct val="20000"/>
-              </a:spcBef>
-              <a:buChar char="–"/>
-              <a:defRPr b="1">
-                <a:solidFill>
-                  <a:schemeClr val="tx1"/>
-                </a:solidFill>
-                <a:latin typeface="Arial" panose="020B0604020202020204" pitchFamily="34" charset="0"/>
-                <a:ea typeface="ＭＳ Ｐゴシック" panose="020B0600070205080204" pitchFamily="34" charset="-128"/>
-              </a:defRPr>
-            </a:lvl2pPr>
-            <a:lvl3pPr marL="1143000" indent="-228600">
-              <a:spcBef>
-                <a:spcPct val="20000"/>
-              </a:spcBef>
-              <a:buChar char="•"/>
-              <a:defRPr b="1">
-                <a:solidFill>
-                  <a:schemeClr val="tx1"/>
-                </a:solidFill>
-                <a:latin typeface="Arial" panose="020B0604020202020204" pitchFamily="34" charset="0"/>
-                <a:ea typeface="ＭＳ Ｐゴシック" panose="020B0600070205080204" pitchFamily="34" charset="-128"/>
-              </a:defRPr>
-            </a:lvl3pPr>
-            <a:lvl4pPr marL="1600200" indent="-228600">
-              <a:spcBef>
-                <a:spcPct val="20000"/>
-              </a:spcBef>
-              <a:buChar char="–"/>
-              <a:defRPr b="1">
-                <a:solidFill>
-                  <a:schemeClr val="tx1"/>
-                </a:solidFill>
-                <a:latin typeface="Arial" panose="020B0604020202020204" pitchFamily="34" charset="0"/>
-                <a:ea typeface="ＭＳ Ｐゴシック" panose="020B0600070205080204" pitchFamily="34" charset="-128"/>
-              </a:defRPr>
-            </a:lvl4pPr>
-            <a:lvl5pPr marL="2057400" indent="-228600">
-              <a:spcBef>
-                <a:spcPct val="20000"/>
-              </a:spcBef>
-              <a:buChar char="»"/>
-              <a:defRPr b="1">
-                <a:solidFill>
-                  <a:schemeClr val="tx1"/>
-                </a:solidFill>
-                <a:latin typeface="Arial" panose="020B0604020202020204" pitchFamily="34" charset="0"/>
-                <a:ea typeface="ＭＳ Ｐゴシック" panose="020B0600070205080204" pitchFamily="34" charset="-128"/>
-              </a:defRPr>
-            </a:lvl5pPr>
-            <a:lvl6pPr marL="2514600" indent="-228600" eaLnBrk="0" fontAlgn="base" hangingPunct="0">
-              <a:spcBef>
-                <a:spcPct val="20000"/>
-              </a:spcBef>
-              <a:spcAft>
-                <a:spcPct val="0"/>
-              </a:spcAft>
-              <a:buChar char="»"/>
-              <a:defRPr b="1">
-                <a:solidFill>
-                  <a:schemeClr val="tx1"/>
-                </a:solidFill>
-                <a:latin typeface="Arial" panose="020B0604020202020204" pitchFamily="34" charset="0"/>
-                <a:ea typeface="ＭＳ Ｐゴシック" panose="020B0600070205080204" pitchFamily="34" charset="-128"/>
-              </a:defRPr>
-            </a:lvl6pPr>
-            <a:lvl7pPr marL="2971800" indent="-228600" eaLnBrk="0" fontAlgn="base" hangingPunct="0">
-              <a:spcBef>
-                <a:spcPct val="20000"/>
-              </a:spcBef>
-              <a:spcAft>
-                <a:spcPct val="0"/>
-              </a:spcAft>
-              <a:buChar char="»"/>
-              <a:defRPr b="1">
-                <a:solidFill>
-                  <a:schemeClr val="tx1"/>
-                </a:solidFill>
-                <a:latin typeface="Arial" panose="020B0604020202020204" pitchFamily="34" charset="0"/>
-                <a:ea typeface="ＭＳ Ｐゴシック" panose="020B0600070205080204" pitchFamily="34" charset="-128"/>
-              </a:defRPr>
-            </a:lvl7pPr>
-            <a:lvl8pPr marL="3429000" indent="-228600" eaLnBrk="0" fontAlgn="base" hangingPunct="0">
-              <a:spcBef>
-                <a:spcPct val="20000"/>
-              </a:spcBef>
-              <a:spcAft>
-                <a:spcPct val="0"/>
-              </a:spcAft>
-              <a:buChar char="»"/>
-              <a:defRPr b="1">
-                <a:solidFill>
-                  <a:schemeClr val="tx1"/>
-                </a:solidFill>
-                <a:latin typeface="Arial" panose="020B0604020202020204" pitchFamily="34" charset="0"/>
-                <a:ea typeface="ＭＳ Ｐゴシック" panose="020B0600070205080204" pitchFamily="34" charset="-128"/>
-              </a:defRPr>
-            </a:lvl8pPr>
-            <a:lvl9pPr marL="3886200" indent="-228600" eaLnBrk="0" fontAlgn="base" hangingPunct="0">
-              <a:spcBef>
-                <a:spcPct val="20000"/>
-              </a:spcBef>
-              <a:spcAft>
-                <a:spcPct val="0"/>
-              </a:spcAft>
-              <a:buChar char="»"/>
-              <a:defRPr b="1">
-                <a:solidFill>
-                  <a:schemeClr val="tx1"/>
-                </a:solidFill>
-                <a:latin typeface="Arial" panose="020B0604020202020204" pitchFamily="34" charset="0"/>
-                <a:ea typeface="ＭＳ Ｐゴシック" panose="020B0600070205080204" pitchFamily="34" charset="-128"/>
-              </a:defRPr>
-            </a:lvl9pPr>
-          </a:lstStyle>
-          <a:p>
-            <a:pPr>
-              <a:spcBef>
-                <a:spcPct val="0"/>
-              </a:spcBef>
-              <a:buFontTx/>
-              <a:buNone/>
-            </a:pPr>
-            <a:fld id="{9C6B1C8A-6C76-417A-BCA1-70D0DFFCDDE2}" type="slidenum">
-              <a:rPr lang="en-US" altLang="en-US" b="0" smtClean="0"/>
-              <a:pPr>
-                <a:spcBef>
-                  <a:spcPct val="0"/>
-                </a:spcBef>
-                <a:buFontTx/>
-                <a:buNone/>
-              </a:pPr>
-              <a:t>10</a:t>
-            </a:fld>
-            <a:endParaRPr lang="en-US" altLang="en-US" b="0"/>
-          </a:p>
-        </p:txBody>
-      </p:sp>
-      <p:pic>
-        <p:nvPicPr>
-          <p:cNvPr id="6" name="Picture 5">
-            <a:extLst>
-              <a:ext uri="{FF2B5EF4-FFF2-40B4-BE49-F238E27FC236}">
-                <a16:creationId xmlns:a16="http://schemas.microsoft.com/office/drawing/2014/main" id="{6E91695F-7035-993A-4DE0-A9E5E72A204F}"/>
-              </a:ext>
-            </a:extLst>
-          </p:cNvPr>
-          <p:cNvPicPr>
-            <a:picLocks noChangeAspect="1" noChangeArrowheads="1"/>
-          </p:cNvPicPr>
-          <p:nvPr/>
-        </p:nvPicPr>
-        <p:blipFill>
-          <a:blip r:embed="rId2">
-            <a:extLst>
-              <a:ext uri="{28A0092B-C50C-407E-A947-70E740481C1C}">
-                <a14:useLocalDpi xmlns:a14="http://schemas.microsoft.com/office/drawing/2010/main" val="0"/>
-              </a:ext>
-            </a:extLst>
-          </a:blip>
-          <a:srcRect/>
-          <a:stretch>
-            <a:fillRect/>
-          </a:stretch>
-        </p:blipFill>
-        <p:spPr bwMode="auto">
-          <a:xfrm>
-            <a:off x="1981200" y="1417640"/>
-            <a:ext cx="8001000" cy="4413324"/>
-          </a:xfrm>
-          <a:prstGeom prst="rect">
-            <a:avLst/>
-          </a:prstGeom>
-          <a:noFill/>
-          <a:ln>
-            <a:noFill/>
-          </a:ln>
-          <a:effectLst>
-            <a:outerShdw blurRad="50800" dist="50800" dir="5400000" sx="102000" sy="102000" algn="ctr" rotWithShape="0">
-              <a:srgbClr val="000000">
-                <a:alpha val="43137"/>
-              </a:srgbClr>
-            </a:outerShdw>
-          </a:effectLst>
-          <a:extLst>
-            <a:ext uri="{909E8E84-426E-40DD-AFC4-6F175D3DCCD1}">
-              <a14:hiddenFill xmlns:a14="http://schemas.microsoft.com/office/drawing/2010/main">
-                <a:solidFill>
-                  <a:srgbClr val="FFFFFF"/>
-                </a:solidFill>
-              </a14:hiddenFill>
-            </a:ext>
-            <a:ext uri="{91240B29-F687-4F45-9708-019B960494DF}">
-              <a14:hiddenLine xmlns:a14="http://schemas.microsoft.com/office/drawing/2010/main" w="9525">
-                <a:solidFill>
-                  <a:srgbClr val="000000"/>
-                </a:solidFill>
-                <a:miter lim="800000"/>
-                <a:headEnd/>
-                <a:tailEnd/>
-              </a14:hiddenLine>
-            </a:ext>
-          </a:extLst>
-        </p:spPr>
-      </p:pic>
-      <p:sp>
-        <p:nvSpPr>
-          <p:cNvPr id="7" name="Rectangle 6">
-            <a:extLst>
-              <a:ext uri="{FF2B5EF4-FFF2-40B4-BE49-F238E27FC236}">
-                <a16:creationId xmlns:a16="http://schemas.microsoft.com/office/drawing/2014/main" id="{7973ACA3-F0FD-0A7C-E890-8D2DB0C5857A}"/>
-              </a:ext>
-            </a:extLst>
-          </p:cNvPr>
-          <p:cNvSpPr/>
-          <p:nvPr/>
-        </p:nvSpPr>
-        <p:spPr>
-          <a:xfrm>
-            <a:off x="3822700" y="4648200"/>
-            <a:ext cx="4559300" cy="914400"/>
-          </a:xfrm>
-          <a:prstGeom prst="rect">
-            <a:avLst/>
-          </a:prstGeom>
-        </p:spPr>
-        <p:style>
-          <a:lnRef idx="3">
-            <a:schemeClr val="lt1"/>
-          </a:lnRef>
-          <a:fillRef idx="1">
-            <a:schemeClr val="accent6"/>
-          </a:fillRef>
-          <a:effectRef idx="1">
-            <a:schemeClr val="accent6"/>
-          </a:effectRef>
-          <a:fontRef idx="minor">
-            <a:schemeClr val="lt1"/>
-          </a:fontRef>
-        </p:style>
-        <p:txBody>
-          <a:bodyPr anchor="ctr"/>
-          <a:lstStyle/>
-          <a:p>
-            <a:pPr algn="ctr">
-              <a:defRPr/>
-            </a:pPr>
-            <a:r>
-              <a:rPr lang="en-US" dirty="0"/>
-              <a:t>See Archive  accompanying these slides.</a:t>
-            </a:r>
-          </a:p>
-          <a:p>
-            <a:pPr algn="ctr">
-              <a:defRPr/>
-            </a:pPr>
-            <a:r>
-              <a:rPr lang="en-US" dirty="0"/>
-              <a:t>Run code using VS Code Live Server extension.</a:t>
-            </a:r>
-          </a:p>
-        </p:txBody>
-      </p:sp>
-    </p:spTree>
-  </p:cSld>
-  <p:clrMapOvr>
-    <a:masterClrMapping/>
-  </p:clrMapOvr>
-</p:sld>
-</file>
-
-<file path=ppt/slides/slide11.xml><?xml version="1.0" encoding="utf-8"?>
-<p:sld xmlns:a="http://schemas.openxmlformats.org/drawingml/2006/main" xmlns:r="http://schemas.openxmlformats.org/officeDocument/2006/relationships" xmlns:p="http://schemas.openxmlformats.org/presentationml/2006/main">
-  <p:cSld>
-    <p:spTree>
-      <p:nvGrpSpPr>
-        <p:cNvPr id="1" name=""/>
-        <p:cNvGrpSpPr/>
-        <p:nvPr/>
-      </p:nvGrpSpPr>
-      <p:grpSpPr>
-        <a:xfrm>
-          <a:off x="0" y="0"/>
-          <a:ext cx="0" cy="0"/>
-          <a:chOff x="0" y="0"/>
-          <a:chExt cx="0" cy="0"/>
-        </a:xfrm>
-      </p:grpSpPr>
-      <p:sp>
-        <p:nvSpPr>
-          <p:cNvPr id="20481" name="Title 1">
-            <a:extLst>
-              <a:ext uri="{FF2B5EF4-FFF2-40B4-BE49-F238E27FC236}">
-                <a16:creationId xmlns:a16="http://schemas.microsoft.com/office/drawing/2014/main" id="{0CAA7637-C6F8-9B80-2A93-0A207F49DD20}"/>
-              </a:ext>
-            </a:extLst>
-          </p:cNvPr>
-          <p:cNvSpPr>
-            <a:spLocks noGrp="1" noChangeArrowheads="1"/>
-          </p:cNvSpPr>
-          <p:nvPr>
-            <p:ph type="title"/>
-          </p:nvPr>
-        </p:nvSpPr>
-        <p:spPr/>
-        <p:txBody>
-          <a:bodyPr/>
-          <a:lstStyle/>
-          <a:p>
-            <a:r>
-              <a:rPr lang="en-US" altLang="en-US" dirty="0">
-                <a:ea typeface="ＭＳ Ｐゴシック" panose="020B0600070205080204" pitchFamily="34" charset="-128"/>
-              </a:rPr>
-              <a:t>Creating the </a:t>
-            </a:r>
-            <a:r>
-              <a:rPr lang="en-US" altLang="en-US" u="sng" dirty="0">
-                <a:ea typeface="ＭＳ Ｐゴシック" panose="020B0600070205080204" pitchFamily="34" charset="-128"/>
-              </a:rPr>
-              <a:t>UI Description.</a:t>
-            </a:r>
-            <a:br>
-              <a:rPr lang="en-US" altLang="en-US" u="sng" dirty="0">
-                <a:ea typeface="ＭＳ Ｐゴシック" panose="020B0600070205080204" pitchFamily="34" charset="-128"/>
-              </a:rPr>
-            </a:br>
-            <a:r>
-              <a:rPr lang="en-US" altLang="en-US" sz="2000" dirty="0">
-                <a:ea typeface="ＭＳ Ｐゴシック" panose="020B0600070205080204" pitchFamily="34" charset="-128"/>
-              </a:rPr>
-              <a:t>(Vanilla React)</a:t>
-            </a:r>
-          </a:p>
-        </p:txBody>
-      </p:sp>
-      <p:sp>
-        <p:nvSpPr>
-          <p:cNvPr id="20482" name="Content Placeholder 2">
-            <a:extLst>
-              <a:ext uri="{FF2B5EF4-FFF2-40B4-BE49-F238E27FC236}">
-                <a16:creationId xmlns:a16="http://schemas.microsoft.com/office/drawing/2014/main" id="{7F23EA52-ACFF-3685-55E9-F291679C5A7B}"/>
-              </a:ext>
-            </a:extLst>
-          </p:cNvPr>
-          <p:cNvSpPr>
-            <a:spLocks noGrp="1" noChangeArrowheads="1"/>
-          </p:cNvSpPr>
-          <p:nvPr>
-            <p:ph idx="1"/>
-          </p:nvPr>
-        </p:nvSpPr>
-        <p:spPr>
-          <a:xfrm>
-            <a:off x="457200" y="1527175"/>
-            <a:ext cx="11430000" cy="4718050"/>
-          </a:xfrm>
-        </p:spPr>
-        <p:txBody>
-          <a:bodyPr/>
-          <a:lstStyle/>
-          <a:p>
-            <a:r>
-              <a:rPr lang="en-US" altLang="en-US" sz="2000" b="0" dirty="0" err="1">
-                <a:ea typeface="ＭＳ Ｐゴシック" panose="020B0600070205080204" pitchFamily="34" charset="-128"/>
-              </a:rPr>
-              <a:t>React.createElement</a:t>
-            </a:r>
-            <a:r>
-              <a:rPr lang="en-US" altLang="en-US" sz="2000" b="0" dirty="0">
-                <a:ea typeface="ＭＳ Ｐゴシック" panose="020B0600070205080204" pitchFamily="34" charset="-128"/>
-              </a:rPr>
-              <a:t>() </a:t>
-            </a:r>
-            <a:r>
-              <a:rPr lang="en-US" altLang="en-US" sz="2000" dirty="0">
-                <a:ea typeface="ＭＳ Ｐゴシック" panose="020B0600070205080204" pitchFamily="34" charset="-128"/>
-              </a:rPr>
-              <a:t>– creates a HTML element.</a:t>
-            </a:r>
-          </a:p>
-          <a:p>
-            <a:r>
-              <a:rPr lang="en-US" altLang="en-US" sz="2000" b="0" dirty="0" err="1">
-                <a:ea typeface="ＭＳ Ｐゴシック" panose="020B0600070205080204" pitchFamily="34" charset="-128"/>
-              </a:rPr>
-              <a:t>ReactDOM.createRoot</a:t>
-            </a:r>
-            <a:r>
-              <a:rPr lang="en-US" altLang="en-US" sz="2000" b="0" dirty="0">
-                <a:ea typeface="ＭＳ Ｐゴシック" panose="020B0600070205080204" pitchFamily="34" charset="-128"/>
-              </a:rPr>
-              <a:t>() – </a:t>
-            </a:r>
-            <a:r>
-              <a:rPr lang="en-US" altLang="en-US" sz="2000" dirty="0">
-                <a:ea typeface="ＭＳ Ｐゴシック" panose="020B0600070205080204" pitchFamily="34" charset="-128"/>
-              </a:rPr>
-              <a:t>used to attach the created element to existing DOM node. </a:t>
-            </a:r>
-            <a:endParaRPr lang="en-US" altLang="en-US" sz="2000" b="0" dirty="0">
-              <a:ea typeface="ＭＳ Ｐゴシック" panose="020B0600070205080204" pitchFamily="34" charset="-128"/>
-            </a:endParaRPr>
-          </a:p>
-          <a:p>
-            <a:r>
-              <a:rPr lang="en-US" altLang="en-US" sz="2000" b="0" dirty="0" err="1">
-                <a:ea typeface="ＭＳ Ｐゴシック" panose="020B0600070205080204" pitchFamily="34" charset="-128"/>
-              </a:rPr>
-              <a:t>React.createElement</a:t>
-            </a:r>
-            <a:r>
-              <a:rPr lang="en-US" altLang="en-US" sz="2000" b="0" dirty="0">
-                <a:ea typeface="ＭＳ Ｐゴシック" panose="020B0600070205080204" pitchFamily="34" charset="-128"/>
-              </a:rPr>
-              <a:t>() takes three or more </a:t>
-            </a:r>
-            <a:r>
-              <a:rPr lang="en-US" altLang="en-US" sz="2000" dirty="0">
-                <a:ea typeface="ＭＳ Ｐゴシック" panose="020B0600070205080204" pitchFamily="34" charset="-128"/>
-              </a:rPr>
-              <a:t>arguments</a:t>
-            </a:r>
-            <a:r>
-              <a:rPr lang="en-US" altLang="en-US" sz="2000" b="0" dirty="0">
-                <a:ea typeface="ＭＳ Ｐゴシック" panose="020B0600070205080204" pitchFamily="34" charset="-128"/>
-              </a:rPr>
-              <a:t>:</a:t>
-            </a:r>
-            <a:endParaRPr lang="en-US" altLang="en-US" sz="2000" dirty="0">
-              <a:ea typeface="ＭＳ Ｐゴシック" panose="020B0600070205080204" pitchFamily="34" charset="-128"/>
-            </a:endParaRPr>
-          </a:p>
-          <a:p>
-            <a:pPr marL="914400" lvl="1" indent="-457200"/>
-            <a:endParaRPr lang="en-US" altLang="en-US" sz="2400" dirty="0">
-              <a:ea typeface="ＭＳ Ｐゴシック" panose="020B0600070205080204" pitchFamily="34" charset="-128"/>
-            </a:endParaRPr>
-          </a:p>
-          <a:p>
-            <a:pPr marL="914400" lvl="1" indent="-457200"/>
-            <a:endParaRPr lang="en-US" altLang="en-US" sz="2400" dirty="0">
-              <a:ea typeface="ＭＳ Ｐゴシック" panose="020B0600070205080204" pitchFamily="34" charset="-128"/>
-            </a:endParaRPr>
-          </a:p>
-          <a:p>
-            <a:pPr marL="914400" lvl="1" indent="-457200"/>
-            <a:endParaRPr lang="en-US" altLang="en-US" sz="2400" dirty="0">
-              <a:ea typeface="ＭＳ Ｐゴシック" panose="020B0600070205080204" pitchFamily="34" charset="-128"/>
-            </a:endParaRPr>
-          </a:p>
-          <a:p>
-            <a:pPr marL="914400" lvl="1" indent="-457200"/>
-            <a:endParaRPr lang="en-US" altLang="en-US" sz="2400" dirty="0">
-              <a:ea typeface="ＭＳ Ｐゴシック" panose="020B0600070205080204" pitchFamily="34" charset="-128"/>
-            </a:endParaRPr>
-          </a:p>
-          <a:p>
-            <a:pPr marL="914400" lvl="1" indent="-457200"/>
-            <a:endParaRPr lang="en-US" altLang="en-US" sz="2400" dirty="0">
-              <a:ea typeface="ＭＳ Ｐゴシック" panose="020B0600070205080204" pitchFamily="34" charset="-128"/>
-            </a:endParaRPr>
-          </a:p>
-          <a:p>
-            <a:pPr marL="914400" lvl="1" indent="-457200"/>
-            <a:r>
-              <a:rPr lang="en-US" altLang="en-US" sz="2400" dirty="0">
-                <a:ea typeface="ＭＳ Ｐゴシック" panose="020B0600070205080204" pitchFamily="34" charset="-128"/>
-              </a:rPr>
-              <a:t>We don’t use </a:t>
-            </a:r>
-            <a:r>
-              <a:rPr lang="en-US" altLang="en-US" sz="2400" dirty="0" err="1">
-                <a:ea typeface="ＭＳ Ｐゴシック" panose="020B0600070205080204" pitchFamily="34" charset="-128"/>
-              </a:rPr>
-              <a:t>createElement</a:t>
-            </a:r>
-            <a:r>
-              <a:rPr lang="en-US" altLang="en-US" sz="2400" dirty="0">
-                <a:ea typeface="ＭＳ Ｐゴシック" panose="020B0600070205080204" pitchFamily="34" charset="-128"/>
-              </a:rPr>
-              <a:t>() directly - too cumbersome. More later…</a:t>
-            </a:r>
-            <a:endParaRPr lang="en-US" altLang="en-US" sz="2000" b="0" dirty="0">
-              <a:ea typeface="ＭＳ Ｐゴシック" panose="020B0600070205080204" pitchFamily="34" charset="-128"/>
-            </a:endParaRPr>
-          </a:p>
-          <a:p>
-            <a:r>
-              <a:rPr lang="en-US" altLang="en-US" sz="2000" b="0" dirty="0" err="1">
-                <a:ea typeface="ＭＳ Ｐゴシック" panose="020B0600070205080204" pitchFamily="34" charset="-128"/>
-              </a:rPr>
-              <a:t>ReactDOM.createRoot</a:t>
-            </a:r>
-            <a:r>
-              <a:rPr lang="en-US" altLang="en-US" sz="2000" b="0" dirty="0">
-                <a:ea typeface="ＭＳ Ｐゴシック" panose="020B0600070205080204" pitchFamily="34" charset="-128"/>
-              </a:rPr>
-              <a:t> () has 1 </a:t>
-            </a:r>
-            <a:r>
-              <a:rPr lang="en-US" altLang="en-US" sz="2000" dirty="0">
-                <a:ea typeface="ＭＳ Ｐゴシック" panose="020B0600070205080204" pitchFamily="34" charset="-128"/>
-              </a:rPr>
-              <a:t>argument:</a:t>
-            </a:r>
-          </a:p>
-        </p:txBody>
-      </p:sp>
-      <p:sp>
-        <p:nvSpPr>
-          <p:cNvPr id="20483" name="Slide Number Placeholder 3">
-            <a:extLst>
-              <a:ext uri="{FF2B5EF4-FFF2-40B4-BE49-F238E27FC236}">
-                <a16:creationId xmlns:a16="http://schemas.microsoft.com/office/drawing/2014/main" id="{4353AC8F-4284-9A65-C178-213CF254B6EB}"/>
-              </a:ext>
-            </a:extLst>
-          </p:cNvPr>
-          <p:cNvSpPr>
-            <a:spLocks noGrp="1"/>
-          </p:cNvSpPr>
-          <p:nvPr>
-            <p:ph type="sldNum" sz="quarter" idx="12"/>
-          </p:nvPr>
-        </p:nvSpPr>
-        <p:spPr>
-          <a:noFill/>
-          <a:ln/>
-          <a:extLst>
-            <a:ext uri="{909E8E84-426E-40DD-AFC4-6F175D3DCCD1}">
-              <a14:hiddenFill xmlns:a14="http://schemas.microsoft.com/office/drawing/2010/main">
-                <a:solidFill>
-                  <a:srgbClr val="FFFFFF"/>
-                </a:solidFill>
-              </a14:hiddenFill>
-            </a:ext>
-            <a:ext uri="{91240B29-F687-4F45-9708-019B960494DF}">
-              <a14:hiddenLine xmlns:a14="http://schemas.microsoft.com/office/drawing/2010/main" w="9525">
-                <a:solidFill>
-                  <a:srgbClr val="000000"/>
-                </a:solidFill>
-                <a:miter lim="800000"/>
-                <a:headEnd/>
-                <a:tailEnd/>
-              </a14:hiddenLine>
-            </a:ext>
-          </a:extLst>
-        </p:spPr>
-        <p:txBody>
-          <a:bodyPr/>
-          <a:lstStyle>
-            <a:lvl1pPr>
-              <a:spcBef>
-                <a:spcPct val="20000"/>
-              </a:spcBef>
-              <a:buChar char="•"/>
-              <a:defRPr b="1">
-                <a:solidFill>
-                  <a:schemeClr val="tx1"/>
-                </a:solidFill>
-                <a:latin typeface="Arial" panose="020B0604020202020204" pitchFamily="34" charset="0"/>
-                <a:ea typeface="ＭＳ Ｐゴシック" panose="020B0600070205080204" pitchFamily="34" charset="-128"/>
-              </a:defRPr>
-            </a:lvl1pPr>
-            <a:lvl2pPr marL="742950" indent="-285750">
-              <a:spcBef>
-                <a:spcPct val="20000"/>
-              </a:spcBef>
-              <a:buChar char="–"/>
-              <a:defRPr b="1">
-                <a:solidFill>
-                  <a:schemeClr val="tx1"/>
-                </a:solidFill>
-                <a:latin typeface="Arial" panose="020B0604020202020204" pitchFamily="34" charset="0"/>
-                <a:ea typeface="ＭＳ Ｐゴシック" panose="020B0600070205080204" pitchFamily="34" charset="-128"/>
-              </a:defRPr>
-            </a:lvl2pPr>
-            <a:lvl3pPr marL="1143000" indent="-228600">
-              <a:spcBef>
-                <a:spcPct val="20000"/>
-              </a:spcBef>
-              <a:buChar char="•"/>
-              <a:defRPr b="1">
-                <a:solidFill>
-                  <a:schemeClr val="tx1"/>
-                </a:solidFill>
-                <a:latin typeface="Arial" panose="020B0604020202020204" pitchFamily="34" charset="0"/>
-                <a:ea typeface="ＭＳ Ｐゴシック" panose="020B0600070205080204" pitchFamily="34" charset="-128"/>
-              </a:defRPr>
-            </a:lvl3pPr>
-            <a:lvl4pPr marL="1600200" indent="-228600">
-              <a:spcBef>
-                <a:spcPct val="20000"/>
-              </a:spcBef>
-              <a:buChar char="–"/>
-              <a:defRPr b="1">
-                <a:solidFill>
-                  <a:schemeClr val="tx1"/>
-                </a:solidFill>
-                <a:latin typeface="Arial" panose="020B0604020202020204" pitchFamily="34" charset="0"/>
-                <a:ea typeface="ＭＳ Ｐゴシック" panose="020B0600070205080204" pitchFamily="34" charset="-128"/>
-              </a:defRPr>
-            </a:lvl4pPr>
-            <a:lvl5pPr marL="2057400" indent="-228600">
-              <a:spcBef>
-                <a:spcPct val="20000"/>
-              </a:spcBef>
-              <a:buChar char="»"/>
-              <a:defRPr b="1">
-                <a:solidFill>
-                  <a:schemeClr val="tx1"/>
-                </a:solidFill>
-                <a:latin typeface="Arial" panose="020B0604020202020204" pitchFamily="34" charset="0"/>
-                <a:ea typeface="ＭＳ Ｐゴシック" panose="020B0600070205080204" pitchFamily="34" charset="-128"/>
-              </a:defRPr>
-            </a:lvl5pPr>
-            <a:lvl6pPr marL="2514600" indent="-228600" eaLnBrk="0" fontAlgn="base" hangingPunct="0">
-              <a:spcBef>
-                <a:spcPct val="20000"/>
-              </a:spcBef>
-              <a:spcAft>
-                <a:spcPct val="0"/>
-              </a:spcAft>
-              <a:buChar char="»"/>
-              <a:defRPr b="1">
-                <a:solidFill>
-                  <a:schemeClr val="tx1"/>
-                </a:solidFill>
-                <a:latin typeface="Arial" panose="020B0604020202020204" pitchFamily="34" charset="0"/>
-                <a:ea typeface="ＭＳ Ｐゴシック" panose="020B0600070205080204" pitchFamily="34" charset="-128"/>
-              </a:defRPr>
-            </a:lvl6pPr>
-            <a:lvl7pPr marL="2971800" indent="-228600" eaLnBrk="0" fontAlgn="base" hangingPunct="0">
-              <a:spcBef>
-                <a:spcPct val="20000"/>
-              </a:spcBef>
-              <a:spcAft>
-                <a:spcPct val="0"/>
-              </a:spcAft>
-              <a:buChar char="»"/>
-              <a:defRPr b="1">
-                <a:solidFill>
-                  <a:schemeClr val="tx1"/>
-                </a:solidFill>
-                <a:latin typeface="Arial" panose="020B0604020202020204" pitchFamily="34" charset="0"/>
-                <a:ea typeface="ＭＳ Ｐゴシック" panose="020B0600070205080204" pitchFamily="34" charset="-128"/>
-              </a:defRPr>
-            </a:lvl7pPr>
-            <a:lvl8pPr marL="3429000" indent="-228600" eaLnBrk="0" fontAlgn="base" hangingPunct="0">
-              <a:spcBef>
-                <a:spcPct val="20000"/>
-              </a:spcBef>
-              <a:spcAft>
-                <a:spcPct val="0"/>
-              </a:spcAft>
-              <a:buChar char="»"/>
-              <a:defRPr b="1">
-                <a:solidFill>
-                  <a:schemeClr val="tx1"/>
-                </a:solidFill>
-                <a:latin typeface="Arial" panose="020B0604020202020204" pitchFamily="34" charset="0"/>
-                <a:ea typeface="ＭＳ Ｐゴシック" panose="020B0600070205080204" pitchFamily="34" charset="-128"/>
-              </a:defRPr>
-            </a:lvl8pPr>
-            <a:lvl9pPr marL="3886200" indent="-228600" eaLnBrk="0" fontAlgn="base" hangingPunct="0">
-              <a:spcBef>
-                <a:spcPct val="20000"/>
-              </a:spcBef>
-              <a:spcAft>
-                <a:spcPct val="0"/>
-              </a:spcAft>
-              <a:buChar char="»"/>
-              <a:defRPr b="1">
-                <a:solidFill>
-                  <a:schemeClr val="tx1"/>
-                </a:solidFill>
-                <a:latin typeface="Arial" panose="020B0604020202020204" pitchFamily="34" charset="0"/>
-                <a:ea typeface="ＭＳ Ｐゴシック" panose="020B0600070205080204" pitchFamily="34" charset="-128"/>
-              </a:defRPr>
-            </a:lvl9pPr>
-          </a:lstStyle>
-          <a:p>
-            <a:pPr>
-              <a:spcBef>
-                <a:spcPct val="0"/>
-              </a:spcBef>
-              <a:buFontTx/>
-              <a:buNone/>
-            </a:pPr>
-            <a:fld id="{3DD7C3FE-7D52-4A36-BD7A-9D4C77E680D3}" type="slidenum">
-              <a:rPr lang="en-US" altLang="en-US" b="0" smtClean="0"/>
-              <a:pPr>
-                <a:spcBef>
-                  <a:spcPct val="0"/>
-                </a:spcBef>
-                <a:buFontTx/>
-                <a:buNone/>
-              </a:pPr>
-              <a:t>11</a:t>
-            </a:fld>
-            <a:endParaRPr lang="en-US" altLang="en-US" b="0"/>
-          </a:p>
-        </p:txBody>
-      </p:sp>
-      <p:pic>
-        <p:nvPicPr>
-          <p:cNvPr id="3" name="Picture 2">
-            <a:extLst>
-              <a:ext uri="{FF2B5EF4-FFF2-40B4-BE49-F238E27FC236}">
-                <a16:creationId xmlns:a16="http://schemas.microsoft.com/office/drawing/2014/main" id="{C473DACA-71B9-2A21-701A-2A8310A533E7}"/>
-              </a:ext>
-            </a:extLst>
-          </p:cNvPr>
-          <p:cNvPicPr>
-            <a:picLocks noChangeAspect="1"/>
-          </p:cNvPicPr>
-          <p:nvPr/>
-        </p:nvPicPr>
-        <p:blipFill rotWithShape="1">
-          <a:blip r:embed="rId3"/>
-          <a:srcRect b="12836"/>
-          <a:stretch/>
-        </p:blipFill>
-        <p:spPr>
-          <a:xfrm>
-            <a:off x="761527" y="3312799"/>
-            <a:ext cx="9134345" cy="1591648"/>
-          </a:xfrm>
-          <a:prstGeom prst="rect">
-            <a:avLst/>
-          </a:prstGeom>
-        </p:spPr>
-      </p:pic>
-      <p:sp>
-        <p:nvSpPr>
-          <p:cNvPr id="4" name="Callout: Line 3">
-            <a:extLst>
-              <a:ext uri="{FF2B5EF4-FFF2-40B4-BE49-F238E27FC236}">
-                <a16:creationId xmlns:a16="http://schemas.microsoft.com/office/drawing/2014/main" id="{67394963-C090-4C1E-D11D-F53DE8695A92}"/>
-              </a:ext>
-            </a:extLst>
-          </p:cNvPr>
-          <p:cNvSpPr/>
-          <p:nvPr/>
-        </p:nvSpPr>
-        <p:spPr>
-          <a:xfrm>
-            <a:off x="1218727" y="2639686"/>
-            <a:ext cx="2895600" cy="451683"/>
-          </a:xfrm>
-          <a:prstGeom prst="borderCallout1">
-            <a:avLst>
-              <a:gd name="adj1" fmla="val 123815"/>
-              <a:gd name="adj2" fmla="val 46431"/>
-              <a:gd name="adj3" fmla="val 417446"/>
-              <a:gd name="adj4" fmla="val 122760"/>
-            </a:avLst>
-          </a:prstGeom>
-        </p:spPr>
-        <p:style>
-          <a:lnRef idx="1">
-            <a:schemeClr val="accent1"/>
-          </a:lnRef>
-          <a:fillRef idx="3">
-            <a:schemeClr val="accent1"/>
-          </a:fillRef>
-          <a:effectRef idx="2">
-            <a:schemeClr val="accent1"/>
-          </a:effectRef>
-          <a:fontRef idx="minor">
-            <a:schemeClr val="lt1"/>
-          </a:fontRef>
-        </p:style>
-        <p:txBody>
-          <a:bodyPr rtlCol="0" anchor="ctr"/>
-          <a:lstStyle/>
-          <a:p>
-            <a:pPr lvl="1"/>
-            <a:r>
-              <a:rPr lang="en-US" altLang="en-US" sz="1800" dirty="0">
-                <a:solidFill>
-                  <a:schemeClr val="tx1"/>
-                </a:solidFill>
-                <a:ea typeface="ＭＳ Ｐゴシック" panose="020B0600070205080204" pitchFamily="34" charset="-128"/>
-              </a:rPr>
-              <a:t>Type (e.g. h1, div, …)</a:t>
-            </a:r>
-          </a:p>
-        </p:txBody>
-      </p:sp>
-      <p:sp>
-        <p:nvSpPr>
-          <p:cNvPr id="6" name="Callout: Line 5">
-            <a:extLst>
-              <a:ext uri="{FF2B5EF4-FFF2-40B4-BE49-F238E27FC236}">
-                <a16:creationId xmlns:a16="http://schemas.microsoft.com/office/drawing/2014/main" id="{932076F7-9D5F-2CDA-42D4-DAAA8B96B1F2}"/>
-              </a:ext>
-            </a:extLst>
-          </p:cNvPr>
-          <p:cNvSpPr/>
-          <p:nvPr/>
-        </p:nvSpPr>
-        <p:spPr>
-          <a:xfrm>
-            <a:off x="4847390" y="2612715"/>
-            <a:ext cx="2895600" cy="590547"/>
-          </a:xfrm>
-          <a:prstGeom prst="borderCallout1">
-            <a:avLst>
-              <a:gd name="adj1" fmla="val 104990"/>
-              <a:gd name="adj2" fmla="val 45231"/>
-              <a:gd name="adj3" fmla="val 339859"/>
-              <a:gd name="adj4" fmla="val 42413"/>
-            </a:avLst>
-          </a:prstGeom>
-        </p:spPr>
-        <p:style>
-          <a:lnRef idx="1">
-            <a:schemeClr val="accent1"/>
-          </a:lnRef>
-          <a:fillRef idx="3">
-            <a:schemeClr val="accent1"/>
-          </a:fillRef>
-          <a:effectRef idx="2">
-            <a:schemeClr val="accent1"/>
-          </a:effectRef>
-          <a:fontRef idx="minor">
-            <a:schemeClr val="lt1"/>
-          </a:fontRef>
-        </p:style>
-        <p:txBody>
-          <a:bodyPr rtlCol="0" anchor="ctr"/>
-          <a:lstStyle/>
-          <a:p>
-            <a:pPr lvl="1"/>
-            <a:r>
-              <a:rPr lang="en-US" altLang="en-US" sz="1800" dirty="0">
-                <a:solidFill>
-                  <a:schemeClr val="tx1"/>
-                </a:solidFill>
-                <a:ea typeface="ＭＳ Ｐゴシック" panose="020B0600070205080204" pitchFamily="34" charset="-128"/>
-              </a:rPr>
-              <a:t>Properties (style, event handler…)</a:t>
-            </a:r>
-          </a:p>
-        </p:txBody>
-      </p:sp>
-      <p:sp>
-        <p:nvSpPr>
-          <p:cNvPr id="7" name="Callout: Line 6">
-            <a:extLst>
-              <a:ext uri="{FF2B5EF4-FFF2-40B4-BE49-F238E27FC236}">
-                <a16:creationId xmlns:a16="http://schemas.microsoft.com/office/drawing/2014/main" id="{7C726BD1-9D5A-381D-1950-58D59FD94C52}"/>
-              </a:ext>
-            </a:extLst>
-          </p:cNvPr>
-          <p:cNvSpPr/>
-          <p:nvPr/>
-        </p:nvSpPr>
-        <p:spPr>
-          <a:xfrm>
-            <a:off x="8608671" y="2585744"/>
-            <a:ext cx="3124200" cy="673113"/>
-          </a:xfrm>
-          <a:prstGeom prst="borderCallout1">
-            <a:avLst>
-              <a:gd name="adj1" fmla="val 108168"/>
-              <a:gd name="adj2" fmla="val 49833"/>
-              <a:gd name="adj3" fmla="val 296494"/>
-              <a:gd name="adj4" fmla="val -8694"/>
-            </a:avLst>
-          </a:prstGeom>
-        </p:spPr>
-        <p:style>
-          <a:lnRef idx="1">
-            <a:schemeClr val="accent1"/>
-          </a:lnRef>
-          <a:fillRef idx="3">
-            <a:schemeClr val="accent1"/>
-          </a:fillRef>
-          <a:effectRef idx="2">
-            <a:schemeClr val="accent1"/>
-          </a:effectRef>
-          <a:fontRef idx="minor">
-            <a:schemeClr val="lt1"/>
-          </a:fontRef>
-        </p:style>
-        <p:txBody>
-          <a:bodyPr rtlCol="0" anchor="ctr"/>
-          <a:lstStyle/>
-          <a:p>
-            <a:pPr lvl="1"/>
-            <a:r>
-              <a:rPr lang="en-US" altLang="en-US" sz="1800" dirty="0">
-                <a:solidFill>
-                  <a:schemeClr val="tx1"/>
-                </a:solidFill>
-                <a:ea typeface="ＭＳ Ｐゴシック" panose="020B0600070205080204" pitchFamily="34" charset="-128"/>
-              </a:rPr>
-              <a:t>Children(0 to many child elements)</a:t>
-            </a:r>
-          </a:p>
-        </p:txBody>
-      </p:sp>
-      <p:pic>
-        <p:nvPicPr>
-          <p:cNvPr id="9" name="Picture 8">
-            <a:extLst>
-              <a:ext uri="{FF2B5EF4-FFF2-40B4-BE49-F238E27FC236}">
-                <a16:creationId xmlns:a16="http://schemas.microsoft.com/office/drawing/2014/main" id="{9EBDC0DF-ABA8-4953-FFF4-D38F89E6ADB2}"/>
-              </a:ext>
-            </a:extLst>
-          </p:cNvPr>
-          <p:cNvPicPr>
-            <a:picLocks noChangeAspect="1"/>
-          </p:cNvPicPr>
-          <p:nvPr/>
-        </p:nvPicPr>
-        <p:blipFill>
-          <a:blip r:embed="rId4"/>
-          <a:stretch>
-            <a:fillRect/>
-          </a:stretch>
-        </p:blipFill>
-        <p:spPr>
-          <a:xfrm>
-            <a:off x="640466" y="6016958"/>
-            <a:ext cx="9027811" cy="783502"/>
-          </a:xfrm>
-          <a:prstGeom prst="rect">
-            <a:avLst/>
-          </a:prstGeom>
-        </p:spPr>
-      </p:pic>
-      <p:sp>
-        <p:nvSpPr>
-          <p:cNvPr id="10" name="Callout: Line 9">
-            <a:extLst>
-              <a:ext uri="{FF2B5EF4-FFF2-40B4-BE49-F238E27FC236}">
-                <a16:creationId xmlns:a16="http://schemas.microsoft.com/office/drawing/2014/main" id="{B1FB3F51-14C0-2C76-7D76-624E5CDE394F}"/>
-              </a:ext>
-            </a:extLst>
-          </p:cNvPr>
-          <p:cNvSpPr/>
-          <p:nvPr/>
-        </p:nvSpPr>
-        <p:spPr>
-          <a:xfrm>
-            <a:off x="6508516" y="5275048"/>
-            <a:ext cx="4235684" cy="673113"/>
-          </a:xfrm>
-          <a:prstGeom prst="borderCallout1">
-            <a:avLst>
-              <a:gd name="adj1" fmla="val 108168"/>
-              <a:gd name="adj2" fmla="val 49833"/>
-              <a:gd name="adj3" fmla="val 150082"/>
-              <a:gd name="adj4" fmla="val 22851"/>
-            </a:avLst>
-          </a:prstGeom>
-        </p:spPr>
-        <p:style>
-          <a:lnRef idx="1">
-            <a:schemeClr val="accent1"/>
-          </a:lnRef>
-          <a:fillRef idx="3">
-            <a:schemeClr val="accent1"/>
-          </a:fillRef>
-          <a:effectRef idx="2">
-            <a:schemeClr val="accent1"/>
-          </a:effectRef>
-          <a:fontRef idx="minor">
-            <a:schemeClr val="lt1"/>
-          </a:fontRef>
-        </p:style>
-        <p:txBody>
-          <a:bodyPr rtlCol="0" anchor="ctr"/>
-          <a:lstStyle/>
-          <a:p>
-            <a:pPr lvl="1"/>
-            <a:r>
-              <a:rPr lang="en-US" altLang="en-US" sz="1800" dirty="0">
-                <a:solidFill>
-                  <a:schemeClr val="tx1"/>
-                </a:solidFill>
-                <a:ea typeface="ＭＳ Ｐゴシック" panose="020B0600070205080204" pitchFamily="34" charset="-128"/>
-              </a:rPr>
-              <a:t>DOM element on which to render your React Root Element</a:t>
-            </a:r>
-          </a:p>
-        </p:txBody>
-      </p:sp>
-    </p:spTree>
-  </p:cSld>
-  <p:clrMapOvr>
-    <a:masterClrMapping/>
-  </p:clrMapOvr>
-  <p:timing>
-    <p:tnLst>
-      <p:par>
-        <p:cTn id="1" dur="indefinite" restart="never" nodeType="tmRoot">
-          <p:childTnLst>
-            <p:seq concurrent="1" nextAc="seek">
-              <p:cTn id="2" dur="indefinite" nodeType="mainSeq">
-                <p:childTnLst>
-                  <p:par>
-                    <p:cTn id="3" fill="hold" nodeType="clickPar">
-                      <p:stCondLst>
-                        <p:cond delay="indefinite"/>
-                      </p:stCondLst>
-                      <p:childTnLst>
-                        <p:par>
-                          <p:cTn id="4" fill="hold" nodeType="withGroup">
-                            <p:stCondLst>
-                              <p:cond delay="0"/>
-                            </p:stCondLst>
-                            <p:childTnLst>
-                              <p:par>
-                                <p:cTn id="5" presetID="1" presetClass="entr" presetSubtype="0" fill="hold" nodeType="clickEffect">
-                                  <p:stCondLst>
-                                    <p:cond delay="0"/>
-                                  </p:stCondLst>
-                                  <p:childTnLst>
-                                    <p:set>
-                                      <p:cBhvr>
-                                        <p:cTn id="6" dur="1" fill="hold">
-                                          <p:stCondLst>
-                                            <p:cond delay="0"/>
-                                          </p:stCondLst>
-                                        </p:cTn>
-                                        <p:tgtEl>
-                                          <p:spTgt spid="20482">
-                                            <p:txEl>
-                                              <p:pRg st="2" end="2"/>
-                                            </p:txEl>
-                                          </p:spTgt>
-                                        </p:tgtEl>
-                                        <p:attrNameLst>
-                                          <p:attrName>style.visibility</p:attrName>
-                                        </p:attrNameLst>
-                                      </p:cBhvr>
-                                      <p:to>
-                                        <p:strVal val="visible"/>
-                                      </p:to>
-                                    </p:set>
-                                  </p:childTnLst>
-                                </p:cTn>
-                              </p:par>
-                            </p:childTnLst>
-                          </p:cTn>
-                        </p:par>
-                      </p:childTnLst>
-                    </p:cTn>
-                  </p:par>
-                  <p:par>
-                    <p:cTn id="7" fill="hold" nodeType="clickPar">
-                      <p:stCondLst>
-                        <p:cond delay="indefinite"/>
-                      </p:stCondLst>
-                      <p:childTnLst>
-                        <p:par>
-                          <p:cTn id="8" fill="hold" nodeType="withGroup">
-                            <p:stCondLst>
-                              <p:cond delay="0"/>
-                            </p:stCondLst>
-                            <p:childTnLst>
-                              <p:par>
-                                <p:cTn id="9" presetID="1" presetClass="entr" presetSubtype="0" fill="hold" grpId="0" nodeType="clickEffect">
-                                  <p:stCondLst>
-                                    <p:cond delay="0"/>
-                                  </p:stCondLst>
-                                  <p:childTnLst>
-                                    <p:set>
-                                      <p:cBhvr>
-                                        <p:cTn id="10" dur="1" fill="hold">
-                                          <p:stCondLst>
-                                            <p:cond delay="0"/>
-                                          </p:stCondLst>
-                                        </p:cTn>
-                                        <p:tgtEl>
-                                          <p:spTgt spid="4"/>
-                                        </p:tgtEl>
-                                        <p:attrNameLst>
-                                          <p:attrName>style.visibility</p:attrName>
-                                        </p:attrNameLst>
-                                      </p:cBhvr>
-                                      <p:to>
-                                        <p:strVal val="visible"/>
-                                      </p:to>
-                                    </p:set>
-                                  </p:childTnLst>
-                                </p:cTn>
-                              </p:par>
-                              <p:par>
-                                <p:cTn id="11" presetID="1" presetClass="entr" presetSubtype="0" fill="hold" grpId="0" nodeType="withEffect">
-                                  <p:stCondLst>
-                                    <p:cond delay="0"/>
-                                  </p:stCondLst>
-                                  <p:childTnLst>
-                                    <p:set>
-                                      <p:cBhvr>
-                                        <p:cTn id="12" dur="1" fill="hold">
-                                          <p:stCondLst>
-                                            <p:cond delay="0"/>
-                                          </p:stCondLst>
-                                        </p:cTn>
-                                        <p:tgtEl>
-                                          <p:spTgt spid="6"/>
-                                        </p:tgtEl>
-                                        <p:attrNameLst>
-                                          <p:attrName>style.visibility</p:attrName>
-                                        </p:attrNameLst>
-                                      </p:cBhvr>
-                                      <p:to>
-                                        <p:strVal val="visible"/>
-                                      </p:to>
-                                    </p:set>
-                                  </p:childTnLst>
-                                </p:cTn>
-                              </p:par>
-                              <p:par>
-                                <p:cTn id="13" presetID="1" presetClass="entr" presetSubtype="0" fill="hold" grpId="0" nodeType="withEffect">
-                                  <p:stCondLst>
-                                    <p:cond delay="0"/>
-                                  </p:stCondLst>
-                                  <p:childTnLst>
-                                    <p:set>
-                                      <p:cBhvr>
-                                        <p:cTn id="14" dur="1" fill="hold">
-                                          <p:stCondLst>
-                                            <p:cond delay="0"/>
-                                          </p:stCondLst>
-                                        </p:cTn>
-                                        <p:tgtEl>
-                                          <p:spTgt spid="7"/>
-                                        </p:tgtEl>
-                                        <p:attrNameLst>
-                                          <p:attrName>style.visibility</p:attrName>
-                                        </p:attrNameLst>
-                                      </p:cBhvr>
-                                      <p:to>
-                                        <p:strVal val="visible"/>
-                                      </p:to>
-                                    </p:set>
-                                  </p:childTnLst>
-                                </p:cTn>
-                              </p:par>
-                              <p:par>
-                                <p:cTn id="15" presetID="1" presetClass="entr" presetSubtype="0" fill="hold" nodeType="withEffect">
-                                  <p:stCondLst>
-                                    <p:cond delay="0"/>
-                                  </p:stCondLst>
-                                  <p:childTnLst>
-                                    <p:set>
-                                      <p:cBhvr>
-                                        <p:cTn id="16" dur="1" fill="hold">
-                                          <p:stCondLst>
-                                            <p:cond delay="0"/>
-                                          </p:stCondLst>
-                                        </p:cTn>
-                                        <p:tgtEl>
-                                          <p:spTgt spid="3"/>
-                                        </p:tgtEl>
-                                        <p:attrNameLst>
-                                          <p:attrName>style.visibility</p:attrName>
-                                        </p:attrNameLst>
-                                      </p:cBhvr>
-                                      <p:to>
-                                        <p:strVal val="visible"/>
-                                      </p:to>
-                                    </p:set>
-                                  </p:childTnLst>
-                                </p:cTn>
-                              </p:par>
-                            </p:childTnLst>
-                          </p:cTn>
-                        </p:par>
-                      </p:childTnLst>
-                    </p:cTn>
-                  </p:par>
-                  <p:par>
-                    <p:cTn id="17" fill="hold">
-                      <p:stCondLst>
-                        <p:cond delay="indefinite"/>
-                      </p:stCondLst>
-                      <p:childTnLst>
-                        <p:par>
-                          <p:cTn id="18" fill="hold">
-                            <p:stCondLst>
-                              <p:cond delay="0"/>
-                            </p:stCondLst>
-                            <p:childTnLst>
-                              <p:par>
-                                <p:cTn id="19" presetID="1" presetClass="entr" presetSubtype="0" fill="hold" nodeType="clickEffect">
-                                  <p:stCondLst>
-                                    <p:cond delay="0"/>
-                                  </p:stCondLst>
-                                  <p:childTnLst>
-                                    <p:set>
-                                      <p:cBhvr>
-                                        <p:cTn id="20" dur="1" fill="hold">
-                                          <p:stCondLst>
-                                            <p:cond delay="0"/>
-                                          </p:stCondLst>
-                                        </p:cTn>
-                                        <p:tgtEl>
-                                          <p:spTgt spid="20482">
-                                            <p:txEl>
-                                              <p:pRg st="8" end="8"/>
-                                            </p:txEl>
-                                          </p:spTgt>
-                                        </p:tgtEl>
-                                        <p:attrNameLst>
-                                          <p:attrName>style.visibility</p:attrName>
-                                        </p:attrNameLst>
-                                      </p:cBhvr>
-                                      <p:to>
-                                        <p:strVal val="visible"/>
-                                      </p:to>
-                                    </p:set>
-                                  </p:childTnLst>
-                                </p:cTn>
-                              </p:par>
-                            </p:childTnLst>
-                          </p:cTn>
-                        </p:par>
-                      </p:childTnLst>
-                    </p:cTn>
-                  </p:par>
-                  <p:par>
-                    <p:cTn id="21" fill="hold" nodeType="clickPar">
-                      <p:stCondLst>
-                        <p:cond delay="indefinite"/>
-                      </p:stCondLst>
-                      <p:childTnLst>
-                        <p:par>
-                          <p:cTn id="22" fill="hold" nodeType="withGroup">
-                            <p:stCondLst>
-                              <p:cond delay="0"/>
-                            </p:stCondLst>
-                            <p:childTnLst>
-                              <p:par>
-                                <p:cTn id="23" presetID="1" presetClass="entr" presetSubtype="0" fill="hold" nodeType="clickEffect">
-                                  <p:stCondLst>
-                                    <p:cond delay="0"/>
-                                  </p:stCondLst>
-                                  <p:childTnLst>
-                                    <p:set>
-                                      <p:cBhvr>
-                                        <p:cTn id="24" dur="1" fill="hold">
-                                          <p:stCondLst>
-                                            <p:cond delay="0"/>
-                                          </p:stCondLst>
-                                        </p:cTn>
-                                        <p:tgtEl>
-                                          <p:spTgt spid="20482">
-                                            <p:txEl>
-                                              <p:pRg st="9" end="9"/>
-                                            </p:txEl>
-                                          </p:spTgt>
-                                        </p:tgtEl>
-                                        <p:attrNameLst>
-                                          <p:attrName>style.visibility</p:attrName>
-                                        </p:attrNameLst>
-                                      </p:cBhvr>
-                                      <p:to>
-                                        <p:strVal val="visible"/>
-                                      </p:to>
-                                    </p:set>
-                                  </p:childTnLst>
-                                </p:cTn>
-                              </p:par>
-                            </p:childTnLst>
-                          </p:cTn>
-                        </p:par>
-                      </p:childTnLst>
-                    </p:cTn>
-                  </p:par>
-                  <p:par>
-                    <p:cTn id="25" fill="hold">
-                      <p:stCondLst>
-                        <p:cond delay="indefinite"/>
-                      </p:stCondLst>
-                      <p:childTnLst>
-                        <p:par>
-                          <p:cTn id="26" fill="hold">
-                            <p:stCondLst>
-                              <p:cond delay="0"/>
-                            </p:stCondLst>
-                            <p:childTnLst>
-                              <p:par>
-                                <p:cTn id="27" presetID="1" presetClass="entr" presetSubtype="0" fill="hold" grpId="0" nodeType="clickEffect">
-                                  <p:stCondLst>
-                                    <p:cond delay="0"/>
-                                  </p:stCondLst>
-                                  <p:childTnLst>
-                                    <p:set>
-                                      <p:cBhvr>
-                                        <p:cTn id="28" dur="1" fill="hold">
-                                          <p:stCondLst>
-                                            <p:cond delay="0"/>
-                                          </p:stCondLst>
-                                        </p:cTn>
-                                        <p:tgtEl>
-                                          <p:spTgt spid="10"/>
-                                        </p:tgtEl>
-                                        <p:attrNameLst>
-                                          <p:attrName>style.visibility</p:attrName>
-                                        </p:attrNameLst>
-                                      </p:cBhvr>
-                                      <p:to>
-                                        <p:strVal val="visible"/>
-                                      </p:to>
-                                    </p:set>
-                                  </p:childTnLst>
-                                </p:cTn>
-                              </p:par>
-                              <p:par>
-                                <p:cTn id="29" presetID="1" presetClass="entr" presetSubtype="0" fill="hold" nodeType="withEffect">
-                                  <p:stCondLst>
-                                    <p:cond delay="0"/>
-                                  </p:stCondLst>
-                                  <p:childTnLst>
-                                    <p:set>
-                                      <p:cBhvr>
-                                        <p:cTn id="30" dur="1" fill="hold">
-                                          <p:stCondLst>
-                                            <p:cond delay="0"/>
-                                          </p:stCondLst>
-                                        </p:cTn>
-                                        <p:tgtEl>
-                                          <p:spTgt spid="9"/>
-                                        </p:tgtEl>
-                                        <p:attrNameLst>
-                                          <p:attrName>style.visibility</p:attrName>
-                                        </p:attrNameLst>
-                                      </p:cBhvr>
-                                      <p:to>
-                                        <p:strVal val="visible"/>
-                                      </p:to>
-                                    </p:set>
-                                  </p:childTnLst>
-                                </p:cTn>
-                              </p:par>
-                            </p:childTnLst>
-                          </p:cTn>
-                        </p:par>
-                      </p:childTnLst>
-                    </p:cTn>
-                  </p:par>
-                </p:childTnLst>
-              </p:cTn>
-              <p:prevCondLst>
-                <p:cond evt="onPrev" delay="0">
-                  <p:tgtEl>
-                    <p:sldTgt/>
-                  </p:tgtEl>
-                </p:cond>
-              </p:prevCondLst>
-              <p:nextCondLst>
-                <p:cond evt="onNext" delay="0">
-                  <p:tgtEl>
-                    <p:sldTgt/>
-                  </p:tgtEl>
-                </p:cond>
-              </p:nextCondLst>
-            </p:seq>
-          </p:childTnLst>
-        </p:cTn>
-      </p:par>
-    </p:tnLst>
-    <p:bldLst>
-      <p:bldP spid="4" grpId="0" animBg="1"/>
-      <p:bldP spid="6" grpId="0" animBg="1"/>
-      <p:bldP spid="7" grpId="0" animBg="1"/>
-      <p:bldP spid="10" grpId="0" animBg="1"/>
-    </p:bldLst>
-  </p:timing>
-</p:sld>
-</file>
-
-<file path=ppt/slides/slide12.xml><?xml version="1.0" encoding="utf-8"?>
-<p:sld xmlns:a="http://schemas.openxmlformats.org/drawingml/2006/main" xmlns:r="http://schemas.openxmlformats.org/officeDocument/2006/relationships" xmlns:p="http://schemas.openxmlformats.org/presentationml/2006/main">
-  <p:cSld>
-    <p:spTree>
-      <p:nvGrpSpPr>
-        <p:cNvPr id="1" name=""/>
-        <p:cNvGrpSpPr/>
-        <p:nvPr/>
-      </p:nvGrpSpPr>
-      <p:grpSpPr>
-        <a:xfrm>
-          <a:off x="0" y="0"/>
-          <a:ext cx="0" cy="0"/>
-          <a:chOff x="0" y="0"/>
-          <a:chExt cx="0" cy="0"/>
-        </a:xfrm>
-      </p:grpSpPr>
-      <p:sp>
-        <p:nvSpPr>
           <p:cNvPr id="22529" name="Title 1">
             <a:extLst>
               <a:ext uri="{FF2B5EF4-FFF2-40B4-BE49-F238E27FC236}">
@@ -15246,7 +13660,7 @@
                 <a:buFontTx/>
                 <a:buNone/>
               </a:pPr>
-              <a:t>12</a:t>
+              <a:t>10</a:t>
             </a:fld>
             <a:endParaRPr lang="en-US" altLang="en-US" b="0"/>
           </a:p>
@@ -15260,7 +13674,7 @@
 </p:sld>
 </file>
 
-<file path=ppt/slides/slide13.xml><?xml version="1.0" encoding="utf-8"?>
+<file path=ppt/slides/slide11.xml><?xml version="1.0" encoding="utf-8"?>
 <p:sld xmlns:a="http://schemas.openxmlformats.org/drawingml/2006/main" xmlns:r="http://schemas.openxmlformats.org/officeDocument/2006/relationships" xmlns:p="http://schemas.openxmlformats.org/presentationml/2006/main">
   <p:cSld>
     <p:spTree>
@@ -15650,7 +14064,7 @@
                 <a:buFontTx/>
                 <a:buNone/>
               </a:pPr>
-              <a:t>13</a:t>
+              <a:t>11</a:t>
             </a:fld>
             <a:endParaRPr lang="en-US" altLang="en-US" b="0"/>
           </a:p>
@@ -15694,7 +14108,7 @@
 </p:sld>
 </file>
 
-<file path=ppt/slides/slide14.xml><?xml version="1.0" encoding="utf-8"?>
+<file path=ppt/slides/slide12.xml><?xml version="1.0" encoding="utf-8"?>
 <p:sld xmlns:a="http://schemas.openxmlformats.org/drawingml/2006/main" xmlns:r="http://schemas.openxmlformats.org/officeDocument/2006/relationships" xmlns:p="http://schemas.openxmlformats.org/presentationml/2006/main">
   <p:cSld>
     <p:spTree>
@@ -16104,7 +14518,7 @@
                 <a:buFontTx/>
                 <a:buNone/>
               </a:pPr>
-              <a:t>14</a:t>
+              <a:t>12</a:t>
             </a:fld>
             <a:endParaRPr lang="en-US" altLang="en-US" b="0"/>
           </a:p>
@@ -16188,7 +14602,7 @@
 </p:sld>
 </file>
 
-<file path=ppt/slides/slide15.xml><?xml version="1.0" encoding="utf-8"?>
+<file path=ppt/slides/slide13.xml><?xml version="1.0" encoding="utf-8"?>
 <p:sld xmlns:a="http://schemas.openxmlformats.org/drawingml/2006/main" xmlns:r="http://schemas.openxmlformats.org/officeDocument/2006/relationships" xmlns:p="http://schemas.openxmlformats.org/presentationml/2006/main">
   <p:cSld>
     <p:bg>
@@ -16968,7 +15382,7 @@
                 </a:spcAft>
                 <a:buNone/>
               </a:pPr>
-              <a:t>15</a:t>
+              <a:t>13</a:t>
             </a:fld>
             <a:endParaRPr lang="en-US" altLang="en-US" sz="1000" b="0">
               <a:solidFill>
@@ -17096,7 +15510,7 @@
 </p:sld>
 </file>
 
-<file path=ppt/slides/slide16.xml><?xml version="1.0" encoding="utf-8"?>
+<file path=ppt/slides/slide14.xml><?xml version="1.0" encoding="utf-8"?>
 <p:sld xmlns:a="http://schemas.openxmlformats.org/drawingml/2006/main" xmlns:r="http://schemas.openxmlformats.org/officeDocument/2006/relationships" xmlns:p="http://schemas.openxmlformats.org/presentationml/2006/main">
   <p:cSld>
     <p:bg>
@@ -17796,7 +16210,7 @@
                 </a:spcAft>
                 <a:buNone/>
               </a:pPr>
-              <a:t>16</a:t>
+              <a:t>14</a:t>
             </a:fld>
             <a:endParaRPr lang="en-US" altLang="en-US" sz="920" b="0">
               <a:solidFill>
@@ -18169,7 +16583,7 @@
 </p:sld>
 </file>
 
-<file path=ppt/slides/slide17.xml><?xml version="1.0" encoding="utf-8"?>
+<file path=ppt/slides/slide15.xml><?xml version="1.0" encoding="utf-8"?>
 <p:sld xmlns:a="http://schemas.openxmlformats.org/drawingml/2006/main" xmlns:r="http://schemas.openxmlformats.org/officeDocument/2006/relationships" xmlns:p="http://schemas.openxmlformats.org/presentationml/2006/main">
   <p:cSld>
     <p:spTree>
@@ -18648,7 +17062,7 @@
                 <a:buFontTx/>
                 <a:buNone/>
               </a:pPr>
-              <a:t>17</a:t>
+              <a:t>15</a:t>
             </a:fld>
             <a:endParaRPr lang="en-US" altLang="en-US" b="0"/>
           </a:p>
@@ -18915,624 +17329,6 @@
 </file>
 
 <file path=ppt/slides/slide2.xml><?xml version="1.0" encoding="utf-8"?>
-<p:sld xmlns:a="http://schemas.openxmlformats.org/drawingml/2006/main" xmlns:r="http://schemas.openxmlformats.org/officeDocument/2006/relationships" xmlns:p="http://schemas.openxmlformats.org/presentationml/2006/main">
-  <p:cSld>
-    <p:bg>
-      <p:bgPr>
-        <a:solidFill>
-          <a:schemeClr val="bg1"/>
-        </a:solidFill>
-        <a:effectLst/>
-      </p:bgPr>
-    </p:bg>
-    <p:spTree>
-      <p:nvGrpSpPr>
-        <p:cNvPr id="1" name=""/>
-        <p:cNvGrpSpPr/>
-        <p:nvPr/>
-      </p:nvGrpSpPr>
-      <p:grpSpPr>
-        <a:xfrm>
-          <a:off x="0" y="0"/>
-          <a:ext cx="0" cy="0"/>
-          <a:chOff x="0" y="0"/>
-          <a:chExt cx="0" cy="0"/>
-        </a:xfrm>
-      </p:grpSpPr>
-      <p:sp>
-        <p:nvSpPr>
-          <p:cNvPr id="9" name="Rectangle 8">
-            <a:extLst>
-              <a:ext uri="{FF2B5EF4-FFF2-40B4-BE49-F238E27FC236}">
-                <a16:creationId xmlns:a16="http://schemas.microsoft.com/office/drawing/2014/main" id="{70DFC902-7D23-471A-B557-B6B6917D7A0D}"/>
-              </a:ext>
-              <a:ext uri="{C183D7F6-B498-43B3-948B-1728B52AA6E4}">
-                <adec:decorative xmlns:adec="http://schemas.microsoft.com/office/drawing/2017/decorative" val="1"/>
-              </a:ext>
-            </a:extLst>
-          </p:cNvPr>
-          <p:cNvSpPr>
-            <a:spLocks noGrp="1" noRot="1" noChangeAspect="1" noMove="1" noResize="1" noEditPoints="1" noAdjustHandles="1" noChangeArrowheads="1" noChangeShapeType="1" noTextEdit="1"/>
-          </p:cNvSpPr>
-          <p:nvPr>
-            <p:extLst>
-              <p:ext uri="{386F3935-93C4-4BCD-93E2-E3B085C9AB24}">
-                <p16:designElem xmlns:p16="http://schemas.microsoft.com/office/powerpoint/2015/main" val="1"/>
-              </p:ext>
-            </p:extLst>
-          </p:nvPr>
-        </p:nvSpPr>
-        <p:spPr>
-          <a:xfrm>
-            <a:off x="10" y="-5705"/>
-            <a:ext cx="12191990" cy="1694346"/>
-          </a:xfrm>
-          <a:prstGeom prst="rect">
-            <a:avLst/>
-          </a:prstGeom>
-          <a:solidFill>
-            <a:schemeClr val="tx1">
-              <a:lumMod val="85000"/>
-              <a:lumOff val="15000"/>
-            </a:schemeClr>
-          </a:solidFill>
-          <a:ln>
-            <a:noFill/>
-          </a:ln>
-        </p:spPr>
-        <p:style>
-          <a:lnRef idx="2">
-            <a:schemeClr val="accent1">
-              <a:shade val="50000"/>
-            </a:schemeClr>
-          </a:lnRef>
-          <a:fillRef idx="1">
-            <a:schemeClr val="accent1"/>
-          </a:fillRef>
-          <a:effectRef idx="0">
-            <a:schemeClr val="accent1"/>
-          </a:effectRef>
-          <a:fontRef idx="minor">
-            <a:schemeClr val="lt1"/>
-          </a:fontRef>
-        </p:style>
-        <p:txBody>
-          <a:bodyPr rtlCol="0" anchor="ctr"/>
-          <a:lstStyle/>
-          <a:p>
-            <a:pPr algn="ctr"/>
-            <a:endParaRPr lang="en-US"/>
-          </a:p>
-        </p:txBody>
-      </p:sp>
-      <p:sp>
-        <p:nvSpPr>
-          <p:cNvPr id="2" name="Title 1">
-            <a:extLst>
-              <a:ext uri="{FF2B5EF4-FFF2-40B4-BE49-F238E27FC236}">
-                <a16:creationId xmlns:a16="http://schemas.microsoft.com/office/drawing/2014/main" id="{9DD1DE96-CF78-D4D9-B716-F34228250301}"/>
-              </a:ext>
-            </a:extLst>
-          </p:cNvPr>
-          <p:cNvSpPr>
-            <a:spLocks noGrp="1"/>
-          </p:cNvSpPr>
-          <p:nvPr>
-            <p:ph type="title"/>
-          </p:nvPr>
-        </p:nvSpPr>
-        <p:spPr>
-          <a:xfrm>
-            <a:off x="1156851" y="637762"/>
-            <a:ext cx="9888496" cy="900131"/>
-          </a:xfrm>
-        </p:spPr>
-        <p:txBody>
-          <a:bodyPr anchor="t">
-            <a:normAutofit/>
-          </a:bodyPr>
-          <a:lstStyle/>
-          <a:p>
-            <a:pPr algn="l"/>
-            <a:r>
-              <a:rPr lang="en-GB" sz="4000">
-                <a:solidFill>
-                  <a:schemeClr val="bg1"/>
-                </a:solidFill>
-              </a:rPr>
-              <a:t>Tentative Plan</a:t>
-            </a:r>
-            <a:endParaRPr lang="en-IE" sz="4000">
-              <a:solidFill>
-                <a:schemeClr val="bg1"/>
-              </a:solidFill>
-            </a:endParaRPr>
-          </a:p>
-        </p:txBody>
-      </p:sp>
-      <p:sp>
-        <p:nvSpPr>
-          <p:cNvPr id="11" name="Rectangle 10">
-            <a:extLst>
-              <a:ext uri="{FF2B5EF4-FFF2-40B4-BE49-F238E27FC236}">
-                <a16:creationId xmlns:a16="http://schemas.microsoft.com/office/drawing/2014/main" id="{A55D5633-D557-4DCA-982C-FF36EB7A1C00}"/>
-              </a:ext>
-              <a:ext uri="{C183D7F6-B498-43B3-948B-1728B52AA6E4}">
-                <adec:decorative xmlns:adec="http://schemas.microsoft.com/office/drawing/2017/decorative" val="1"/>
-              </a:ext>
-            </a:extLst>
-          </p:cNvPr>
-          <p:cNvSpPr>
-            <a:spLocks noGrp="1" noRot="1" noChangeAspect="1" noMove="1" noResize="1" noEditPoints="1" noAdjustHandles="1" noChangeArrowheads="1" noChangeShapeType="1" noTextEdit="1"/>
-          </p:cNvSpPr>
-          <p:nvPr>
-            <p:extLst>
-              <p:ext uri="{386F3935-93C4-4BCD-93E2-E3B085C9AB24}">
-                <p16:designElem xmlns:p16="http://schemas.microsoft.com/office/powerpoint/2015/main" val="1"/>
-              </p:ext>
-            </p:extLst>
-          </p:nvPr>
-        </p:nvSpPr>
-        <p:spPr>
-          <a:xfrm>
-            <a:off x="0" y="1688641"/>
-            <a:ext cx="12191990" cy="5169359"/>
-          </a:xfrm>
-          <a:prstGeom prst="rect">
-            <a:avLst/>
-          </a:prstGeom>
-          <a:solidFill>
-            <a:schemeClr val="bg1">
-              <a:lumMod val="95000"/>
-            </a:schemeClr>
-          </a:solidFill>
-          <a:ln>
-            <a:noFill/>
-          </a:ln>
-        </p:spPr>
-        <p:style>
-          <a:lnRef idx="2">
-            <a:schemeClr val="accent1">
-              <a:shade val="50000"/>
-            </a:schemeClr>
-          </a:lnRef>
-          <a:fillRef idx="1">
-            <a:schemeClr val="accent1"/>
-          </a:fillRef>
-          <a:effectRef idx="0">
-            <a:schemeClr val="accent1"/>
-          </a:effectRef>
-          <a:fontRef idx="minor">
-            <a:schemeClr val="lt1"/>
-          </a:fontRef>
-        </p:style>
-        <p:txBody>
-          <a:bodyPr rtlCol="0" anchor="ctr"/>
-          <a:lstStyle/>
-          <a:p>
-            <a:pPr algn="ctr"/>
-            <a:endParaRPr lang="en-US"/>
-          </a:p>
-        </p:txBody>
-      </p:sp>
-      <p:sp>
-        <p:nvSpPr>
-          <p:cNvPr id="13" name="Rectangle 12">
-            <a:extLst>
-              <a:ext uri="{FF2B5EF4-FFF2-40B4-BE49-F238E27FC236}">
-                <a16:creationId xmlns:a16="http://schemas.microsoft.com/office/drawing/2014/main" id="{450D3AD2-FA80-415F-A9CE-54D884561CD7}"/>
-              </a:ext>
-              <a:ext uri="{C183D7F6-B498-43B3-948B-1728B52AA6E4}">
-                <adec:decorative xmlns:adec="http://schemas.microsoft.com/office/drawing/2017/decorative" val="1"/>
-              </a:ext>
-            </a:extLst>
-          </p:cNvPr>
-          <p:cNvSpPr>
-            <a:spLocks noGrp="1" noRot="1" noChangeAspect="1" noMove="1" noResize="1" noEditPoints="1" noAdjustHandles="1" noChangeArrowheads="1" noChangeShapeType="1" noTextEdit="1"/>
-          </p:cNvSpPr>
-          <p:nvPr>
-            <p:extLst>
-              <p:ext uri="{386F3935-93C4-4BCD-93E2-E3B085C9AB24}">
-                <p16:designElem xmlns:p16="http://schemas.microsoft.com/office/powerpoint/2015/main" val="1"/>
-              </p:ext>
-            </p:extLst>
-          </p:nvPr>
-        </p:nvSpPr>
-        <p:spPr>
-          <a:xfrm>
-            <a:off x="1156851" y="2010758"/>
-            <a:ext cx="457190" cy="45719"/>
-          </a:xfrm>
-          <a:prstGeom prst="rect">
-            <a:avLst/>
-          </a:prstGeom>
-          <a:solidFill>
-            <a:schemeClr val="tx1"/>
-          </a:solidFill>
-          <a:ln>
-            <a:noFill/>
-          </a:ln>
-        </p:spPr>
-        <p:style>
-          <a:lnRef idx="2">
-            <a:schemeClr val="accent1">
-              <a:shade val="50000"/>
-            </a:schemeClr>
-          </a:lnRef>
-          <a:fillRef idx="1">
-            <a:schemeClr val="accent1"/>
-          </a:fillRef>
-          <a:effectRef idx="0">
-            <a:schemeClr val="accent1"/>
-          </a:effectRef>
-          <a:fontRef idx="minor">
-            <a:schemeClr val="lt1"/>
-          </a:fontRef>
-        </p:style>
-        <p:txBody>
-          <a:bodyPr rtlCol="0" anchor="ctr"/>
-          <a:lstStyle/>
-          <a:p>
-            <a:pPr algn="ctr"/>
-            <a:endParaRPr lang="en-US"/>
-          </a:p>
-        </p:txBody>
-      </p:sp>
-      <p:sp>
-        <p:nvSpPr>
-          <p:cNvPr id="4" name="Slide Number Placeholder 3">
-            <a:extLst>
-              <a:ext uri="{FF2B5EF4-FFF2-40B4-BE49-F238E27FC236}">
-                <a16:creationId xmlns:a16="http://schemas.microsoft.com/office/drawing/2014/main" id="{81D816A7-F0BB-8DEB-2E1E-2BE876EA2E23}"/>
-              </a:ext>
-            </a:extLst>
-          </p:cNvPr>
-          <p:cNvSpPr>
-            <a:spLocks noGrp="1"/>
-          </p:cNvSpPr>
-          <p:nvPr>
-            <p:ph type="sldNum" sz="quarter" idx="12"/>
-          </p:nvPr>
-        </p:nvSpPr>
-        <p:spPr>
-          <a:xfrm>
-            <a:off x="160867" y="3246439"/>
-            <a:ext cx="672957" cy="343768"/>
-          </a:xfrm>
-        </p:spPr>
-        <p:txBody>
-          <a:bodyPr anchor="ctr">
-            <a:normAutofit/>
-          </a:bodyPr>
-          <a:lstStyle/>
-          <a:p>
-            <a:pPr algn="ctr">
-              <a:spcAft>
-                <a:spcPts val="600"/>
-              </a:spcAft>
-              <a:defRPr/>
-            </a:pPr>
-            <a:fld id="{FF20FD76-2600-470C-B220-FCD85C8E166D}" type="slidenum">
-              <a:rPr lang="en-US" altLang="en-US" smtClean="0"/>
-              <a:pPr algn="ctr">
-                <a:spcAft>
-                  <a:spcPts val="600"/>
-                </a:spcAft>
-                <a:defRPr/>
-              </a:pPr>
-              <a:t>2</a:t>
-            </a:fld>
-            <a:endParaRPr lang="en-US" altLang="en-US"/>
-          </a:p>
-        </p:txBody>
-      </p:sp>
-      <p:sp>
-        <p:nvSpPr>
-          <p:cNvPr id="3" name="Content Placeholder 2">
-            <a:extLst>
-              <a:ext uri="{FF2B5EF4-FFF2-40B4-BE49-F238E27FC236}">
-                <a16:creationId xmlns:a16="http://schemas.microsoft.com/office/drawing/2014/main" id="{38CE3104-437E-49A4-6C07-A4408103BC91}"/>
-              </a:ext>
-            </a:extLst>
-          </p:cNvPr>
-          <p:cNvSpPr>
-            <a:spLocks noGrp="1"/>
-          </p:cNvSpPr>
-          <p:nvPr>
-            <p:ph idx="1"/>
-          </p:nvPr>
-        </p:nvSpPr>
-        <p:spPr>
-          <a:xfrm>
-            <a:off x="1155548" y="2217343"/>
-            <a:ext cx="9880893" cy="3959619"/>
-          </a:xfrm>
-        </p:spPr>
-        <p:txBody>
-          <a:bodyPr>
-            <a:normAutofit lnSpcReduction="10000"/>
-          </a:bodyPr>
-          <a:lstStyle/>
-          <a:p>
-            <a:pPr>
-              <a:lnSpc>
-                <a:spcPct val="90000"/>
-              </a:lnSpc>
-            </a:pPr>
-            <a:r>
-              <a:rPr lang="en-GB" sz="2000" dirty="0"/>
-              <a:t>React/Vite/Typescript/Material UI/Programming Patterns</a:t>
-            </a:r>
-          </a:p>
-          <a:p>
-            <a:pPr>
-              <a:lnSpc>
-                <a:spcPct val="90000"/>
-              </a:lnSpc>
-            </a:pPr>
-            <a:r>
-              <a:rPr lang="en-IE" sz="2000" dirty="0"/>
-              <a:t>Growing use of AI assistants in Software Dev </a:t>
-            </a:r>
-          </a:p>
-          <a:p>
-            <a:pPr>
-              <a:lnSpc>
-                <a:spcPct val="90000"/>
-              </a:lnSpc>
-            </a:pPr>
-            <a:r>
-              <a:rPr lang="en-IE" sz="2000" dirty="0"/>
-              <a:t>“Effective AI </a:t>
-            </a:r>
-            <a:r>
-              <a:rPr lang="en-IE" sz="2000" dirty="0" err="1"/>
-              <a:t>Useage</a:t>
-            </a:r>
-            <a:r>
-              <a:rPr lang="en-IE" sz="2000" dirty="0"/>
-              <a:t> in Software Development”</a:t>
-            </a:r>
-          </a:p>
-          <a:p>
-            <a:pPr lvl="1">
-              <a:lnSpc>
-                <a:spcPct val="90000"/>
-              </a:lnSpc>
-            </a:pPr>
-            <a:r>
-              <a:rPr lang="en-IE" sz="2000" dirty="0"/>
-              <a:t>Need to know Technologies, tools, patterns, styles that work for you</a:t>
-            </a:r>
-          </a:p>
-          <a:p>
-            <a:pPr lvl="1">
-              <a:lnSpc>
-                <a:spcPct val="90000"/>
-              </a:lnSpc>
-            </a:pPr>
-            <a:r>
-              <a:rPr lang="en-IE" sz="2000" dirty="0"/>
-              <a:t>Need AI assistant to match that</a:t>
-            </a:r>
-          </a:p>
-          <a:p>
-            <a:pPr>
-              <a:lnSpc>
-                <a:spcPct val="90000"/>
-              </a:lnSpc>
-            </a:pPr>
-            <a:r>
-              <a:rPr lang="en-IE" sz="2000" dirty="0"/>
-              <a:t>Skills-based AI assistance</a:t>
-            </a:r>
-          </a:p>
-          <a:p>
-            <a:pPr lvl="1">
-              <a:lnSpc>
-                <a:spcPct val="90000"/>
-              </a:lnSpc>
-            </a:pPr>
-            <a:r>
-              <a:rPr lang="en-IE" sz="2000" dirty="0"/>
-              <a:t>Build knowledge/skills though initial labs/lectures</a:t>
-            </a:r>
-          </a:p>
-          <a:p>
-            <a:pPr lvl="1">
-              <a:lnSpc>
-                <a:spcPct val="90000"/>
-              </a:lnSpc>
-            </a:pPr>
-            <a:r>
-              <a:rPr lang="en-IE" sz="2000" dirty="0"/>
-              <a:t>Start to construct a personal “Skills Repo” that AI can reference</a:t>
-            </a:r>
-          </a:p>
-          <a:p>
-            <a:pPr lvl="1">
-              <a:lnSpc>
-                <a:spcPct val="90000"/>
-              </a:lnSpc>
-            </a:pPr>
-            <a:r>
-              <a:rPr lang="en-IE" sz="2000" dirty="0"/>
-              <a:t>Use AI to develop artifacts/code that you can review/maintain/understand</a:t>
-            </a:r>
-          </a:p>
-          <a:p>
-            <a:pPr lvl="2">
-              <a:lnSpc>
-                <a:spcPct val="90000"/>
-              </a:lnSpc>
-            </a:pPr>
-            <a:r>
-              <a:rPr lang="en-IE" sz="2000" dirty="0"/>
-              <a:t>Not Vibe coding</a:t>
-            </a:r>
-          </a:p>
-          <a:p>
-            <a:pPr lvl="2">
-              <a:lnSpc>
-                <a:spcPct val="90000"/>
-              </a:lnSpc>
-            </a:pPr>
-            <a:r>
-              <a:rPr lang="en-IE" sz="2000" dirty="0"/>
-              <a:t>Informed by Spec Driven Development</a:t>
-            </a:r>
-          </a:p>
-          <a:p>
-            <a:pPr>
-              <a:lnSpc>
-                <a:spcPct val="90000"/>
-              </a:lnSpc>
-            </a:pPr>
-            <a:r>
-              <a:rPr lang="en-IE" sz="2000" dirty="0"/>
-              <a:t>Still forming assignment goals/assessment/deliverables for this!!!!</a:t>
-            </a:r>
-          </a:p>
-        </p:txBody>
-      </p:sp>
-    </p:spTree>
-    <p:extLst>
-      <p:ext uri="{BB962C8B-B14F-4D97-AF65-F5344CB8AC3E}">
-        <p14:creationId xmlns:p14="http://schemas.microsoft.com/office/powerpoint/2010/main" val="1098908316"/>
-      </p:ext>
-    </p:extLst>
-  </p:cSld>
-  <p:clrMapOvr>
-    <a:masterClrMapping/>
-  </p:clrMapOvr>
-</p:sld>
-</file>
-
-<file path=ppt/slides/slide3.xml><?xml version="1.0" encoding="utf-8"?>
-<p:sld xmlns:a="http://schemas.openxmlformats.org/drawingml/2006/main" xmlns:r="http://schemas.openxmlformats.org/officeDocument/2006/relationships" xmlns:p="http://schemas.openxmlformats.org/presentationml/2006/main">
-  <p:cSld>
-    <p:spTree>
-      <p:nvGrpSpPr>
-        <p:cNvPr id="1" name=""/>
-        <p:cNvGrpSpPr/>
-        <p:nvPr/>
-      </p:nvGrpSpPr>
-      <p:grpSpPr>
-        <a:xfrm>
-          <a:off x="0" y="0"/>
-          <a:ext cx="0" cy="0"/>
-          <a:chOff x="0" y="0"/>
-          <a:chExt cx="0" cy="0"/>
-        </a:xfrm>
-      </p:grpSpPr>
-      <p:sp>
-        <p:nvSpPr>
-          <p:cNvPr id="2" name="Title 1">
-            <a:extLst>
-              <a:ext uri="{FF2B5EF4-FFF2-40B4-BE49-F238E27FC236}">
-                <a16:creationId xmlns:a16="http://schemas.microsoft.com/office/drawing/2014/main" id="{BF820529-59E2-D44D-CDF6-5F25593ECC9B}"/>
-              </a:ext>
-            </a:extLst>
-          </p:cNvPr>
-          <p:cNvSpPr>
-            <a:spLocks noGrp="1"/>
-          </p:cNvSpPr>
-          <p:nvPr>
-            <p:ph type="title"/>
-          </p:nvPr>
-        </p:nvSpPr>
-        <p:spPr/>
-        <p:txBody>
-          <a:bodyPr/>
-          <a:lstStyle/>
-          <a:p>
-            <a:r>
-              <a:rPr lang="en-GB"/>
-              <a:t>Tentative Plan</a:t>
-            </a:r>
-            <a:endParaRPr lang="en-IE" dirty="0"/>
-          </a:p>
-        </p:txBody>
-      </p:sp>
-      <p:sp>
-        <p:nvSpPr>
-          <p:cNvPr id="3" name="Slide Number Placeholder 2">
-            <a:extLst>
-              <a:ext uri="{FF2B5EF4-FFF2-40B4-BE49-F238E27FC236}">
-                <a16:creationId xmlns:a16="http://schemas.microsoft.com/office/drawing/2014/main" id="{05B96712-A760-9DCD-3DAD-01D6E5EAFE64}"/>
-              </a:ext>
-            </a:extLst>
-          </p:cNvPr>
-          <p:cNvSpPr>
-            <a:spLocks noGrp="1"/>
-          </p:cNvSpPr>
-          <p:nvPr>
-            <p:ph type="sldNum" sz="quarter" idx="12"/>
-          </p:nvPr>
-        </p:nvSpPr>
-        <p:spPr/>
-        <p:txBody>
-          <a:bodyPr/>
-          <a:lstStyle/>
-          <a:p>
-            <a:pPr>
-              <a:defRPr/>
-            </a:pPr>
-            <a:fld id="{15C525B3-71AC-4963-81CC-476B7FE86059}" type="slidenum">
-              <a:rPr lang="en-US" altLang="en-US" smtClean="0"/>
-              <a:pPr>
-                <a:defRPr/>
-              </a:pPr>
-              <a:t>3</a:t>
-            </a:fld>
-            <a:endParaRPr lang="en-US" altLang="en-US"/>
-          </a:p>
-        </p:txBody>
-      </p:sp>
-      <p:pic>
-        <p:nvPicPr>
-          <p:cNvPr id="6" name="Picture 5">
-            <a:extLst>
-              <a:ext uri="{FF2B5EF4-FFF2-40B4-BE49-F238E27FC236}">
-                <a16:creationId xmlns:a16="http://schemas.microsoft.com/office/drawing/2014/main" id="{B52D0F5C-58FF-40BC-C684-DE2B127A6934}"/>
-              </a:ext>
-            </a:extLst>
-          </p:cNvPr>
-          <p:cNvPicPr>
-            <a:picLocks noChangeAspect="1"/>
-          </p:cNvPicPr>
-          <p:nvPr/>
-        </p:nvPicPr>
-        <p:blipFill>
-          <a:blip r:embed="rId3"/>
-          <a:stretch>
-            <a:fillRect/>
-          </a:stretch>
-        </p:blipFill>
-        <p:spPr>
-          <a:xfrm>
-            <a:off x="825229" y="47451"/>
-            <a:ext cx="10541542" cy="6763098"/>
-          </a:xfrm>
-          <a:prstGeom prst="rect">
-            <a:avLst/>
-          </a:prstGeom>
-        </p:spPr>
-      </p:pic>
-    </p:spTree>
-    <p:extLst>
-      <p:ext uri="{BB962C8B-B14F-4D97-AF65-F5344CB8AC3E}">
-        <p14:creationId xmlns:p14="http://schemas.microsoft.com/office/powerpoint/2010/main" val="4194420870"/>
-      </p:ext>
-    </p:extLst>
-  </p:cSld>
-  <p:clrMapOvr>
-    <a:masterClrMapping/>
-  </p:clrMapOvr>
-</p:sld>
-</file>
-
-<file path=ppt/slides/slide4.xml><?xml version="1.0" encoding="utf-8"?>
 <p:sld xmlns:a="http://schemas.openxmlformats.org/drawingml/2006/main" xmlns:r="http://schemas.openxmlformats.org/officeDocument/2006/relationships" xmlns:p="http://schemas.openxmlformats.org/presentationml/2006/main">
   <p:cSld>
     <p:bg>
@@ -19853,7 +17649,7 @@
                 <a:buFontTx/>
                 <a:buNone/>
               </a:pPr>
-              <a:t>4</a:t>
+              <a:t>2</a:t>
             </a:fld>
             <a:endParaRPr lang="en-US" altLang="en-US" b="0"/>
           </a:p>
@@ -19898,7 +17694,7 @@
 </p:sld>
 </file>
 
-<file path=ppt/slides/slide5.xml><?xml version="1.0" encoding="utf-8"?>
+<file path=ppt/slides/slide3.xml><?xml version="1.0" encoding="utf-8"?>
 <p:sld xmlns:a="http://schemas.openxmlformats.org/drawingml/2006/main" xmlns:r="http://schemas.openxmlformats.org/officeDocument/2006/relationships" xmlns:p="http://schemas.openxmlformats.org/presentationml/2006/main">
   <p:cSld>
     <p:bg>
@@ -25346,7 +23142,7 @@
                 </a:spcAft>
                 <a:buNone/>
               </a:pPr>
-              <a:t>5</a:t>
+              <a:t>3</a:t>
             </a:fld>
             <a:endParaRPr lang="en-US" altLang="en-US" b="0"/>
           </a:p>
@@ -25360,7 +23156,7 @@
 </p:sld>
 </file>
 
-<file path=ppt/slides/slide6.xml><?xml version="1.0" encoding="utf-8"?>
+<file path=ppt/slides/slide4.xml><?xml version="1.0" encoding="utf-8"?>
 <p:sld xmlns:a="http://schemas.openxmlformats.org/drawingml/2006/main" xmlns:r="http://schemas.openxmlformats.org/officeDocument/2006/relationships" xmlns:p="http://schemas.openxmlformats.org/presentationml/2006/main">
   <p:cSld>
     <p:spTree>
@@ -25407,35 +23203,6 @@
       </p:sp>
       <p:pic>
         <p:nvPicPr>
-          <p:cNvPr id="7" name="Content Placeholder 6">
-            <a:extLst>
-              <a:ext uri="{FF2B5EF4-FFF2-40B4-BE49-F238E27FC236}">
-                <a16:creationId xmlns:a16="http://schemas.microsoft.com/office/drawing/2014/main" id="{D9FE7BC4-7779-9101-8DE9-07537C35D8CA}"/>
-              </a:ext>
-            </a:extLst>
-          </p:cNvPr>
-          <p:cNvPicPr>
-            <a:picLocks noGrp="1" noChangeAspect="1"/>
-          </p:cNvPicPr>
-          <p:nvPr>
-            <p:ph idx="1"/>
-          </p:nvPr>
-        </p:nvPicPr>
-        <p:blipFill>
-          <a:blip r:embed="rId2"/>
-          <a:stretch>
-            <a:fillRect/>
-          </a:stretch>
-        </p:blipFill>
-        <p:spPr>
-          <a:xfrm>
-            <a:off x="2209800" y="1981200"/>
-            <a:ext cx="5692637" cy="3916073"/>
-          </a:xfrm>
-        </p:spPr>
-      </p:pic>
-      <p:pic>
-        <p:nvPicPr>
           <p:cNvPr id="4" name="Picture 3">
             <a:extLst>
               <a:ext uri="{FF2B5EF4-FFF2-40B4-BE49-F238E27FC236}">
@@ -25449,19 +23216,74 @@
           <p:nvPr/>
         </p:nvPicPr>
         <p:blipFill>
-          <a:blip r:embed="rId3"/>
+          <a:blip r:embed="rId2"/>
           <a:stretch>
             <a:fillRect/>
           </a:stretch>
         </p:blipFill>
         <p:spPr>
           <a:xfrm>
-            <a:off x="4572000" y="1171574"/>
+            <a:off x="1905000" y="1371600"/>
             <a:ext cx="4876800" cy="2257426"/>
           </a:xfrm>
           <a:prstGeom prst="rect">
             <a:avLst/>
           </a:prstGeom>
+        </p:spPr>
+      </p:pic>
+      <p:pic>
+        <p:nvPicPr>
+          <p:cNvPr id="6" name="Content Placeholder 5">
+            <a:extLst>
+              <a:ext uri="{FF2B5EF4-FFF2-40B4-BE49-F238E27FC236}">
+                <a16:creationId xmlns:a16="http://schemas.microsoft.com/office/drawing/2014/main" id="{96F02B87-3FA1-C50A-4697-A39C57B41B3C}"/>
+              </a:ext>
+            </a:extLst>
+          </p:cNvPr>
+          <p:cNvPicPr>
+            <a:picLocks noGrp="1" noChangeAspect="1"/>
+          </p:cNvPicPr>
+          <p:nvPr>
+            <p:ph idx="1"/>
+          </p:nvPr>
+        </p:nvPicPr>
+        <p:blipFill>
+          <a:blip r:embed="rId3"/>
+          <a:stretch>
+            <a:fillRect/>
+          </a:stretch>
+        </p:blipFill>
+        <p:spPr bwMode="auto">
+          <a:xfrm>
+            <a:off x="2133600" y="3733800"/>
+            <a:ext cx="6445581" cy="2667137"/>
+          </a:xfrm>
+          <a:prstGeom prst="rect">
+            <a:avLst/>
+          </a:prstGeom>
+          <a:noFill/>
+          <a:ln>
+            <a:noFill/>
+          </a:ln>
+          <a:extLst>
+            <a:ext uri="{909E8E84-426E-40DD-AFC4-6F175D3DCCD1}">
+              <a14:hiddenFill xmlns:a14="http://schemas.microsoft.com/office/drawing/2010/main">
+                <a:solidFill>
+                  <a:srgbClr val="FFFFFF"/>
+                </a:solidFill>
+              </a14:hiddenFill>
+            </a:ext>
+            <a:ext uri="{91240B29-F687-4F45-9708-019B960494DF}">
+              <a14:hiddenLine xmlns:a14="http://schemas.microsoft.com/office/drawing/2010/main" w="9525">
+                <a:solidFill>
+                  <a:srgbClr val="000000"/>
+                </a:solidFill>
+                <a:miter lim="800000"/>
+                <a:headEnd/>
+                <a:tailEnd/>
+              </a14:hiddenLine>
+            </a:ext>
+          </a:extLst>
         </p:spPr>
       </p:pic>
     </p:spTree>
@@ -25477,7 +23299,7 @@
 </p:sld>
 </file>
 
-<file path=ppt/slides/slide7.xml><?xml version="1.0" encoding="utf-8"?>
+<file path=ppt/slides/slide5.xml><?xml version="1.0" encoding="utf-8"?>
 <p:sld xmlns:a="http://schemas.openxmlformats.org/drawingml/2006/main" xmlns:r="http://schemas.openxmlformats.org/officeDocument/2006/relationships" xmlns:p="http://schemas.openxmlformats.org/presentationml/2006/main">
   <p:cSld>
     <p:bg>
@@ -28595,7 +26417,7 @@
                 </a:spcAft>
                 <a:buNone/>
               </a:pPr>
-              <a:t>7</a:t>
+              <a:t>5</a:t>
             </a:fld>
             <a:endParaRPr lang="en-US" altLang="en-US" b="0"/>
           </a:p>
@@ -28808,7 +26630,7 @@
 </p:sld>
 </file>
 
-<file path=ppt/slides/slide8.xml><?xml version="1.0" encoding="utf-8"?>
+<file path=ppt/slides/slide6.xml><?xml version="1.0" encoding="utf-8"?>
 <p:sld xmlns:a="http://schemas.openxmlformats.org/drawingml/2006/main" xmlns:r="http://schemas.openxmlformats.org/officeDocument/2006/relationships" xmlns:p="http://schemas.openxmlformats.org/presentationml/2006/main">
   <p:cSld>
     <p:bg>
@@ -31988,7 +29810,7 @@
                 <a:buFontTx/>
                 <a:buNone/>
               </a:pPr>
-              <a:t>8</a:t>
+              <a:t>6</a:t>
             </a:fld>
             <a:endParaRPr lang="en-US" altLang="en-US" b="0"/>
           </a:p>
@@ -32374,7 +30196,7 @@
 </p:sld>
 </file>
 
-<file path=ppt/slides/slide9.xml><?xml version="1.0" encoding="utf-8"?>
+<file path=ppt/slides/slide7.xml><?xml version="1.0" encoding="utf-8"?>
 <p:sld xmlns:a="http://schemas.openxmlformats.org/drawingml/2006/main" xmlns:r="http://schemas.openxmlformats.org/officeDocument/2006/relationships" xmlns:p="http://schemas.openxmlformats.org/presentationml/2006/main">
   <p:cSld>
     <p:bg>
@@ -35101,7 +32923,7 @@
                 </a:spcAft>
                 <a:defRPr/>
               </a:pPr>
-              <a:t>9</a:t>
+              <a:t>7</a:t>
             </a:fld>
             <a:endParaRPr lang="en-US" altLang="en-US"/>
           </a:p>
@@ -35206,6 +33028,1500 @@
   <p:clrMapOvr>
     <a:masterClrMapping/>
   </p:clrMapOvr>
+</p:sld>
+</file>
+
+<file path=ppt/slides/slide8.xml><?xml version="1.0" encoding="utf-8"?>
+<p:sld xmlns:a="http://schemas.openxmlformats.org/drawingml/2006/main" xmlns:r="http://schemas.openxmlformats.org/officeDocument/2006/relationships" xmlns:p="http://schemas.openxmlformats.org/presentationml/2006/main">
+  <p:cSld>
+    <p:spTree>
+      <p:nvGrpSpPr>
+        <p:cNvPr id="1" name=""/>
+        <p:cNvGrpSpPr/>
+        <p:nvPr/>
+      </p:nvGrpSpPr>
+      <p:grpSpPr>
+        <a:xfrm>
+          <a:off x="0" y="0"/>
+          <a:ext cx="0" cy="0"/>
+          <a:chOff x="0" y="0"/>
+          <a:chExt cx="0" cy="0"/>
+        </a:xfrm>
+      </p:grpSpPr>
+      <p:sp>
+        <p:nvSpPr>
+          <p:cNvPr id="21505" name="Title 1">
+            <a:extLst>
+              <a:ext uri="{FF2B5EF4-FFF2-40B4-BE49-F238E27FC236}">
+                <a16:creationId xmlns:a16="http://schemas.microsoft.com/office/drawing/2014/main" id="{5540338F-0047-817D-33BC-1F0F33ECC917}"/>
+              </a:ext>
+            </a:extLst>
+          </p:cNvPr>
+          <p:cNvSpPr>
+            <a:spLocks noGrp="1" noChangeArrowheads="1"/>
+          </p:cNvSpPr>
+          <p:nvPr>
+            <p:ph type="title"/>
+          </p:nvPr>
+        </p:nvSpPr>
+        <p:spPr/>
+        <p:txBody>
+          <a:bodyPr/>
+          <a:lstStyle/>
+          <a:p>
+            <a:r>
+              <a:rPr lang="en-US" altLang="en-US" dirty="0">
+                <a:ea typeface="ＭＳ Ｐゴシック" panose="020B0600070205080204" pitchFamily="34" charset="-128"/>
+              </a:rPr>
+              <a:t>In-Class Code Demos.</a:t>
+            </a:r>
+            <a:br>
+              <a:rPr lang="en-US" altLang="en-US" dirty="0">
+                <a:ea typeface="ＭＳ Ｐゴシック" panose="020B0600070205080204" pitchFamily="34" charset="-128"/>
+              </a:rPr>
+            </a:br>
+            <a:r>
+              <a:rPr lang="en-US" altLang="en-US" sz="2400" dirty="0">
+                <a:ea typeface="ＭＳ Ｐゴシック" panose="020B0600070205080204" pitchFamily="34" charset="-128"/>
+              </a:rPr>
+              <a:t>(See lecture archive)</a:t>
+            </a:r>
+          </a:p>
+        </p:txBody>
+      </p:sp>
+      <p:sp>
+        <p:nvSpPr>
+          <p:cNvPr id="21506" name="Slide Number Placeholder 3">
+            <a:extLst>
+              <a:ext uri="{FF2B5EF4-FFF2-40B4-BE49-F238E27FC236}">
+                <a16:creationId xmlns:a16="http://schemas.microsoft.com/office/drawing/2014/main" id="{BFCD649D-2ECE-3525-5908-56A7B8D9D2BC}"/>
+              </a:ext>
+            </a:extLst>
+          </p:cNvPr>
+          <p:cNvSpPr>
+            <a:spLocks noGrp="1"/>
+          </p:cNvSpPr>
+          <p:nvPr>
+            <p:ph type="sldNum" sz="quarter" idx="12"/>
+          </p:nvPr>
+        </p:nvSpPr>
+        <p:spPr>
+          <a:noFill/>
+          <a:ln/>
+          <a:extLst>
+            <a:ext uri="{909E8E84-426E-40DD-AFC4-6F175D3DCCD1}">
+              <a14:hiddenFill xmlns:a14="http://schemas.microsoft.com/office/drawing/2010/main">
+                <a:solidFill>
+                  <a:srgbClr val="FFFFFF"/>
+                </a:solidFill>
+              </a14:hiddenFill>
+            </a:ext>
+            <a:ext uri="{91240B29-F687-4F45-9708-019B960494DF}">
+              <a14:hiddenLine xmlns:a14="http://schemas.microsoft.com/office/drawing/2010/main" w="9525">
+                <a:solidFill>
+                  <a:srgbClr val="000000"/>
+                </a:solidFill>
+                <a:miter lim="800000"/>
+                <a:headEnd/>
+                <a:tailEnd/>
+              </a14:hiddenLine>
+            </a:ext>
+          </a:extLst>
+        </p:spPr>
+        <p:txBody>
+          <a:bodyPr/>
+          <a:lstStyle>
+            <a:lvl1pPr>
+              <a:spcBef>
+                <a:spcPct val="20000"/>
+              </a:spcBef>
+              <a:buChar char="•"/>
+              <a:defRPr b="1">
+                <a:solidFill>
+                  <a:schemeClr val="tx1"/>
+                </a:solidFill>
+                <a:latin typeface="Arial" panose="020B0604020202020204" pitchFamily="34" charset="0"/>
+                <a:ea typeface="ＭＳ Ｐゴシック" panose="020B0600070205080204" pitchFamily="34" charset="-128"/>
+              </a:defRPr>
+            </a:lvl1pPr>
+            <a:lvl2pPr marL="742950" indent="-285750">
+              <a:spcBef>
+                <a:spcPct val="20000"/>
+              </a:spcBef>
+              <a:buChar char="–"/>
+              <a:defRPr b="1">
+                <a:solidFill>
+                  <a:schemeClr val="tx1"/>
+                </a:solidFill>
+                <a:latin typeface="Arial" panose="020B0604020202020204" pitchFamily="34" charset="0"/>
+                <a:ea typeface="ＭＳ Ｐゴシック" panose="020B0600070205080204" pitchFamily="34" charset="-128"/>
+              </a:defRPr>
+            </a:lvl2pPr>
+            <a:lvl3pPr marL="1143000" indent="-228600">
+              <a:spcBef>
+                <a:spcPct val="20000"/>
+              </a:spcBef>
+              <a:buChar char="•"/>
+              <a:defRPr b="1">
+                <a:solidFill>
+                  <a:schemeClr val="tx1"/>
+                </a:solidFill>
+                <a:latin typeface="Arial" panose="020B0604020202020204" pitchFamily="34" charset="0"/>
+                <a:ea typeface="ＭＳ Ｐゴシック" panose="020B0600070205080204" pitchFamily="34" charset="-128"/>
+              </a:defRPr>
+            </a:lvl3pPr>
+            <a:lvl4pPr marL="1600200" indent="-228600">
+              <a:spcBef>
+                <a:spcPct val="20000"/>
+              </a:spcBef>
+              <a:buChar char="–"/>
+              <a:defRPr b="1">
+                <a:solidFill>
+                  <a:schemeClr val="tx1"/>
+                </a:solidFill>
+                <a:latin typeface="Arial" panose="020B0604020202020204" pitchFamily="34" charset="0"/>
+                <a:ea typeface="ＭＳ Ｐゴシック" panose="020B0600070205080204" pitchFamily="34" charset="-128"/>
+              </a:defRPr>
+            </a:lvl4pPr>
+            <a:lvl5pPr marL="2057400" indent="-228600">
+              <a:spcBef>
+                <a:spcPct val="20000"/>
+              </a:spcBef>
+              <a:buChar char="»"/>
+              <a:defRPr b="1">
+                <a:solidFill>
+                  <a:schemeClr val="tx1"/>
+                </a:solidFill>
+                <a:latin typeface="Arial" panose="020B0604020202020204" pitchFamily="34" charset="0"/>
+                <a:ea typeface="ＭＳ Ｐゴシック" panose="020B0600070205080204" pitchFamily="34" charset="-128"/>
+              </a:defRPr>
+            </a:lvl5pPr>
+            <a:lvl6pPr marL="2514600" indent="-228600" eaLnBrk="0" fontAlgn="base" hangingPunct="0">
+              <a:spcBef>
+                <a:spcPct val="20000"/>
+              </a:spcBef>
+              <a:spcAft>
+                <a:spcPct val="0"/>
+              </a:spcAft>
+              <a:buChar char="»"/>
+              <a:defRPr b="1">
+                <a:solidFill>
+                  <a:schemeClr val="tx1"/>
+                </a:solidFill>
+                <a:latin typeface="Arial" panose="020B0604020202020204" pitchFamily="34" charset="0"/>
+                <a:ea typeface="ＭＳ Ｐゴシック" panose="020B0600070205080204" pitchFamily="34" charset="-128"/>
+              </a:defRPr>
+            </a:lvl6pPr>
+            <a:lvl7pPr marL="2971800" indent="-228600" eaLnBrk="0" fontAlgn="base" hangingPunct="0">
+              <a:spcBef>
+                <a:spcPct val="20000"/>
+              </a:spcBef>
+              <a:spcAft>
+                <a:spcPct val="0"/>
+              </a:spcAft>
+              <a:buChar char="»"/>
+              <a:defRPr b="1">
+                <a:solidFill>
+                  <a:schemeClr val="tx1"/>
+                </a:solidFill>
+                <a:latin typeface="Arial" panose="020B0604020202020204" pitchFamily="34" charset="0"/>
+                <a:ea typeface="ＭＳ Ｐゴシック" panose="020B0600070205080204" pitchFamily="34" charset="-128"/>
+              </a:defRPr>
+            </a:lvl7pPr>
+            <a:lvl8pPr marL="3429000" indent="-228600" eaLnBrk="0" fontAlgn="base" hangingPunct="0">
+              <a:spcBef>
+                <a:spcPct val="20000"/>
+              </a:spcBef>
+              <a:spcAft>
+                <a:spcPct val="0"/>
+              </a:spcAft>
+              <a:buChar char="»"/>
+              <a:defRPr b="1">
+                <a:solidFill>
+                  <a:schemeClr val="tx1"/>
+                </a:solidFill>
+                <a:latin typeface="Arial" panose="020B0604020202020204" pitchFamily="34" charset="0"/>
+                <a:ea typeface="ＭＳ Ｐゴシック" panose="020B0600070205080204" pitchFamily="34" charset="-128"/>
+              </a:defRPr>
+            </a:lvl8pPr>
+            <a:lvl9pPr marL="3886200" indent="-228600" eaLnBrk="0" fontAlgn="base" hangingPunct="0">
+              <a:spcBef>
+                <a:spcPct val="20000"/>
+              </a:spcBef>
+              <a:spcAft>
+                <a:spcPct val="0"/>
+              </a:spcAft>
+              <a:buChar char="»"/>
+              <a:defRPr b="1">
+                <a:solidFill>
+                  <a:schemeClr val="tx1"/>
+                </a:solidFill>
+                <a:latin typeface="Arial" panose="020B0604020202020204" pitchFamily="34" charset="0"/>
+                <a:ea typeface="ＭＳ Ｐゴシック" panose="020B0600070205080204" pitchFamily="34" charset="-128"/>
+              </a:defRPr>
+            </a:lvl9pPr>
+          </a:lstStyle>
+          <a:p>
+            <a:pPr>
+              <a:spcBef>
+                <a:spcPct val="0"/>
+              </a:spcBef>
+              <a:buFontTx/>
+              <a:buNone/>
+            </a:pPr>
+            <a:fld id="{9C6B1C8A-6C76-417A-BCA1-70D0DFFCDDE2}" type="slidenum">
+              <a:rPr lang="en-US" altLang="en-US" b="0" smtClean="0"/>
+              <a:pPr>
+                <a:spcBef>
+                  <a:spcPct val="0"/>
+                </a:spcBef>
+                <a:buFontTx/>
+                <a:buNone/>
+              </a:pPr>
+              <a:t>8</a:t>
+            </a:fld>
+            <a:endParaRPr lang="en-US" altLang="en-US" b="0"/>
+          </a:p>
+        </p:txBody>
+      </p:sp>
+      <p:pic>
+        <p:nvPicPr>
+          <p:cNvPr id="6" name="Picture 5">
+            <a:extLst>
+              <a:ext uri="{FF2B5EF4-FFF2-40B4-BE49-F238E27FC236}">
+                <a16:creationId xmlns:a16="http://schemas.microsoft.com/office/drawing/2014/main" id="{6E91695F-7035-993A-4DE0-A9E5E72A204F}"/>
+              </a:ext>
+            </a:extLst>
+          </p:cNvPr>
+          <p:cNvPicPr>
+            <a:picLocks noChangeAspect="1" noChangeArrowheads="1"/>
+          </p:cNvPicPr>
+          <p:nvPr/>
+        </p:nvPicPr>
+        <p:blipFill>
+          <a:blip r:embed="rId2">
+            <a:extLst>
+              <a:ext uri="{28A0092B-C50C-407E-A947-70E740481C1C}">
+                <a14:useLocalDpi xmlns:a14="http://schemas.microsoft.com/office/drawing/2010/main" val="0"/>
+              </a:ext>
+            </a:extLst>
+          </a:blip>
+          <a:srcRect/>
+          <a:stretch>
+            <a:fillRect/>
+          </a:stretch>
+        </p:blipFill>
+        <p:spPr bwMode="auto">
+          <a:xfrm>
+            <a:off x="1981200" y="1417640"/>
+            <a:ext cx="8001000" cy="4413324"/>
+          </a:xfrm>
+          <a:prstGeom prst="rect">
+            <a:avLst/>
+          </a:prstGeom>
+          <a:noFill/>
+          <a:ln>
+            <a:noFill/>
+          </a:ln>
+          <a:effectLst>
+            <a:outerShdw blurRad="50800" dist="50800" dir="5400000" sx="102000" sy="102000" algn="ctr" rotWithShape="0">
+              <a:srgbClr val="000000">
+                <a:alpha val="43137"/>
+              </a:srgbClr>
+            </a:outerShdw>
+          </a:effectLst>
+          <a:extLst>
+            <a:ext uri="{909E8E84-426E-40DD-AFC4-6F175D3DCCD1}">
+              <a14:hiddenFill xmlns:a14="http://schemas.microsoft.com/office/drawing/2010/main">
+                <a:solidFill>
+                  <a:srgbClr val="FFFFFF"/>
+                </a:solidFill>
+              </a14:hiddenFill>
+            </a:ext>
+            <a:ext uri="{91240B29-F687-4F45-9708-019B960494DF}">
+              <a14:hiddenLine xmlns:a14="http://schemas.microsoft.com/office/drawing/2010/main" w="9525">
+                <a:solidFill>
+                  <a:srgbClr val="000000"/>
+                </a:solidFill>
+                <a:miter lim="800000"/>
+                <a:headEnd/>
+                <a:tailEnd/>
+              </a14:hiddenLine>
+            </a:ext>
+          </a:extLst>
+        </p:spPr>
+      </p:pic>
+      <p:sp>
+        <p:nvSpPr>
+          <p:cNvPr id="7" name="Rectangle 6">
+            <a:extLst>
+              <a:ext uri="{FF2B5EF4-FFF2-40B4-BE49-F238E27FC236}">
+                <a16:creationId xmlns:a16="http://schemas.microsoft.com/office/drawing/2014/main" id="{7973ACA3-F0FD-0A7C-E890-8D2DB0C5857A}"/>
+              </a:ext>
+            </a:extLst>
+          </p:cNvPr>
+          <p:cNvSpPr/>
+          <p:nvPr/>
+        </p:nvSpPr>
+        <p:spPr>
+          <a:xfrm>
+            <a:off x="3822700" y="4648200"/>
+            <a:ext cx="4559300" cy="914400"/>
+          </a:xfrm>
+          <a:prstGeom prst="rect">
+            <a:avLst/>
+          </a:prstGeom>
+        </p:spPr>
+        <p:style>
+          <a:lnRef idx="3">
+            <a:schemeClr val="lt1"/>
+          </a:lnRef>
+          <a:fillRef idx="1">
+            <a:schemeClr val="accent6"/>
+          </a:fillRef>
+          <a:effectRef idx="1">
+            <a:schemeClr val="accent6"/>
+          </a:effectRef>
+          <a:fontRef idx="minor">
+            <a:schemeClr val="lt1"/>
+          </a:fontRef>
+        </p:style>
+        <p:txBody>
+          <a:bodyPr anchor="ctr"/>
+          <a:lstStyle/>
+          <a:p>
+            <a:pPr algn="ctr">
+              <a:defRPr/>
+            </a:pPr>
+            <a:r>
+              <a:rPr lang="en-US" dirty="0"/>
+              <a:t>See Archive  accompanying these slides.</a:t>
+            </a:r>
+          </a:p>
+          <a:p>
+            <a:pPr algn="ctr">
+              <a:defRPr/>
+            </a:pPr>
+            <a:r>
+              <a:rPr lang="en-US" dirty="0"/>
+              <a:t>Run code using VS Code Live Server extension.</a:t>
+            </a:r>
+          </a:p>
+        </p:txBody>
+      </p:sp>
+    </p:spTree>
+  </p:cSld>
+  <p:clrMapOvr>
+    <a:masterClrMapping/>
+  </p:clrMapOvr>
+</p:sld>
+</file>
+
+<file path=ppt/slides/slide9.xml><?xml version="1.0" encoding="utf-8"?>
+<p:sld xmlns:a="http://schemas.openxmlformats.org/drawingml/2006/main" xmlns:r="http://schemas.openxmlformats.org/officeDocument/2006/relationships" xmlns:p="http://schemas.openxmlformats.org/presentationml/2006/main">
+  <p:cSld>
+    <p:spTree>
+      <p:nvGrpSpPr>
+        <p:cNvPr id="1" name=""/>
+        <p:cNvGrpSpPr/>
+        <p:nvPr/>
+      </p:nvGrpSpPr>
+      <p:grpSpPr>
+        <a:xfrm>
+          <a:off x="0" y="0"/>
+          <a:ext cx="0" cy="0"/>
+          <a:chOff x="0" y="0"/>
+          <a:chExt cx="0" cy="0"/>
+        </a:xfrm>
+      </p:grpSpPr>
+      <p:sp>
+        <p:nvSpPr>
+          <p:cNvPr id="20481" name="Title 1">
+            <a:extLst>
+              <a:ext uri="{FF2B5EF4-FFF2-40B4-BE49-F238E27FC236}">
+                <a16:creationId xmlns:a16="http://schemas.microsoft.com/office/drawing/2014/main" id="{0CAA7637-C6F8-9B80-2A93-0A207F49DD20}"/>
+              </a:ext>
+            </a:extLst>
+          </p:cNvPr>
+          <p:cNvSpPr>
+            <a:spLocks noGrp="1" noChangeArrowheads="1"/>
+          </p:cNvSpPr>
+          <p:nvPr>
+            <p:ph type="title"/>
+          </p:nvPr>
+        </p:nvSpPr>
+        <p:spPr/>
+        <p:txBody>
+          <a:bodyPr/>
+          <a:lstStyle/>
+          <a:p>
+            <a:r>
+              <a:rPr lang="en-US" altLang="en-US" dirty="0">
+                <a:ea typeface="ＭＳ Ｐゴシック" panose="020B0600070205080204" pitchFamily="34" charset="-128"/>
+              </a:rPr>
+              <a:t>Creating the </a:t>
+            </a:r>
+            <a:r>
+              <a:rPr lang="en-US" altLang="en-US" u="sng" dirty="0">
+                <a:ea typeface="ＭＳ Ｐゴシック" panose="020B0600070205080204" pitchFamily="34" charset="-128"/>
+              </a:rPr>
+              <a:t>UI Description.</a:t>
+            </a:r>
+            <a:br>
+              <a:rPr lang="en-US" altLang="en-US" u="sng" dirty="0">
+                <a:ea typeface="ＭＳ Ｐゴシック" panose="020B0600070205080204" pitchFamily="34" charset="-128"/>
+              </a:rPr>
+            </a:br>
+            <a:r>
+              <a:rPr lang="en-US" altLang="en-US" sz="2000" dirty="0">
+                <a:ea typeface="ＭＳ Ｐゴシック" panose="020B0600070205080204" pitchFamily="34" charset="-128"/>
+              </a:rPr>
+              <a:t>(Vanilla React)</a:t>
+            </a:r>
+          </a:p>
+        </p:txBody>
+      </p:sp>
+      <p:sp>
+        <p:nvSpPr>
+          <p:cNvPr id="20482" name="Content Placeholder 2">
+            <a:extLst>
+              <a:ext uri="{FF2B5EF4-FFF2-40B4-BE49-F238E27FC236}">
+                <a16:creationId xmlns:a16="http://schemas.microsoft.com/office/drawing/2014/main" id="{7F23EA52-ACFF-3685-55E9-F291679C5A7B}"/>
+              </a:ext>
+            </a:extLst>
+          </p:cNvPr>
+          <p:cNvSpPr>
+            <a:spLocks noGrp="1" noChangeArrowheads="1"/>
+          </p:cNvSpPr>
+          <p:nvPr>
+            <p:ph idx="1"/>
+          </p:nvPr>
+        </p:nvSpPr>
+        <p:spPr>
+          <a:xfrm>
+            <a:off x="457200" y="1527175"/>
+            <a:ext cx="11430000" cy="4718050"/>
+          </a:xfrm>
+        </p:spPr>
+        <p:txBody>
+          <a:bodyPr/>
+          <a:lstStyle/>
+          <a:p>
+            <a:r>
+              <a:rPr lang="en-US" altLang="en-US" sz="2000" b="0" dirty="0" err="1">
+                <a:ea typeface="ＭＳ Ｐゴシック" panose="020B0600070205080204" pitchFamily="34" charset="-128"/>
+              </a:rPr>
+              <a:t>React.createElement</a:t>
+            </a:r>
+            <a:r>
+              <a:rPr lang="en-US" altLang="en-US" sz="2000" b="0" dirty="0">
+                <a:ea typeface="ＭＳ Ｐゴシック" panose="020B0600070205080204" pitchFamily="34" charset="-128"/>
+              </a:rPr>
+              <a:t>() </a:t>
+            </a:r>
+            <a:r>
+              <a:rPr lang="en-US" altLang="en-US" sz="2000" dirty="0">
+                <a:ea typeface="ＭＳ Ｐゴシック" panose="020B0600070205080204" pitchFamily="34" charset="-128"/>
+              </a:rPr>
+              <a:t>– creates a HTML element.</a:t>
+            </a:r>
+          </a:p>
+          <a:p>
+            <a:r>
+              <a:rPr lang="en-US" altLang="en-US" sz="2000" b="0" dirty="0" err="1">
+                <a:ea typeface="ＭＳ Ｐゴシック" panose="020B0600070205080204" pitchFamily="34" charset="-128"/>
+              </a:rPr>
+              <a:t>ReactDOM.createRoot</a:t>
+            </a:r>
+            <a:r>
+              <a:rPr lang="en-US" altLang="en-US" sz="2000" b="0" dirty="0">
+                <a:ea typeface="ＭＳ Ｐゴシック" panose="020B0600070205080204" pitchFamily="34" charset="-128"/>
+              </a:rPr>
+              <a:t>() – </a:t>
+            </a:r>
+            <a:r>
+              <a:rPr lang="en-US" altLang="en-US" sz="2000" dirty="0">
+                <a:ea typeface="ＭＳ Ｐゴシック" panose="020B0600070205080204" pitchFamily="34" charset="-128"/>
+              </a:rPr>
+              <a:t>used to attach the created element to existing DOM node. </a:t>
+            </a:r>
+            <a:endParaRPr lang="en-US" altLang="en-US" sz="2000" b="0" dirty="0">
+              <a:ea typeface="ＭＳ Ｐゴシック" panose="020B0600070205080204" pitchFamily="34" charset="-128"/>
+            </a:endParaRPr>
+          </a:p>
+          <a:p>
+            <a:r>
+              <a:rPr lang="en-US" altLang="en-US" sz="2000" b="0" dirty="0" err="1">
+                <a:ea typeface="ＭＳ Ｐゴシック" panose="020B0600070205080204" pitchFamily="34" charset="-128"/>
+              </a:rPr>
+              <a:t>React.createElement</a:t>
+            </a:r>
+            <a:r>
+              <a:rPr lang="en-US" altLang="en-US" sz="2000" b="0" dirty="0">
+                <a:ea typeface="ＭＳ Ｐゴシック" panose="020B0600070205080204" pitchFamily="34" charset="-128"/>
+              </a:rPr>
+              <a:t>() takes three or more </a:t>
+            </a:r>
+            <a:r>
+              <a:rPr lang="en-US" altLang="en-US" sz="2000" dirty="0">
+                <a:ea typeface="ＭＳ Ｐゴシック" panose="020B0600070205080204" pitchFamily="34" charset="-128"/>
+              </a:rPr>
+              <a:t>arguments</a:t>
+            </a:r>
+            <a:r>
+              <a:rPr lang="en-US" altLang="en-US" sz="2000" b="0" dirty="0">
+                <a:ea typeface="ＭＳ Ｐゴシック" panose="020B0600070205080204" pitchFamily="34" charset="-128"/>
+              </a:rPr>
+              <a:t>:</a:t>
+            </a:r>
+            <a:endParaRPr lang="en-US" altLang="en-US" sz="2000" dirty="0">
+              <a:ea typeface="ＭＳ Ｐゴシック" panose="020B0600070205080204" pitchFamily="34" charset="-128"/>
+            </a:endParaRPr>
+          </a:p>
+          <a:p>
+            <a:pPr marL="914400" lvl="1" indent="-457200"/>
+            <a:endParaRPr lang="en-US" altLang="en-US" sz="2400" dirty="0">
+              <a:ea typeface="ＭＳ Ｐゴシック" panose="020B0600070205080204" pitchFamily="34" charset="-128"/>
+            </a:endParaRPr>
+          </a:p>
+          <a:p>
+            <a:pPr marL="914400" lvl="1" indent="-457200"/>
+            <a:endParaRPr lang="en-US" altLang="en-US" sz="2400" dirty="0">
+              <a:ea typeface="ＭＳ Ｐゴシック" panose="020B0600070205080204" pitchFamily="34" charset="-128"/>
+            </a:endParaRPr>
+          </a:p>
+          <a:p>
+            <a:pPr marL="914400" lvl="1" indent="-457200"/>
+            <a:endParaRPr lang="en-US" altLang="en-US" sz="2400" dirty="0">
+              <a:ea typeface="ＭＳ Ｐゴシック" panose="020B0600070205080204" pitchFamily="34" charset="-128"/>
+            </a:endParaRPr>
+          </a:p>
+          <a:p>
+            <a:pPr marL="914400" lvl="1" indent="-457200"/>
+            <a:endParaRPr lang="en-US" altLang="en-US" sz="2400" dirty="0">
+              <a:ea typeface="ＭＳ Ｐゴシック" panose="020B0600070205080204" pitchFamily="34" charset="-128"/>
+            </a:endParaRPr>
+          </a:p>
+          <a:p>
+            <a:pPr marL="914400" lvl="1" indent="-457200"/>
+            <a:endParaRPr lang="en-US" altLang="en-US" sz="2400" dirty="0">
+              <a:ea typeface="ＭＳ Ｐゴシック" panose="020B0600070205080204" pitchFamily="34" charset="-128"/>
+            </a:endParaRPr>
+          </a:p>
+          <a:p>
+            <a:pPr marL="914400" lvl="1" indent="-457200"/>
+            <a:r>
+              <a:rPr lang="en-US" altLang="en-US" sz="2400" dirty="0">
+                <a:ea typeface="ＭＳ Ｐゴシック" panose="020B0600070205080204" pitchFamily="34" charset="-128"/>
+              </a:rPr>
+              <a:t>We don’t use </a:t>
+            </a:r>
+            <a:r>
+              <a:rPr lang="en-US" altLang="en-US" sz="2400" dirty="0" err="1">
+                <a:ea typeface="ＭＳ Ｐゴシック" panose="020B0600070205080204" pitchFamily="34" charset="-128"/>
+              </a:rPr>
+              <a:t>createElement</a:t>
+            </a:r>
+            <a:r>
+              <a:rPr lang="en-US" altLang="en-US" sz="2400" dirty="0">
+                <a:ea typeface="ＭＳ Ｐゴシック" panose="020B0600070205080204" pitchFamily="34" charset="-128"/>
+              </a:rPr>
+              <a:t>() directly - too cumbersome. More later…</a:t>
+            </a:r>
+            <a:endParaRPr lang="en-US" altLang="en-US" sz="2000" b="0" dirty="0">
+              <a:ea typeface="ＭＳ Ｐゴシック" panose="020B0600070205080204" pitchFamily="34" charset="-128"/>
+            </a:endParaRPr>
+          </a:p>
+          <a:p>
+            <a:r>
+              <a:rPr lang="en-US" altLang="en-US" sz="2000" b="0" dirty="0" err="1">
+                <a:ea typeface="ＭＳ Ｐゴシック" panose="020B0600070205080204" pitchFamily="34" charset="-128"/>
+              </a:rPr>
+              <a:t>ReactDOM.createRoot</a:t>
+            </a:r>
+            <a:r>
+              <a:rPr lang="en-US" altLang="en-US" sz="2000" b="0" dirty="0">
+                <a:ea typeface="ＭＳ Ｐゴシック" panose="020B0600070205080204" pitchFamily="34" charset="-128"/>
+              </a:rPr>
+              <a:t> () has 1 </a:t>
+            </a:r>
+            <a:r>
+              <a:rPr lang="en-US" altLang="en-US" sz="2000" dirty="0">
+                <a:ea typeface="ＭＳ Ｐゴシック" panose="020B0600070205080204" pitchFamily="34" charset="-128"/>
+              </a:rPr>
+              <a:t>argument:</a:t>
+            </a:r>
+          </a:p>
+        </p:txBody>
+      </p:sp>
+      <p:sp>
+        <p:nvSpPr>
+          <p:cNvPr id="20483" name="Slide Number Placeholder 3">
+            <a:extLst>
+              <a:ext uri="{FF2B5EF4-FFF2-40B4-BE49-F238E27FC236}">
+                <a16:creationId xmlns:a16="http://schemas.microsoft.com/office/drawing/2014/main" id="{4353AC8F-4284-9A65-C178-213CF254B6EB}"/>
+              </a:ext>
+            </a:extLst>
+          </p:cNvPr>
+          <p:cNvSpPr>
+            <a:spLocks noGrp="1"/>
+          </p:cNvSpPr>
+          <p:nvPr>
+            <p:ph type="sldNum" sz="quarter" idx="12"/>
+          </p:nvPr>
+        </p:nvSpPr>
+        <p:spPr>
+          <a:noFill/>
+          <a:ln/>
+          <a:extLst>
+            <a:ext uri="{909E8E84-426E-40DD-AFC4-6F175D3DCCD1}">
+              <a14:hiddenFill xmlns:a14="http://schemas.microsoft.com/office/drawing/2010/main">
+                <a:solidFill>
+                  <a:srgbClr val="FFFFFF"/>
+                </a:solidFill>
+              </a14:hiddenFill>
+            </a:ext>
+            <a:ext uri="{91240B29-F687-4F45-9708-019B960494DF}">
+              <a14:hiddenLine xmlns:a14="http://schemas.microsoft.com/office/drawing/2010/main" w="9525">
+                <a:solidFill>
+                  <a:srgbClr val="000000"/>
+                </a:solidFill>
+                <a:miter lim="800000"/>
+                <a:headEnd/>
+                <a:tailEnd/>
+              </a14:hiddenLine>
+            </a:ext>
+          </a:extLst>
+        </p:spPr>
+        <p:txBody>
+          <a:bodyPr/>
+          <a:lstStyle>
+            <a:lvl1pPr>
+              <a:spcBef>
+                <a:spcPct val="20000"/>
+              </a:spcBef>
+              <a:buChar char="•"/>
+              <a:defRPr b="1">
+                <a:solidFill>
+                  <a:schemeClr val="tx1"/>
+                </a:solidFill>
+                <a:latin typeface="Arial" panose="020B0604020202020204" pitchFamily="34" charset="0"/>
+                <a:ea typeface="ＭＳ Ｐゴシック" panose="020B0600070205080204" pitchFamily="34" charset="-128"/>
+              </a:defRPr>
+            </a:lvl1pPr>
+            <a:lvl2pPr marL="742950" indent="-285750">
+              <a:spcBef>
+                <a:spcPct val="20000"/>
+              </a:spcBef>
+              <a:buChar char="–"/>
+              <a:defRPr b="1">
+                <a:solidFill>
+                  <a:schemeClr val="tx1"/>
+                </a:solidFill>
+                <a:latin typeface="Arial" panose="020B0604020202020204" pitchFamily="34" charset="0"/>
+                <a:ea typeface="ＭＳ Ｐゴシック" panose="020B0600070205080204" pitchFamily="34" charset="-128"/>
+              </a:defRPr>
+            </a:lvl2pPr>
+            <a:lvl3pPr marL="1143000" indent="-228600">
+              <a:spcBef>
+                <a:spcPct val="20000"/>
+              </a:spcBef>
+              <a:buChar char="•"/>
+              <a:defRPr b="1">
+                <a:solidFill>
+                  <a:schemeClr val="tx1"/>
+                </a:solidFill>
+                <a:latin typeface="Arial" panose="020B0604020202020204" pitchFamily="34" charset="0"/>
+                <a:ea typeface="ＭＳ Ｐゴシック" panose="020B0600070205080204" pitchFamily="34" charset="-128"/>
+              </a:defRPr>
+            </a:lvl3pPr>
+            <a:lvl4pPr marL="1600200" indent="-228600">
+              <a:spcBef>
+                <a:spcPct val="20000"/>
+              </a:spcBef>
+              <a:buChar char="–"/>
+              <a:defRPr b="1">
+                <a:solidFill>
+                  <a:schemeClr val="tx1"/>
+                </a:solidFill>
+                <a:latin typeface="Arial" panose="020B0604020202020204" pitchFamily="34" charset="0"/>
+                <a:ea typeface="ＭＳ Ｐゴシック" panose="020B0600070205080204" pitchFamily="34" charset="-128"/>
+              </a:defRPr>
+            </a:lvl4pPr>
+            <a:lvl5pPr marL="2057400" indent="-228600">
+              <a:spcBef>
+                <a:spcPct val="20000"/>
+              </a:spcBef>
+              <a:buChar char="»"/>
+              <a:defRPr b="1">
+                <a:solidFill>
+                  <a:schemeClr val="tx1"/>
+                </a:solidFill>
+                <a:latin typeface="Arial" panose="020B0604020202020204" pitchFamily="34" charset="0"/>
+                <a:ea typeface="ＭＳ Ｐゴシック" panose="020B0600070205080204" pitchFamily="34" charset="-128"/>
+              </a:defRPr>
+            </a:lvl5pPr>
+            <a:lvl6pPr marL="2514600" indent="-228600" eaLnBrk="0" fontAlgn="base" hangingPunct="0">
+              <a:spcBef>
+                <a:spcPct val="20000"/>
+              </a:spcBef>
+              <a:spcAft>
+                <a:spcPct val="0"/>
+              </a:spcAft>
+              <a:buChar char="»"/>
+              <a:defRPr b="1">
+                <a:solidFill>
+                  <a:schemeClr val="tx1"/>
+                </a:solidFill>
+                <a:latin typeface="Arial" panose="020B0604020202020204" pitchFamily="34" charset="0"/>
+                <a:ea typeface="ＭＳ Ｐゴシック" panose="020B0600070205080204" pitchFamily="34" charset="-128"/>
+              </a:defRPr>
+            </a:lvl6pPr>
+            <a:lvl7pPr marL="2971800" indent="-228600" eaLnBrk="0" fontAlgn="base" hangingPunct="0">
+              <a:spcBef>
+                <a:spcPct val="20000"/>
+              </a:spcBef>
+              <a:spcAft>
+                <a:spcPct val="0"/>
+              </a:spcAft>
+              <a:buChar char="»"/>
+              <a:defRPr b="1">
+                <a:solidFill>
+                  <a:schemeClr val="tx1"/>
+                </a:solidFill>
+                <a:latin typeface="Arial" panose="020B0604020202020204" pitchFamily="34" charset="0"/>
+                <a:ea typeface="ＭＳ Ｐゴシック" panose="020B0600070205080204" pitchFamily="34" charset="-128"/>
+              </a:defRPr>
+            </a:lvl7pPr>
+            <a:lvl8pPr marL="3429000" indent="-228600" eaLnBrk="0" fontAlgn="base" hangingPunct="0">
+              <a:spcBef>
+                <a:spcPct val="20000"/>
+              </a:spcBef>
+              <a:spcAft>
+                <a:spcPct val="0"/>
+              </a:spcAft>
+              <a:buChar char="»"/>
+              <a:defRPr b="1">
+                <a:solidFill>
+                  <a:schemeClr val="tx1"/>
+                </a:solidFill>
+                <a:latin typeface="Arial" panose="020B0604020202020204" pitchFamily="34" charset="0"/>
+                <a:ea typeface="ＭＳ Ｐゴシック" panose="020B0600070205080204" pitchFamily="34" charset="-128"/>
+              </a:defRPr>
+            </a:lvl8pPr>
+            <a:lvl9pPr marL="3886200" indent="-228600" eaLnBrk="0" fontAlgn="base" hangingPunct="0">
+              <a:spcBef>
+                <a:spcPct val="20000"/>
+              </a:spcBef>
+              <a:spcAft>
+                <a:spcPct val="0"/>
+              </a:spcAft>
+              <a:buChar char="»"/>
+              <a:defRPr b="1">
+                <a:solidFill>
+                  <a:schemeClr val="tx1"/>
+                </a:solidFill>
+                <a:latin typeface="Arial" panose="020B0604020202020204" pitchFamily="34" charset="0"/>
+                <a:ea typeface="ＭＳ Ｐゴシック" panose="020B0600070205080204" pitchFamily="34" charset="-128"/>
+              </a:defRPr>
+            </a:lvl9pPr>
+          </a:lstStyle>
+          <a:p>
+            <a:pPr>
+              <a:spcBef>
+                <a:spcPct val="0"/>
+              </a:spcBef>
+              <a:buFontTx/>
+              <a:buNone/>
+            </a:pPr>
+            <a:fld id="{3DD7C3FE-7D52-4A36-BD7A-9D4C77E680D3}" type="slidenum">
+              <a:rPr lang="en-US" altLang="en-US" b="0" smtClean="0"/>
+              <a:pPr>
+                <a:spcBef>
+                  <a:spcPct val="0"/>
+                </a:spcBef>
+                <a:buFontTx/>
+                <a:buNone/>
+              </a:pPr>
+              <a:t>9</a:t>
+            </a:fld>
+            <a:endParaRPr lang="en-US" altLang="en-US" b="0"/>
+          </a:p>
+        </p:txBody>
+      </p:sp>
+      <p:pic>
+        <p:nvPicPr>
+          <p:cNvPr id="3" name="Picture 2">
+            <a:extLst>
+              <a:ext uri="{FF2B5EF4-FFF2-40B4-BE49-F238E27FC236}">
+                <a16:creationId xmlns:a16="http://schemas.microsoft.com/office/drawing/2014/main" id="{C473DACA-71B9-2A21-701A-2A8310A533E7}"/>
+              </a:ext>
+            </a:extLst>
+          </p:cNvPr>
+          <p:cNvPicPr>
+            <a:picLocks noChangeAspect="1"/>
+          </p:cNvPicPr>
+          <p:nvPr/>
+        </p:nvPicPr>
+        <p:blipFill rotWithShape="1">
+          <a:blip r:embed="rId3"/>
+          <a:srcRect b="12836"/>
+          <a:stretch/>
+        </p:blipFill>
+        <p:spPr>
+          <a:xfrm>
+            <a:off x="761527" y="3312799"/>
+            <a:ext cx="9134345" cy="1591648"/>
+          </a:xfrm>
+          <a:prstGeom prst="rect">
+            <a:avLst/>
+          </a:prstGeom>
+        </p:spPr>
+      </p:pic>
+      <p:sp>
+        <p:nvSpPr>
+          <p:cNvPr id="4" name="Callout: Line 3">
+            <a:extLst>
+              <a:ext uri="{FF2B5EF4-FFF2-40B4-BE49-F238E27FC236}">
+                <a16:creationId xmlns:a16="http://schemas.microsoft.com/office/drawing/2014/main" id="{67394963-C090-4C1E-D11D-F53DE8695A92}"/>
+              </a:ext>
+            </a:extLst>
+          </p:cNvPr>
+          <p:cNvSpPr/>
+          <p:nvPr/>
+        </p:nvSpPr>
+        <p:spPr>
+          <a:xfrm>
+            <a:off x="1218727" y="2639686"/>
+            <a:ext cx="2895600" cy="451683"/>
+          </a:xfrm>
+          <a:prstGeom prst="borderCallout1">
+            <a:avLst>
+              <a:gd name="adj1" fmla="val 123815"/>
+              <a:gd name="adj2" fmla="val 46431"/>
+              <a:gd name="adj3" fmla="val 417446"/>
+              <a:gd name="adj4" fmla="val 122760"/>
+            </a:avLst>
+          </a:prstGeom>
+        </p:spPr>
+        <p:style>
+          <a:lnRef idx="1">
+            <a:schemeClr val="accent1"/>
+          </a:lnRef>
+          <a:fillRef idx="3">
+            <a:schemeClr val="accent1"/>
+          </a:fillRef>
+          <a:effectRef idx="2">
+            <a:schemeClr val="accent1"/>
+          </a:effectRef>
+          <a:fontRef idx="minor">
+            <a:schemeClr val="lt1"/>
+          </a:fontRef>
+        </p:style>
+        <p:txBody>
+          <a:bodyPr rtlCol="0" anchor="ctr"/>
+          <a:lstStyle/>
+          <a:p>
+            <a:pPr lvl="1"/>
+            <a:r>
+              <a:rPr lang="en-US" altLang="en-US" sz="1800" dirty="0">
+                <a:solidFill>
+                  <a:schemeClr val="tx1"/>
+                </a:solidFill>
+                <a:ea typeface="ＭＳ Ｐゴシック" panose="020B0600070205080204" pitchFamily="34" charset="-128"/>
+              </a:rPr>
+              <a:t>Type (e.g. h1, div, …)</a:t>
+            </a:r>
+          </a:p>
+        </p:txBody>
+      </p:sp>
+      <p:sp>
+        <p:nvSpPr>
+          <p:cNvPr id="6" name="Callout: Line 5">
+            <a:extLst>
+              <a:ext uri="{FF2B5EF4-FFF2-40B4-BE49-F238E27FC236}">
+                <a16:creationId xmlns:a16="http://schemas.microsoft.com/office/drawing/2014/main" id="{932076F7-9D5F-2CDA-42D4-DAAA8B96B1F2}"/>
+              </a:ext>
+            </a:extLst>
+          </p:cNvPr>
+          <p:cNvSpPr/>
+          <p:nvPr/>
+        </p:nvSpPr>
+        <p:spPr>
+          <a:xfrm>
+            <a:off x="4847390" y="2612715"/>
+            <a:ext cx="2895600" cy="590547"/>
+          </a:xfrm>
+          <a:prstGeom prst="borderCallout1">
+            <a:avLst>
+              <a:gd name="adj1" fmla="val 104990"/>
+              <a:gd name="adj2" fmla="val 45231"/>
+              <a:gd name="adj3" fmla="val 339859"/>
+              <a:gd name="adj4" fmla="val 42413"/>
+            </a:avLst>
+          </a:prstGeom>
+        </p:spPr>
+        <p:style>
+          <a:lnRef idx="1">
+            <a:schemeClr val="accent1"/>
+          </a:lnRef>
+          <a:fillRef idx="3">
+            <a:schemeClr val="accent1"/>
+          </a:fillRef>
+          <a:effectRef idx="2">
+            <a:schemeClr val="accent1"/>
+          </a:effectRef>
+          <a:fontRef idx="minor">
+            <a:schemeClr val="lt1"/>
+          </a:fontRef>
+        </p:style>
+        <p:txBody>
+          <a:bodyPr rtlCol="0" anchor="ctr"/>
+          <a:lstStyle/>
+          <a:p>
+            <a:pPr lvl="1"/>
+            <a:r>
+              <a:rPr lang="en-US" altLang="en-US" sz="1800" dirty="0">
+                <a:solidFill>
+                  <a:schemeClr val="tx1"/>
+                </a:solidFill>
+                <a:ea typeface="ＭＳ Ｐゴシック" panose="020B0600070205080204" pitchFamily="34" charset="-128"/>
+              </a:rPr>
+              <a:t>Properties (style, event handler…)</a:t>
+            </a:r>
+          </a:p>
+        </p:txBody>
+      </p:sp>
+      <p:sp>
+        <p:nvSpPr>
+          <p:cNvPr id="7" name="Callout: Line 6">
+            <a:extLst>
+              <a:ext uri="{FF2B5EF4-FFF2-40B4-BE49-F238E27FC236}">
+                <a16:creationId xmlns:a16="http://schemas.microsoft.com/office/drawing/2014/main" id="{7C726BD1-9D5A-381D-1950-58D59FD94C52}"/>
+              </a:ext>
+            </a:extLst>
+          </p:cNvPr>
+          <p:cNvSpPr/>
+          <p:nvPr/>
+        </p:nvSpPr>
+        <p:spPr>
+          <a:xfrm>
+            <a:off x="8608671" y="2585744"/>
+            <a:ext cx="3124200" cy="673113"/>
+          </a:xfrm>
+          <a:prstGeom prst="borderCallout1">
+            <a:avLst>
+              <a:gd name="adj1" fmla="val 108168"/>
+              <a:gd name="adj2" fmla="val 49833"/>
+              <a:gd name="adj3" fmla="val 296494"/>
+              <a:gd name="adj4" fmla="val -8694"/>
+            </a:avLst>
+          </a:prstGeom>
+        </p:spPr>
+        <p:style>
+          <a:lnRef idx="1">
+            <a:schemeClr val="accent1"/>
+          </a:lnRef>
+          <a:fillRef idx="3">
+            <a:schemeClr val="accent1"/>
+          </a:fillRef>
+          <a:effectRef idx="2">
+            <a:schemeClr val="accent1"/>
+          </a:effectRef>
+          <a:fontRef idx="minor">
+            <a:schemeClr val="lt1"/>
+          </a:fontRef>
+        </p:style>
+        <p:txBody>
+          <a:bodyPr rtlCol="0" anchor="ctr"/>
+          <a:lstStyle/>
+          <a:p>
+            <a:pPr lvl="1"/>
+            <a:r>
+              <a:rPr lang="en-US" altLang="en-US" sz="1800" dirty="0">
+                <a:solidFill>
+                  <a:schemeClr val="tx1"/>
+                </a:solidFill>
+                <a:ea typeface="ＭＳ Ｐゴシック" panose="020B0600070205080204" pitchFamily="34" charset="-128"/>
+              </a:rPr>
+              <a:t>Children(0 to many child elements)</a:t>
+            </a:r>
+          </a:p>
+        </p:txBody>
+      </p:sp>
+      <p:pic>
+        <p:nvPicPr>
+          <p:cNvPr id="9" name="Picture 8">
+            <a:extLst>
+              <a:ext uri="{FF2B5EF4-FFF2-40B4-BE49-F238E27FC236}">
+                <a16:creationId xmlns:a16="http://schemas.microsoft.com/office/drawing/2014/main" id="{9EBDC0DF-ABA8-4953-FFF4-D38F89E6ADB2}"/>
+              </a:ext>
+            </a:extLst>
+          </p:cNvPr>
+          <p:cNvPicPr>
+            <a:picLocks noChangeAspect="1"/>
+          </p:cNvPicPr>
+          <p:nvPr/>
+        </p:nvPicPr>
+        <p:blipFill>
+          <a:blip r:embed="rId4"/>
+          <a:stretch>
+            <a:fillRect/>
+          </a:stretch>
+        </p:blipFill>
+        <p:spPr>
+          <a:xfrm>
+            <a:off x="640466" y="6016958"/>
+            <a:ext cx="9027811" cy="783502"/>
+          </a:xfrm>
+          <a:prstGeom prst="rect">
+            <a:avLst/>
+          </a:prstGeom>
+        </p:spPr>
+      </p:pic>
+      <p:sp>
+        <p:nvSpPr>
+          <p:cNvPr id="10" name="Callout: Line 9">
+            <a:extLst>
+              <a:ext uri="{FF2B5EF4-FFF2-40B4-BE49-F238E27FC236}">
+                <a16:creationId xmlns:a16="http://schemas.microsoft.com/office/drawing/2014/main" id="{B1FB3F51-14C0-2C76-7D76-624E5CDE394F}"/>
+              </a:ext>
+            </a:extLst>
+          </p:cNvPr>
+          <p:cNvSpPr/>
+          <p:nvPr/>
+        </p:nvSpPr>
+        <p:spPr>
+          <a:xfrm>
+            <a:off x="6508516" y="5275048"/>
+            <a:ext cx="4235684" cy="673113"/>
+          </a:xfrm>
+          <a:prstGeom prst="borderCallout1">
+            <a:avLst>
+              <a:gd name="adj1" fmla="val 108168"/>
+              <a:gd name="adj2" fmla="val 49833"/>
+              <a:gd name="adj3" fmla="val 150082"/>
+              <a:gd name="adj4" fmla="val 22851"/>
+            </a:avLst>
+          </a:prstGeom>
+        </p:spPr>
+        <p:style>
+          <a:lnRef idx="1">
+            <a:schemeClr val="accent1"/>
+          </a:lnRef>
+          <a:fillRef idx="3">
+            <a:schemeClr val="accent1"/>
+          </a:fillRef>
+          <a:effectRef idx="2">
+            <a:schemeClr val="accent1"/>
+          </a:effectRef>
+          <a:fontRef idx="minor">
+            <a:schemeClr val="lt1"/>
+          </a:fontRef>
+        </p:style>
+        <p:txBody>
+          <a:bodyPr rtlCol="0" anchor="ctr"/>
+          <a:lstStyle/>
+          <a:p>
+            <a:pPr lvl="1"/>
+            <a:r>
+              <a:rPr lang="en-US" altLang="en-US" sz="1800" dirty="0">
+                <a:solidFill>
+                  <a:schemeClr val="tx1"/>
+                </a:solidFill>
+                <a:ea typeface="ＭＳ Ｐゴシック" panose="020B0600070205080204" pitchFamily="34" charset="-128"/>
+              </a:rPr>
+              <a:t>DOM element on which to render your React Root Element</a:t>
+            </a:r>
+          </a:p>
+        </p:txBody>
+      </p:sp>
+    </p:spTree>
+  </p:cSld>
+  <p:clrMapOvr>
+    <a:masterClrMapping/>
+  </p:clrMapOvr>
+  <p:timing>
+    <p:tnLst>
+      <p:par>
+        <p:cTn id="1" dur="indefinite" restart="never" nodeType="tmRoot">
+          <p:childTnLst>
+            <p:seq concurrent="1" nextAc="seek">
+              <p:cTn id="2" dur="indefinite" nodeType="mainSeq">
+                <p:childTnLst>
+                  <p:par>
+                    <p:cTn id="3" fill="hold" nodeType="clickPar">
+                      <p:stCondLst>
+                        <p:cond delay="indefinite"/>
+                      </p:stCondLst>
+                      <p:childTnLst>
+                        <p:par>
+                          <p:cTn id="4" fill="hold" nodeType="withGroup">
+                            <p:stCondLst>
+                              <p:cond delay="0"/>
+                            </p:stCondLst>
+                            <p:childTnLst>
+                              <p:par>
+                                <p:cTn id="5" presetID="1" presetClass="entr" presetSubtype="0" fill="hold" nodeType="clickEffect">
+                                  <p:stCondLst>
+                                    <p:cond delay="0"/>
+                                  </p:stCondLst>
+                                  <p:childTnLst>
+                                    <p:set>
+                                      <p:cBhvr>
+                                        <p:cTn id="6" dur="1" fill="hold">
+                                          <p:stCondLst>
+                                            <p:cond delay="0"/>
+                                          </p:stCondLst>
+                                        </p:cTn>
+                                        <p:tgtEl>
+                                          <p:spTgt spid="20482">
+                                            <p:txEl>
+                                              <p:pRg st="2" end="2"/>
+                                            </p:txEl>
+                                          </p:spTgt>
+                                        </p:tgtEl>
+                                        <p:attrNameLst>
+                                          <p:attrName>style.visibility</p:attrName>
+                                        </p:attrNameLst>
+                                      </p:cBhvr>
+                                      <p:to>
+                                        <p:strVal val="visible"/>
+                                      </p:to>
+                                    </p:set>
+                                  </p:childTnLst>
+                                </p:cTn>
+                              </p:par>
+                            </p:childTnLst>
+                          </p:cTn>
+                        </p:par>
+                      </p:childTnLst>
+                    </p:cTn>
+                  </p:par>
+                  <p:par>
+                    <p:cTn id="7" fill="hold" nodeType="clickPar">
+                      <p:stCondLst>
+                        <p:cond delay="indefinite"/>
+                      </p:stCondLst>
+                      <p:childTnLst>
+                        <p:par>
+                          <p:cTn id="8" fill="hold" nodeType="withGroup">
+                            <p:stCondLst>
+                              <p:cond delay="0"/>
+                            </p:stCondLst>
+                            <p:childTnLst>
+                              <p:par>
+                                <p:cTn id="9" presetID="1" presetClass="entr" presetSubtype="0" fill="hold" grpId="0" nodeType="clickEffect">
+                                  <p:stCondLst>
+                                    <p:cond delay="0"/>
+                                  </p:stCondLst>
+                                  <p:childTnLst>
+                                    <p:set>
+                                      <p:cBhvr>
+                                        <p:cTn id="10" dur="1" fill="hold">
+                                          <p:stCondLst>
+                                            <p:cond delay="0"/>
+                                          </p:stCondLst>
+                                        </p:cTn>
+                                        <p:tgtEl>
+                                          <p:spTgt spid="4"/>
+                                        </p:tgtEl>
+                                        <p:attrNameLst>
+                                          <p:attrName>style.visibility</p:attrName>
+                                        </p:attrNameLst>
+                                      </p:cBhvr>
+                                      <p:to>
+                                        <p:strVal val="visible"/>
+                                      </p:to>
+                                    </p:set>
+                                  </p:childTnLst>
+                                </p:cTn>
+                              </p:par>
+                              <p:par>
+                                <p:cTn id="11" presetID="1" presetClass="entr" presetSubtype="0" fill="hold" grpId="0" nodeType="withEffect">
+                                  <p:stCondLst>
+                                    <p:cond delay="0"/>
+                                  </p:stCondLst>
+                                  <p:childTnLst>
+                                    <p:set>
+                                      <p:cBhvr>
+                                        <p:cTn id="12" dur="1" fill="hold">
+                                          <p:stCondLst>
+                                            <p:cond delay="0"/>
+                                          </p:stCondLst>
+                                        </p:cTn>
+                                        <p:tgtEl>
+                                          <p:spTgt spid="6"/>
+                                        </p:tgtEl>
+                                        <p:attrNameLst>
+                                          <p:attrName>style.visibility</p:attrName>
+                                        </p:attrNameLst>
+                                      </p:cBhvr>
+                                      <p:to>
+                                        <p:strVal val="visible"/>
+                                      </p:to>
+                                    </p:set>
+                                  </p:childTnLst>
+                                </p:cTn>
+                              </p:par>
+                              <p:par>
+                                <p:cTn id="13" presetID="1" presetClass="entr" presetSubtype="0" fill="hold" grpId="0" nodeType="withEffect">
+                                  <p:stCondLst>
+                                    <p:cond delay="0"/>
+                                  </p:stCondLst>
+                                  <p:childTnLst>
+                                    <p:set>
+                                      <p:cBhvr>
+                                        <p:cTn id="14" dur="1" fill="hold">
+                                          <p:stCondLst>
+                                            <p:cond delay="0"/>
+                                          </p:stCondLst>
+                                        </p:cTn>
+                                        <p:tgtEl>
+                                          <p:spTgt spid="7"/>
+                                        </p:tgtEl>
+                                        <p:attrNameLst>
+                                          <p:attrName>style.visibility</p:attrName>
+                                        </p:attrNameLst>
+                                      </p:cBhvr>
+                                      <p:to>
+                                        <p:strVal val="visible"/>
+                                      </p:to>
+                                    </p:set>
+                                  </p:childTnLst>
+                                </p:cTn>
+                              </p:par>
+                              <p:par>
+                                <p:cTn id="15" presetID="1" presetClass="entr" presetSubtype="0" fill="hold" nodeType="withEffect">
+                                  <p:stCondLst>
+                                    <p:cond delay="0"/>
+                                  </p:stCondLst>
+                                  <p:childTnLst>
+                                    <p:set>
+                                      <p:cBhvr>
+                                        <p:cTn id="16" dur="1" fill="hold">
+                                          <p:stCondLst>
+                                            <p:cond delay="0"/>
+                                          </p:stCondLst>
+                                        </p:cTn>
+                                        <p:tgtEl>
+                                          <p:spTgt spid="3"/>
+                                        </p:tgtEl>
+                                        <p:attrNameLst>
+                                          <p:attrName>style.visibility</p:attrName>
+                                        </p:attrNameLst>
+                                      </p:cBhvr>
+                                      <p:to>
+                                        <p:strVal val="visible"/>
+                                      </p:to>
+                                    </p:set>
+                                  </p:childTnLst>
+                                </p:cTn>
+                              </p:par>
+                            </p:childTnLst>
+                          </p:cTn>
+                        </p:par>
+                      </p:childTnLst>
+                    </p:cTn>
+                  </p:par>
+                  <p:par>
+                    <p:cTn id="17" fill="hold">
+                      <p:stCondLst>
+                        <p:cond delay="indefinite"/>
+                      </p:stCondLst>
+                      <p:childTnLst>
+                        <p:par>
+                          <p:cTn id="18" fill="hold">
+                            <p:stCondLst>
+                              <p:cond delay="0"/>
+                            </p:stCondLst>
+                            <p:childTnLst>
+                              <p:par>
+                                <p:cTn id="19" presetID="1" presetClass="entr" presetSubtype="0" fill="hold" nodeType="clickEffect">
+                                  <p:stCondLst>
+                                    <p:cond delay="0"/>
+                                  </p:stCondLst>
+                                  <p:childTnLst>
+                                    <p:set>
+                                      <p:cBhvr>
+                                        <p:cTn id="20" dur="1" fill="hold">
+                                          <p:stCondLst>
+                                            <p:cond delay="0"/>
+                                          </p:stCondLst>
+                                        </p:cTn>
+                                        <p:tgtEl>
+                                          <p:spTgt spid="20482">
+                                            <p:txEl>
+                                              <p:pRg st="8" end="8"/>
+                                            </p:txEl>
+                                          </p:spTgt>
+                                        </p:tgtEl>
+                                        <p:attrNameLst>
+                                          <p:attrName>style.visibility</p:attrName>
+                                        </p:attrNameLst>
+                                      </p:cBhvr>
+                                      <p:to>
+                                        <p:strVal val="visible"/>
+                                      </p:to>
+                                    </p:set>
+                                  </p:childTnLst>
+                                </p:cTn>
+                              </p:par>
+                            </p:childTnLst>
+                          </p:cTn>
+                        </p:par>
+                      </p:childTnLst>
+                    </p:cTn>
+                  </p:par>
+                  <p:par>
+                    <p:cTn id="21" fill="hold" nodeType="clickPar">
+                      <p:stCondLst>
+                        <p:cond delay="indefinite"/>
+                      </p:stCondLst>
+                      <p:childTnLst>
+                        <p:par>
+                          <p:cTn id="22" fill="hold" nodeType="withGroup">
+                            <p:stCondLst>
+                              <p:cond delay="0"/>
+                            </p:stCondLst>
+                            <p:childTnLst>
+                              <p:par>
+                                <p:cTn id="23" presetID="1" presetClass="entr" presetSubtype="0" fill="hold" nodeType="clickEffect">
+                                  <p:stCondLst>
+                                    <p:cond delay="0"/>
+                                  </p:stCondLst>
+                                  <p:childTnLst>
+                                    <p:set>
+                                      <p:cBhvr>
+                                        <p:cTn id="24" dur="1" fill="hold">
+                                          <p:stCondLst>
+                                            <p:cond delay="0"/>
+                                          </p:stCondLst>
+                                        </p:cTn>
+                                        <p:tgtEl>
+                                          <p:spTgt spid="20482">
+                                            <p:txEl>
+                                              <p:pRg st="9" end="9"/>
+                                            </p:txEl>
+                                          </p:spTgt>
+                                        </p:tgtEl>
+                                        <p:attrNameLst>
+                                          <p:attrName>style.visibility</p:attrName>
+                                        </p:attrNameLst>
+                                      </p:cBhvr>
+                                      <p:to>
+                                        <p:strVal val="visible"/>
+                                      </p:to>
+                                    </p:set>
+                                  </p:childTnLst>
+                                </p:cTn>
+                              </p:par>
+                            </p:childTnLst>
+                          </p:cTn>
+                        </p:par>
+                      </p:childTnLst>
+                    </p:cTn>
+                  </p:par>
+                  <p:par>
+                    <p:cTn id="25" fill="hold">
+                      <p:stCondLst>
+                        <p:cond delay="indefinite"/>
+                      </p:stCondLst>
+                      <p:childTnLst>
+                        <p:par>
+                          <p:cTn id="26" fill="hold">
+                            <p:stCondLst>
+                              <p:cond delay="0"/>
+                            </p:stCondLst>
+                            <p:childTnLst>
+                              <p:par>
+                                <p:cTn id="27" presetID="1" presetClass="entr" presetSubtype="0" fill="hold" grpId="0" nodeType="clickEffect">
+                                  <p:stCondLst>
+                                    <p:cond delay="0"/>
+                                  </p:stCondLst>
+                                  <p:childTnLst>
+                                    <p:set>
+                                      <p:cBhvr>
+                                        <p:cTn id="28" dur="1" fill="hold">
+                                          <p:stCondLst>
+                                            <p:cond delay="0"/>
+                                          </p:stCondLst>
+                                        </p:cTn>
+                                        <p:tgtEl>
+                                          <p:spTgt spid="10"/>
+                                        </p:tgtEl>
+                                        <p:attrNameLst>
+                                          <p:attrName>style.visibility</p:attrName>
+                                        </p:attrNameLst>
+                                      </p:cBhvr>
+                                      <p:to>
+                                        <p:strVal val="visible"/>
+                                      </p:to>
+                                    </p:set>
+                                  </p:childTnLst>
+                                </p:cTn>
+                              </p:par>
+                              <p:par>
+                                <p:cTn id="29" presetID="1" presetClass="entr" presetSubtype="0" fill="hold" nodeType="withEffect">
+                                  <p:stCondLst>
+                                    <p:cond delay="0"/>
+                                  </p:stCondLst>
+                                  <p:childTnLst>
+                                    <p:set>
+                                      <p:cBhvr>
+                                        <p:cTn id="30" dur="1" fill="hold">
+                                          <p:stCondLst>
+                                            <p:cond delay="0"/>
+                                          </p:stCondLst>
+                                        </p:cTn>
+                                        <p:tgtEl>
+                                          <p:spTgt spid="9"/>
+                                        </p:tgtEl>
+                                        <p:attrNameLst>
+                                          <p:attrName>style.visibility</p:attrName>
+                                        </p:attrNameLst>
+                                      </p:cBhvr>
+                                      <p:to>
+                                        <p:strVal val="visible"/>
+                                      </p:to>
+                                    </p:set>
+                                  </p:childTnLst>
+                                </p:cTn>
+                              </p:par>
+                            </p:childTnLst>
+                          </p:cTn>
+                        </p:par>
+                      </p:childTnLst>
+                    </p:cTn>
+                  </p:par>
+                </p:childTnLst>
+              </p:cTn>
+              <p:prevCondLst>
+                <p:cond evt="onPrev" delay="0">
+                  <p:tgtEl>
+                    <p:sldTgt/>
+                  </p:tgtEl>
+                </p:cond>
+              </p:prevCondLst>
+              <p:nextCondLst>
+                <p:cond evt="onNext" delay="0">
+                  <p:tgtEl>
+                    <p:sldTgt/>
+                  </p:tgtEl>
+                </p:cond>
+              </p:nextCondLst>
+            </p:seq>
+          </p:childTnLst>
+        </p:cTn>
+      </p:par>
+    </p:tnLst>
+    <p:bldLst>
+      <p:bldP spid="4" grpId="0" animBg="1"/>
+      <p:bldP spid="6" grpId="0" animBg="1"/>
+      <p:bldP spid="7" grpId="0" animBg="1"/>
+      <p:bldP spid="10" grpId="0" animBg="1"/>
+    </p:bldLst>
+  </p:timing>
 </p:sld>
 </file>
 
